--- a/LOCAL_CONTACT_Software_Engineering_Presentation.pptx
+++ b/LOCAL_CONTACT_Software_Engineering_Presentation.pptx
@@ -518,7 +518,7 @@
           </a:p>
           <a:p>
             <a:r>
-              <a:t>نرحب بأستاذ هندسة البرمجيات ولجنة التحكيم. نستعرض اليوم منهجية هندسة البرمجيات المطبقة في مشروع LOCAL CONTACT. عملنا على تحليل المتطلبات، تثبيت خط الأساس، إدارة التغيير، مصفوفة التتبع، والاختبارات الآلية. يقدم العرض فريق العمل: مشعل حاجب، قحطان، محمد العيدروس، أواب النزيلي، ومحمد العواضي.</a:t>
+              <a:t>نرحب بأستاذ هندسة البرمجيات. نستعرض المنهجية الهندسية الصارمة المطبقة في نظام LOCAL CONTACT: المتطلبات، خط الأساس، مصفوفة التتبع، الاختبارات، وإدارة التغيير. يقدم العرض: مشعل حاجب، قحطان، محمد العيدروس، أواب النزيلي، ومحمد العواضي.</a:t>
             </a:r>
           </a:p>
         </p:txBody>
@@ -593,7 +593,7 @@
           </a:p>
           <a:p>
             <a:r>
-              <a:t>نستعرض منظومة الأدوات الهندسية: نستخدم Gradle 9.4 و Kotlin 2.2 و KSP لمعالجة الرموز البرمجية بسرعة، مع ضبط build.gradle.kts لتوليد APK سليم ومختبر والتكامل الكامل مع Git.</a:t>
+              <a:t>منظومة الأدوات: نستخدم Gradle 9.4 و Kotlin 2.2 و KSP لتوليد الأكواد البرمجية بسرعة وأمان، مع ضبط كامل لإصدارات المكتبات في libs.versions.toml لضمان استقرار البناء.</a:t>
             </a:r>
           </a:p>
         </p:txBody>
@@ -668,7 +668,7 @@
           </a:p>
           <a:p>
             <a:r>
-              <a:t>نبيّن للأستاذ النزاهة الهندسية: اعترفنا بالقيود صراحة؛ ميزة الحذف شبكياً غير موجودة ووثقناها كـ Missing، وفحص سلامة الملف الكامل مقترح مستقبلي، وقيود عزل الراوتر وثقناها ووضعنا مسح الـ Subnet كبديل. هندسة البرمجيات تعني الشفافية والوعي بالمخاطر.</a:t>
+              <a:t>إدارة المخاطر: اعترفنا بالقيود بشفافية: ميزة الحذف شبكياً غير منفذة ووثقناها كـ Missing، وفحص تجزئة الملف الكامل مقترح مستقبلي، ووضعنا مسح الشبكة كحل لعزل الراوتر.</a:t>
             </a:r>
           </a:p>
         </p:txBody>
@@ -743,7 +743,7 @@
           </a:p>
           <a:p>
             <a:r>
-              <a:t>نختم المناقشة: فرضنا الانضباط الهندسي الكامل عبر وثائق SRS، خط الأساس، مصفوفة التتبع، وإدارة التغيير الآمنة مع 33 اختباراً ناجحاً. ووضعنا خارطة طريق واضحة لتفكيك الكلاسات واختبار الأجهزة الحقيقية مستقبلاً. نشكركم على حسن الاستماع ومستعدون للإجابة عن أسئلتكم.</a:t>
+              <a:t>الخاتمة الهندسية: لخصنا الإنجاز في الانضباط المنهجي (SRS، Baseline، RTM) و 33 اختباراً مؤتمتاً وإدارة التغيير الآمنة، مع خارطة طريق واضحة للمستقبل. نشكركم على حسن الاستماع.</a:t>
             </a:r>
           </a:p>
         </p:txBody>
@@ -818,7 +818,7 @@
           </a:p>
           <a:p>
             <a:r>
-              <a:t>نوضح هنا للأستاذ نقطة الصفر: المشروع بدأ كنموذج أولي بدون هندسة برمجيات: لا وثيقة SRS، لا خط أساس، وكلاسات ضخمة جداً انتهكت مبدأ Single Responsibility. هذه الفجوات هي التي استوجبت التدخل الهندسي لإعادة الهيكلة.</a:t>
+              <a:t>نستعرض للأستاذ حالة البداية: وجدنا تطبيقاً يعمل كنموذج أولي لكنه يفتقر للمنهجية الهندسية: لا وثيقة SRS، لا خط أساس، ولا اختبارات، مع وجود كلاسات ضخمة جداً. هذا التشخيص هو ما قاد خطتنا الهندسية.</a:t>
             </a:r>
           </a:p>
         </p:txBody>
@@ -893,7 +893,7 @@
           </a:p>
           <a:p>
             <a:r>
-              <a:t>نشرح للأستاذ وثيقة SRS المكونة من 622 سطراً. ركزنا فيها على تصنيف المتطلبات إلى 5 مستويات لفصل ما هو رسمي عما هو مقترح أو مفقود، ووثقنا 31 متطلباً وظيفياً و 15 قصة مستخدم مع معايير قبول دقيقة.</a:t>
+              <a:t>هندسة المتطلبات: وثيقة الـ SRS المكونة من 622 سطراً حددت 31 متطلباً و 15 قصة مستخدم و 28 معيار قبول، واعتمدت نموذج تصنيف خماسي صارم يمنع الوعود غير الواقعية.</a:t>
             </a:r>
           </a:p>
         </p:txBody>
@@ -968,7 +968,7 @@
           </a:p>
           <a:p>
             <a:r>
-              <a:t>نبيّن للأستاذ دور خط الأساس: قمنا بتثبيت الـ Commit رقم 7111182 وتوثيق بيئة البناء بالكامل في Baseline.md. هذا الإجراء يحقق التكرارية Reproducibility ويمنع حدوث انزلاق في نطاق العمل مع إقرار صريح بحدود التحقق.</a:t>
+              <a:t>خط الأساس البرمجي: ثبّتنا الـ Commit رقم 7111182 في Baseline.md، وحددنا أدوات البناء (Gradle 9.4 و Kotlin 2.2) لضمان تكرارية البناء ومنع انزلاق النطاق.</a:t>
             </a:r>
           </a:p>
         </p:txBody>
@@ -1043,7 +1043,7 @@
           </a:p>
           <a:p>
             <a:r>
-              <a:t>نستعرض معمارية النظام: كل هاتف يعمل كعميل وخادم في نفس الوقت P2P. قسّمنا النظام لأربع طبقات معمارية واضحة: Presentation بـ Jetpack Compose، و Coordination بـ ViewModel، ومحركات شبكة معزولة لكل نوع بيانات، وتخزين محلي بـ Room.</a:t>
+              <a:t>المعمارية اللامركزية: قسّمنا النظام لأربع طبقات معمارية متكاملة: واجهات Compose، منسق ViewModel، محركات شبكة معزولة لكل نوع بيانات، وتخزين محلي بـ Room.</a:t>
             </a:r>
           </a:p>
         </p:txBody>
@@ -1118,7 +1118,7 @@
           </a:p>
           <a:p>
             <a:r>
-              <a:t>نناقش هنا الروائح المعمارية بشفافية: رصدنا تضخم LocalP2PEngine (أكثر من 2400 سطر) و MainViewModel، ووضحنا انتهاكها لمبدأ SRP. وطبقنا مبدأ DIP عبر KeyProvider لحل مشكلة الاقتران، ووضعنا خطة واضحة لتفكيك هذه الكلاسات مستقبلاً.</a:t>
+              <a:t>الروائح المعمارية: رصدنا تضخم الكلاسات (أكثر من 2400 سطر) وانتهاكها لـ SRP. طبقنا مبدأ Dependency Inversion عبر KeyProvider لحل مشكلة الاقتران، ووضعنا خطة تفكيك واضحة.</a:t>
             </a:r>
           </a:p>
         </p:txBody>
@@ -1193,7 +1193,7 @@
           </a:p>
           <a:p>
             <a:r>
-              <a:t>نستعرض للأستاذ مصفوفة تتبع المتطلبات RTM في ملف TraceabilityMatrix.md المكون من 324 سطراً. تربط المصفوفة 31 متطلباً وظيفياً بالكود المصدري الدقيق، وتفصل بين ما تم اختباره على JVM وما هو مبني ويحتاج أجهزة، وما هو مفقود وموثق كفجوة.</a:t>
+              <a:t>مصفوفة التتبع RTM: تربط المتطلبات بالكود المصدري ومعايير القبول بدقة، وتفصل بأمانة بين ما تم اختباره على JVM وما هو مبني ويحتاج أجهزة، وما هو مفقود وموثق كفجوة.</a:t>
             </a:r>
           </a:p>
         </p:txBody>
@@ -1268,7 +1268,7 @@
           </a:p>
           <a:p>
             <a:r>
-              <a:t>نشرح هنا إدارة التغيير: عند ترقية التشفير، طبقنا نمط Provider وعزلنا مسؤولية المفتاح في KeyProvider.kt مع الحفاظ على التوافق العكسي في LegacyStaticKeyProvider. النتيجة الهندسية: صفر تعديلات كاسرة في كود الشبكة والواجهات القديمة.</a:t>
+              <a:t>إدارة التغيير: عند ترقية التشفير، طبقنا نمط Provider وعزلنا إدارة المفاتيح مع بناء مزود للتوافق العكسي. النتيجة: صفر أخطاء كاسرة في كود الشبكة والواجهات القديمة.</a:t>
             </a:r>
           </a:p>
         </p:txBody>
@@ -1343,7 +1343,7 @@
           </a:p>
           <a:p>
             <a:r>
-              <a:t>نؤكد للأستاذ على استراتيجية ضمان الجودة: بنينا 33 اختبار وحدة آلي تفحص المحركات الحساسة وتنجح بنسبة 100%. واختتمنا بالتمييز الأكاديمي: الاختبارات تثبت المنطق البرمجي، لكن إثبات الأداء الشبكي التام يتطلب فحصاً على أجهزة حقيقية.</a:t>
+              <a:t>استراتيجية الاختبارات: بنينا 33 اختبار وحدة آلي تفحص المحركات الحساسة وتنجح بنسبة 100%. وميزنا أكاديمياً بأنها تثبت المنطق البرمجي، واختبار الأجهزة الحقيقية خطوة مستقبلية.</a:t>
             </a:r>
           </a:p>
         </p:txBody>
@@ -4400,7 +4400,7 @@
         </p:nvSpPr>
         <p:spPr>
           <a:xfrm>
-            <a:off x="822960" y="640080"/>
+            <a:off x="822960" y="548640"/>
             <a:ext cx="10515600" cy="411480"/>
           </a:xfrm>
           <a:prstGeom prst="rect">
@@ -4414,16 +4414,24 @@
           </a:bodyPr>
           <a:lstStyle/>
           <a:p>
-            <a:pPr>
-              <a:defRPr sz="1500" b="1">
+            <a:pPr algn="r" rtl="1"/>
+            <a:r>
+              <a:rPr sz="1500" b="1" lang="ar-SA" rtl="1">
                 <a:solidFill>
                   <a:srgbClr val="1E40AF"/>
                 </a:solidFill>
                 <a:latin typeface="Arial"/>
-              </a:defRPr>
-            </a:pPr>
-            <a:r>
-              <a:t>LOCAL CONTACT  •  Offline Local P2P Communication</a:t>
+              </a:rPr>
+              <a:t>مشروع التخرج الأكاديمي: </a:t>
+            </a:r>
+            <a:r>
+              <a:rPr sz="1600" b="1" lang="en-US" rtl="0">
+                <a:solidFill>
+                  <a:srgbClr val="0F2B5C"/>
+                </a:solidFill>
+                <a:latin typeface="Consolas"/>
+              </a:rPr>
+              <a:t>LOCAL CONTACT</a:t>
             </a:r>
           </a:p>
         </p:txBody>
@@ -4436,44 +4444,8 @@
         </p:nvSpPr>
         <p:spPr>
           <a:xfrm>
-            <a:off x="822960" y="1143000"/>
-            <a:ext cx="10515600" cy="1005840"/>
-          </a:xfrm>
-          <a:prstGeom prst="rect">
-            <a:avLst/>
-          </a:prstGeom>
-          <a:noFill/>
-        </p:spPr>
-        <p:txBody>
-          <a:bodyPr wrap="square">
-            <a:spAutoFit/>
-          </a:bodyPr>
-          <a:lstStyle/>
-          <a:p>
-            <a:pPr>
-              <a:defRPr sz="3600" b="1">
-                <a:solidFill>
-                  <a:srgbClr val="0F2B5C"/>
-                </a:solidFill>
-                <a:latin typeface="Arial"/>
-              </a:defRPr>
-            </a:pPr>
-            <a:r>
-              <a:t>هندسة البرمجيات في مشروع LOCAL CONTACT</a:t>
-            </a:r>
-          </a:p>
-        </p:txBody>
-      </p:sp>
-      <p:sp>
-        <p:nvSpPr>
-          <p:cNvPr id="5" name="TextBox 4"/>
-          <p:cNvSpPr txBox="1"/>
-          <p:nvPr/>
-        </p:nvSpPr>
-        <p:spPr>
-          <a:xfrm>
-            <a:off x="822960" y="2148840"/>
-            <a:ext cx="10515600" cy="502920"/>
+            <a:off x="822960" y="1005840"/>
+            <a:ext cx="10515600" cy="960120"/>
           </a:xfrm>
           <a:prstGeom prst="rect">
             <a:avLst/>
@@ -4486,16 +4458,50 @@
           </a:bodyPr>
           <a:lstStyle/>
           <a:p>
-            <a:pPr>
-              <a:defRPr sz="1800" b="1">
+            <a:pPr algn="r" rtl="1"/>
+            <a:r>
+              <a:rPr sz="3600" b="1" lang="ar-SA" rtl="1">
+                <a:solidFill>
+                  <a:srgbClr val="0F2B5C"/>
+                </a:solidFill>
+                <a:latin typeface="Arial"/>
+              </a:rPr>
+              <a:t>هندسة البرمجيات والتصميم المعماري</a:t>
+            </a:r>
+          </a:p>
+        </p:txBody>
+      </p:sp>
+      <p:sp>
+        <p:nvSpPr>
+          <p:cNvPr id="5" name="TextBox 4"/>
+          <p:cNvSpPr txBox="1"/>
+          <p:nvPr/>
+        </p:nvSpPr>
+        <p:spPr>
+          <a:xfrm>
+            <a:off x="822960" y="2011680"/>
+            <a:ext cx="10515600" cy="457200"/>
+          </a:xfrm>
+          <a:prstGeom prst="rect">
+            <a:avLst/>
+          </a:prstGeom>
+          <a:noFill/>
+        </p:spPr>
+        <p:txBody>
+          <a:bodyPr wrap="none">
+            <a:spAutoFit/>
+          </a:bodyPr>
+          <a:lstStyle/>
+          <a:p>
+            <a:pPr algn="r" rtl="1"/>
+            <a:r>
+              <a:rPr sz="1800" b="1" lang="ar-SA" rtl="1">
                 <a:solidFill>
                   <a:srgbClr val="475569"/>
                 </a:solidFill>
                 <a:latin typeface="Arial"/>
-              </a:defRPr>
-            </a:pPr>
-            <a:r>
-              <a:t>تحليل المتطلبات، التصميم المعماري، إدارة التغيير، الاختبارات، والتتبع</a:t>
+              </a:rPr>
+              <a:t>تحليل المتطلبات، خط الأساس، مصفوفة التتبع، وإدارة التغيير</a:t>
             </a:r>
           </a:p>
         </p:txBody>
@@ -4508,8 +4514,8 @@
         </p:nvSpPr>
         <p:spPr>
           <a:xfrm>
-            <a:off x="822960" y="2834640"/>
-            <a:ext cx="10515600" cy="594360"/>
+            <a:off x="822960" y="2651760"/>
+            <a:ext cx="10515600" cy="548640"/>
           </a:xfrm>
           <a:prstGeom prst="roundRect">
             <a:avLst/>
@@ -4541,16 +4547,15 @@
           <a:bodyPr rtlCol="0" anchor="ctr"/>
           <a:lstStyle/>
           <a:p>
-            <a:pPr algn="ctr">
-              <a:defRPr sz="1300" b="1">
+            <a:pPr algn="ctr" rtl="0"/>
+            <a:r>
+              <a:rPr sz="1300" b="1" lang="en-US" rtl="0">
                 <a:solidFill>
                   <a:srgbClr val="0F2B5C"/>
                 </a:solidFill>
-                <a:latin typeface="Arial"/>
-              </a:defRPr>
-            </a:pPr>
-            <a:r>
-              <a:t>🔒 المسار الأكاديمي: مبادئ هندسة البرمجيات وإدارة دورة حياة النظم (Software Engineering)  |  Android SDK 36  |  Kotlin 2.2  |  No Central Servers</a:t>
+                <a:latin typeface="Consolas"/>
+              </a:rPr>
+              <a:t>Offline Local P2P Communication  |  Software Engineering &amp; System Life Cycle</a:t>
             </a:r>
           </a:p>
         </p:txBody>
@@ -4563,8 +4568,8 @@
         </p:nvSpPr>
         <p:spPr>
           <a:xfrm>
-            <a:off x="822960" y="3703320"/>
-            <a:ext cx="10515600" cy="2240280"/>
+            <a:off x="822960" y="3611880"/>
+            <a:ext cx="10515600" cy="2423160"/>
           </a:xfrm>
           <a:prstGeom prst="roundRect">
             <a:avLst/>
@@ -4593,18 +4598,17 @@
           </a:fontRef>
         </p:style>
         <p:txBody>
-          <a:bodyPr rtlCol="0" anchor="ctr" wrap="square"/>
-          <a:lstStyle/>
-          <a:p>
-            <a:pPr algn="ctr">
-              <a:defRPr sz="1600" b="1">
+          <a:bodyPr rtlCol="0" anchor="ctr"/>
+          <a:lstStyle/>
+          <a:p>
+            <a:pPr algn="r" rtl="1"/>
+            <a:r>
+              <a:rPr sz="1800" b="1" lang="ar-SA" rtl="1">
                 <a:solidFill>
                   <a:srgbClr val="0F2B5C"/>
                 </a:solidFill>
                 <a:latin typeface="Arial"/>
-              </a:defRPr>
-            </a:pPr>
-            <a:r>
+              </a:rPr>
               <a:t>إعداد الطلاب:</a:t>
             </a:r>
           </a:p>
@@ -4618,8 +4622,8 @@
         </p:nvSpPr>
         <p:spPr>
           <a:xfrm>
-            <a:off x="1097280" y="4480560"/>
-            <a:ext cx="1874519" cy="822960"/>
+            <a:off x="9281160" y="4434840"/>
+            <a:ext cx="1920240" cy="822960"/>
           </a:xfrm>
           <a:prstGeom prst="roundRect">
             <a:avLst/>
@@ -4627,7 +4631,7 @@
           <a:solidFill>
             <a:srgbClr val="FFFFFF"/>
           </a:solidFill>
-          <a:ln w="12700">
+          <a:ln w="19050">
             <a:solidFill>
               <a:srgbClr val="CBD5E1"/>
             </a:solidFill>
@@ -4651,15 +4655,14 @@
           <a:bodyPr rtlCol="0" anchor="ctr"/>
           <a:lstStyle/>
           <a:p>
-            <a:pPr algn="ctr">
-              <a:defRPr sz="1500" b="1">
+            <a:pPr algn="ctr" rtl="1"/>
+            <a:r>
+              <a:rPr sz="1500" b="1" lang="ar-SA" rtl="1">
                 <a:solidFill>
                   <a:srgbClr val="0F2B5C"/>
                 </a:solidFill>
                 <a:latin typeface="Arial"/>
-              </a:defRPr>
-            </a:pPr>
-            <a:r>
+              </a:rPr>
               <a:t>1. مشعل حاجب</a:t>
             </a:r>
           </a:p>
@@ -4673,8 +4676,8 @@
         </p:nvSpPr>
         <p:spPr>
           <a:xfrm>
-            <a:off x="3154680" y="4480560"/>
-            <a:ext cx="1874519" cy="822960"/>
+            <a:off x="7223760" y="4434840"/>
+            <a:ext cx="1920240" cy="822960"/>
           </a:xfrm>
           <a:prstGeom prst="roundRect">
             <a:avLst/>
@@ -4682,7 +4685,7 @@
           <a:solidFill>
             <a:srgbClr val="FFFFFF"/>
           </a:solidFill>
-          <a:ln w="12700">
+          <a:ln w="19050">
             <a:solidFill>
               <a:srgbClr val="CBD5E1"/>
             </a:solidFill>
@@ -4706,15 +4709,14 @@
           <a:bodyPr rtlCol="0" anchor="ctr"/>
           <a:lstStyle/>
           <a:p>
-            <a:pPr algn="ctr">
-              <a:defRPr sz="1500" b="1">
+            <a:pPr algn="ctr" rtl="1"/>
+            <a:r>
+              <a:rPr sz="1500" b="1" lang="ar-SA" rtl="1">
                 <a:solidFill>
                   <a:srgbClr val="0F2B5C"/>
                 </a:solidFill>
                 <a:latin typeface="Arial"/>
-              </a:defRPr>
-            </a:pPr>
-            <a:r>
+              </a:rPr>
               <a:t>2. قحطان</a:t>
             </a:r>
           </a:p>
@@ -4728,8 +4730,8 @@
         </p:nvSpPr>
         <p:spPr>
           <a:xfrm>
-            <a:off x="5212080" y="4480560"/>
-            <a:ext cx="1874519" cy="822960"/>
+            <a:off x="5166360" y="4434840"/>
+            <a:ext cx="1920240" cy="822960"/>
           </a:xfrm>
           <a:prstGeom prst="roundRect">
             <a:avLst/>
@@ -4737,7 +4739,7 @@
           <a:solidFill>
             <a:srgbClr val="FFFFFF"/>
           </a:solidFill>
-          <a:ln w="12700">
+          <a:ln w="19050">
             <a:solidFill>
               <a:srgbClr val="CBD5E1"/>
             </a:solidFill>
@@ -4761,15 +4763,14 @@
           <a:bodyPr rtlCol="0" anchor="ctr"/>
           <a:lstStyle/>
           <a:p>
-            <a:pPr algn="ctr">
-              <a:defRPr sz="1500" b="1">
+            <a:pPr algn="ctr" rtl="1"/>
+            <a:r>
+              <a:rPr sz="1500" b="1" lang="ar-SA" rtl="1">
                 <a:solidFill>
                   <a:srgbClr val="0F2B5C"/>
                 </a:solidFill>
                 <a:latin typeface="Arial"/>
-              </a:defRPr>
-            </a:pPr>
-            <a:r>
+              </a:rPr>
               <a:t>3. محمد العيدروس</a:t>
             </a:r>
           </a:p>
@@ -4783,8 +4784,8 @@
         </p:nvSpPr>
         <p:spPr>
           <a:xfrm>
-            <a:off x="7269480" y="4480560"/>
-            <a:ext cx="1874519" cy="822960"/>
+            <a:off x="3108960" y="4434840"/>
+            <a:ext cx="1920240" cy="822960"/>
           </a:xfrm>
           <a:prstGeom prst="roundRect">
             <a:avLst/>
@@ -4792,7 +4793,7 @@
           <a:solidFill>
             <a:srgbClr val="FFFFFF"/>
           </a:solidFill>
-          <a:ln w="12700">
+          <a:ln w="19050">
             <a:solidFill>
               <a:srgbClr val="CBD5E1"/>
             </a:solidFill>
@@ -4816,15 +4817,14 @@
           <a:bodyPr rtlCol="0" anchor="ctr"/>
           <a:lstStyle/>
           <a:p>
-            <a:pPr algn="ctr">
-              <a:defRPr sz="1500" b="1">
+            <a:pPr algn="ctr" rtl="1"/>
+            <a:r>
+              <a:rPr sz="1500" b="1" lang="ar-SA" rtl="1">
                 <a:solidFill>
                   <a:srgbClr val="0F2B5C"/>
                 </a:solidFill>
                 <a:latin typeface="Arial"/>
-              </a:defRPr>
-            </a:pPr>
-            <a:r>
+              </a:rPr>
               <a:t>4. أواب النزيلي</a:t>
             </a:r>
           </a:p>
@@ -4838,8 +4838,8 @@
         </p:nvSpPr>
         <p:spPr>
           <a:xfrm>
-            <a:off x="9326880" y="4480560"/>
-            <a:ext cx="1874519" cy="822960"/>
+            <a:off x="1051560" y="4434840"/>
+            <a:ext cx="1920240" cy="822960"/>
           </a:xfrm>
           <a:prstGeom prst="roundRect">
             <a:avLst/>
@@ -4847,7 +4847,7 @@
           <a:solidFill>
             <a:srgbClr val="FFFFFF"/>
           </a:solidFill>
-          <a:ln w="12700">
+          <a:ln w="19050">
             <a:solidFill>
               <a:srgbClr val="CBD5E1"/>
             </a:solidFill>
@@ -4871,15 +4871,14 @@
           <a:bodyPr rtlCol="0" anchor="ctr"/>
           <a:lstStyle/>
           <a:p>
-            <a:pPr algn="ctr">
-              <a:defRPr sz="1500" b="1">
+            <a:pPr algn="ctr" rtl="1"/>
+            <a:r>
+              <a:rPr sz="1500" b="1" lang="ar-SA" rtl="1">
                 <a:solidFill>
                   <a:srgbClr val="0F2B5C"/>
                 </a:solidFill>
                 <a:latin typeface="Arial"/>
-              </a:defRPr>
-            </a:pPr>
-            <a:r>
+              </a:rPr>
               <a:t>5. محمد العواضي</a:t>
             </a:r>
           </a:p>
@@ -4907,16 +4906,15 @@
           </a:bodyPr>
           <a:lstStyle/>
           <a:p>
-            <a:pPr algn="ctr">
-              <a:defRPr sz="1200">
+            <a:pPr algn="ctr" rtl="1"/>
+            <a:r>
+              <a:rPr sz="1200" b="0" lang="ar-SA" rtl="1">
                 <a:solidFill>
                   <a:srgbClr val="475569"/>
                 </a:solidFill>
                 <a:latin typeface="Arial"/>
-              </a:defRPr>
-            </a:pPr>
-            <a:r>
-              <a:t>المناقشة الأكاديمية الرسمية  •  نسخة العرض المحكمة (Projector Edition)  •  12 شريحة</a:t>
+              </a:rPr>
+              <a:t>العرض النهائي الأكاديمي  •  12 شريحة محكمة</a:t>
             </a:r>
           </a:p>
         </p:txBody>
@@ -4948,13 +4946,13 @@
         <p:spPr>
           <a:xfrm>
             <a:off x="0" y="0"/>
-            <a:ext cx="12191695" cy="91440"/>
+            <a:ext cx="12191695" cy="109728"/>
           </a:xfrm>
           <a:prstGeom prst="rect">
             <a:avLst/>
           </a:prstGeom>
           <a:solidFill>
-            <a:srgbClr val="1E40AF"/>
+            <a:srgbClr val="0F2B5C"/>
           </a:solidFill>
           <a:ln>
             <a:noFill/>
@@ -4990,44 +4988,8 @@
         </p:nvSpPr>
         <p:spPr>
           <a:xfrm>
-            <a:off x="822960" y="228600"/>
-            <a:ext cx="7772400" cy="320040"/>
-          </a:xfrm>
-          <a:prstGeom prst="rect">
-            <a:avLst/>
-          </a:prstGeom>
-          <a:noFill/>
-        </p:spPr>
-        <p:txBody>
-          <a:bodyPr wrap="square">
-            <a:spAutoFit/>
-          </a:bodyPr>
-          <a:lstStyle/>
-          <a:p>
-            <a:pPr>
-              <a:defRPr sz="1300" b="1">
-                <a:solidFill>
-                  <a:srgbClr val="1E40AF"/>
-                </a:solidFill>
-                <a:latin typeface="Arial"/>
-              </a:defRPr>
-            </a:pPr>
-            <a:r>
-              <a:t>LOCAL CONTACT P2P  |  أدوات التطوير والبناء</a:t>
-            </a:r>
-          </a:p>
-        </p:txBody>
-      </p:sp>
-      <p:sp>
-        <p:nvSpPr>
-          <p:cNvPr id="4" name="TextBox 3"/>
-          <p:cNvSpPr txBox="1"/>
-          <p:nvPr/>
-        </p:nvSpPr>
-        <p:spPr>
-          <a:xfrm>
-            <a:off x="10241280" y="6309360"/>
-            <a:ext cx="1188720" cy="365760"/>
+            <a:off x="3200400" y="228600"/>
+            <a:ext cx="8138160" cy="320040"/>
           </a:xfrm>
           <a:prstGeom prst="rect">
             <a:avLst/>
@@ -5040,16 +5002,50 @@
           </a:bodyPr>
           <a:lstStyle/>
           <a:p>
-            <a:pPr algn="r">
-              <a:defRPr sz="1400" b="1">
-                <a:solidFill>
-                  <a:srgbClr val="0F2B5C"/>
-                </a:solidFill>
-                <a:latin typeface="Arial"/>
-              </a:defRPr>
-            </a:pPr>
-            <a:r>
-              <a:t>10 / 12</a:t>
+            <a:pPr algn="r" rtl="1"/>
+            <a:r>
+              <a:rPr sz="1300" b="1" lang="ar-SA" rtl="1">
+                <a:solidFill>
+                  <a:srgbClr val="1E40AF"/>
+                </a:solidFill>
+                <a:latin typeface="Arial"/>
+              </a:rPr>
+              <a:t>مشروع الاتصال المحلي المباشر  •  أدوات التطوير والبناء</a:t>
+            </a:r>
+          </a:p>
+        </p:txBody>
+      </p:sp>
+      <p:sp>
+        <p:nvSpPr>
+          <p:cNvPr id="4" name="TextBox 3"/>
+          <p:cNvSpPr txBox="1"/>
+          <p:nvPr/>
+        </p:nvSpPr>
+        <p:spPr>
+          <a:xfrm>
+            <a:off x="822960" y="228600"/>
+            <a:ext cx="1828800" cy="320040"/>
+          </a:xfrm>
+          <a:prstGeom prst="rect">
+            <a:avLst/>
+          </a:prstGeom>
+          <a:noFill/>
+        </p:spPr>
+        <p:txBody>
+          <a:bodyPr wrap="none">
+            <a:spAutoFit/>
+          </a:bodyPr>
+          <a:lstStyle/>
+          <a:p>
+            <a:pPr algn="l" rtl="0"/>
+            <a:r>
+              <a:rPr sz="1200" b="1" lang="en-US" rtl="0">
+                <a:solidFill>
+                  <a:srgbClr val="475569"/>
+                </a:solidFill>
+                <a:latin typeface="Consolas"/>
+              </a:rPr>
+              <a:t>Slide 10 / 12</a:t>
             </a:r>
           </a:p>
         </p:txBody>
@@ -5062,8 +5058,8 @@
         </p:nvSpPr>
         <p:spPr>
           <a:xfrm>
-            <a:off x="822960" y="594360"/>
-            <a:ext cx="8961120" cy="685800"/>
+            <a:off x="4023360" y="566928"/>
+            <a:ext cx="7315200" cy="685800"/>
           </a:xfrm>
           <a:prstGeom prst="rect">
             <a:avLst/>
@@ -5071,21 +5067,20 @@
           <a:noFill/>
         </p:spPr>
         <p:txBody>
-          <a:bodyPr wrap="square">
+          <a:bodyPr wrap="none">
             <a:spAutoFit/>
           </a:bodyPr>
           <a:lstStyle/>
           <a:p>
-            <a:pPr>
-              <a:defRPr sz="2800" b="1">
+            <a:pPr algn="r" rtl="1"/>
+            <a:r>
+              <a:rPr sz="3000" b="1" lang="ar-SA" rtl="1">
                 <a:solidFill>
                   <a:srgbClr val="0F2B5C"/>
                 </a:solidFill>
                 <a:latin typeface="Arial"/>
-              </a:defRPr>
-            </a:pPr>
-            <a:r>
-              <a:t>منظومة أدوات البناء وتوليد الكود (Engineering Toolchain)</a:t>
+              </a:rPr>
+              <a:t>منظومة أدوات البناء وتوليد الكود</a:t>
             </a:r>
           </a:p>
         </p:txBody>
@@ -5098,8 +5093,8 @@
         </p:nvSpPr>
         <p:spPr>
           <a:xfrm>
-            <a:off x="8961120" y="621792"/>
-            <a:ext cx="2377440" cy="438912"/>
+            <a:off x="822960" y="621792"/>
+            <a:ext cx="3017520" cy="502920"/>
           </a:xfrm>
           <a:prstGeom prst="roundRect">
             <a:avLst/>
@@ -5131,16 +5126,15 @@
           <a:bodyPr rtlCol="0" anchor="ctr"/>
           <a:lstStyle/>
           <a:p>
-            <a:pPr algn="ctr">
-              <a:defRPr sz="1200" b="1">
+            <a:pPr algn="ctr" rtl="0"/>
+            <a:r>
+              <a:rPr sz="1400" b="1" lang="en-US" rtl="0">
                 <a:solidFill>
                   <a:srgbClr val="1E40AF"/>
                 </a:solidFill>
                 <a:latin typeface="Consolas"/>
-              </a:defRPr>
-            </a:pPr>
-            <a:r>
-              <a:t>TOOLCHAIN &amp; BUILD</a:t>
+              </a:rPr>
+              <a:t>Toolchain &amp; Build Pipeline</a:t>
             </a:r>
           </a:p>
         </p:txBody>
@@ -5153,7 +5147,7 @@
         </p:nvSpPr>
         <p:spPr>
           <a:xfrm>
-            <a:off x="822960" y="1353312"/>
+            <a:off x="822960" y="1325880"/>
             <a:ext cx="10515600" cy="18288"/>
           </a:xfrm>
           <a:prstGeom prst="rect">
@@ -5196,8 +5190,8 @@
         </p:nvSpPr>
         <p:spPr>
           <a:xfrm>
-            <a:off x="822960" y="6309360"/>
-            <a:ext cx="7315200" cy="320040"/>
+            <a:off x="822960" y="6355080"/>
+            <a:ext cx="10515600" cy="320040"/>
           </a:xfrm>
           <a:prstGeom prst="rect">
             <a:avLst/>
@@ -5210,16 +5204,15 @@
           </a:bodyPr>
           <a:lstStyle/>
           <a:p>
-            <a:pPr>
-              <a:defRPr sz="1100">
+            <a:pPr algn="r" rtl="1"/>
+            <a:r>
+              <a:rPr sz="1050" b="0" lang="ar-SA" rtl="1">
                 <a:solidFill>
                   <a:srgbClr val="475569"/>
                 </a:solidFill>
                 <a:latin typeface="Arial"/>
-              </a:defRPr>
-            </a:pPr>
-            <a:r>
-              <a:t>مشروع تخرج LOCAL CONTACT — مناقشة أكاديمية محكمة</a:t>
+              </a:rPr>
+              <a:t>مناقشة مشروع التخرج الأكاديمية — نظام اتصال محلي مستقل دون خادم وسيط</a:t>
             </a:r>
           </a:p>
         </p:txBody>
@@ -5232,8 +5225,8 @@
         </p:nvSpPr>
         <p:spPr>
           <a:xfrm>
-            <a:off x="822960" y="1645920"/>
-            <a:ext cx="5120640" cy="2057400"/>
+            <a:off x="6217920" y="1554480"/>
+            <a:ext cx="5120640" cy="1828800"/>
           </a:xfrm>
           <a:prstGeom prst="roundRect">
             <a:avLst/>
@@ -5265,48 +5258,47 @@
           <a:bodyPr rtlCol="0" anchor="ctr" wrap="square"/>
           <a:lstStyle/>
           <a:p>
-            <a:pPr algn="ctr">
-              <a:defRPr sz="1700" b="1">
+            <a:pPr algn="r" rtl="1"/>
+            <a:r>
+              <a:rPr sz="1900" b="1" lang="ar-SA" rtl="1">
                 <a:solidFill>
                   <a:srgbClr val="0F2B5C"/>
                 </a:solidFill>
                 <a:latin typeface="Arial"/>
-              </a:defRPr>
-            </a:pPr>
-            <a:r>
-              <a:t>⚙️ محرك البناء والـ Wrapper</a:t>
-            </a:r>
-          </a:p>
-          <a:p>
-            <a:pPr>
+              </a:rPr>
+              <a:t>محرك البناء المستقل</a:t>
+            </a:r>
+          </a:p>
+          <a:p>
+            <a:pPr algn="r" rtl="0">
               <a:spcBef>
                 <a:spcPts val="300"/>
               </a:spcBef>
-              <a:defRPr sz="1300" b="1">
+            </a:pPr>
+            <a:r>
+              <a:rPr sz="1300" b="1" lang="en-US" rtl="0">
                 <a:solidFill>
                   <a:srgbClr val="1E40AF"/>
                 </a:solidFill>
                 <a:latin typeface="Consolas"/>
-              </a:defRPr>
+              </a:rPr>
+              <a:t>[Gradle 9.4.1 (Kotlin DSL Wrapper)]</a:t>
+            </a:r>
+          </a:p>
+          <a:p>
+            <a:pPr algn="r" rtl="1">
+              <a:spcBef>
+                <a:spcPts val="600"/>
+              </a:spcBef>
             </a:pPr>
             <a:r>
-              <a:t>Gradle 9.4.1 (Kotlin DSL)</a:t>
-            </a:r>
-          </a:p>
-          <a:p>
-            <a:pPr>
-              <a:spcBef>
-                <a:spcPts val="400"/>
-              </a:spcBef>
-              <a:defRPr sz="1500" b="1">
+              <a:rPr sz="1500" b="0" lang="ar-SA" rtl="1">
                 <a:solidFill>
                   <a:srgbClr val="0F172A"/>
                 </a:solidFill>
                 <a:latin typeface="Arial"/>
-              </a:defRPr>
-            </a:pPr>
-            <a:r>
-              <a:t>إدارة دورة حياة البناء، تنزيل التبعيات تلقائياً، وعزل بيئة البناء لضمان التكرارية عبر gradle-wrapper.properties.</a:t>
+              </a:rPr>
+              <a:t>إدارة دورة حياة المشروع والتبعيات البرمجية وعزل بيئة البناء لضمان التكرارية.</a:t>
             </a:r>
           </a:p>
         </p:txBody>
@@ -5319,8 +5311,8 @@
         </p:nvSpPr>
         <p:spPr>
           <a:xfrm>
-            <a:off x="6126480" y="1645920"/>
-            <a:ext cx="5120640" cy="2057400"/>
+            <a:off x="822960" y="1554480"/>
+            <a:ext cx="5120640" cy="1828800"/>
           </a:xfrm>
           <a:prstGeom prst="roundRect">
             <a:avLst/>
@@ -5352,48 +5344,47 @@
           <a:bodyPr rtlCol="0" anchor="ctr" wrap="square"/>
           <a:lstStyle/>
           <a:p>
-            <a:pPr algn="ctr">
-              <a:defRPr sz="1700" b="1">
+            <a:pPr algn="r" rtl="1"/>
+            <a:r>
+              <a:rPr sz="1900" b="1" lang="ar-SA" rtl="1">
                 <a:solidFill>
                   <a:srgbClr val="0F2B5C"/>
                 </a:solidFill>
                 <a:latin typeface="Arial"/>
-              </a:defRPr>
-            </a:pPr>
-            <a:r>
-              <a:t>🤖 مجمع أندرويد الرسمي</a:t>
-            </a:r>
-          </a:p>
-          <a:p>
-            <a:pPr>
+              </a:rPr>
+              <a:t>مجمع أندرويد الرسمي</a:t>
+            </a:r>
+          </a:p>
+          <a:p>
+            <a:pPr algn="r" rtl="0">
               <a:spcBef>
                 <a:spcPts val="300"/>
               </a:spcBef>
-              <a:defRPr sz="1300" b="1">
+            </a:pPr>
+            <a:r>
+              <a:rPr sz="1300" b="1" lang="en-US" rtl="0">
                 <a:solidFill>
                   <a:srgbClr val="1E40AF"/>
                 </a:solidFill>
                 <a:latin typeface="Consolas"/>
-              </a:defRPr>
+              </a:rPr>
+              <a:t>[Android Gradle Plugin 9.1.1 (Sdk 36)]</a:t>
+            </a:r>
+          </a:p>
+          <a:p>
+            <a:pPr algn="r" rtl="1">
+              <a:spcBef>
+                <a:spcPts val="600"/>
+              </a:spcBef>
             </a:pPr>
             <a:r>
-              <a:t>Android Gradle Plugin 9.1.1</a:t>
-            </a:r>
-          </a:p>
-          <a:p>
-            <a:pPr>
-              <a:spcBef>
-                <a:spcPts val="400"/>
-              </a:spcBef>
-              <a:defRPr sz="1500" b="1">
+              <a:rPr sz="1500" b="0" lang="ar-SA" rtl="1">
                 <a:solidFill>
                   <a:srgbClr val="0F172A"/>
                 </a:solidFill>
                 <a:latin typeface="Arial"/>
-              </a:defRPr>
-            </a:pPr>
-            <a:r>
-              <a:t>دعم أحدث واجهات أندرويد 16 (compileSdk 36)، وتصحيح الأرقام الهندية-العربية عبر NormalizeGeneratedDigitsTask.</a:t>
+              </a:rPr>
+              <a:t>دعم أحدث واجهات أندرويد 16 وتصحيح الأرقام الهندية-العربية عبر مهمة مخصصة.</a:t>
             </a:r>
           </a:p>
         </p:txBody>
@@ -5406,8 +5397,8 @@
         </p:nvSpPr>
         <p:spPr>
           <a:xfrm>
-            <a:off x="822960" y="3886200"/>
-            <a:ext cx="5120640" cy="2057400"/>
+            <a:off x="6217920" y="3566160"/>
+            <a:ext cx="5120640" cy="1828800"/>
           </a:xfrm>
           <a:prstGeom prst="roundRect">
             <a:avLst/>
@@ -5439,48 +5430,47 @@
           <a:bodyPr rtlCol="0" anchor="ctr" wrap="square"/>
           <a:lstStyle/>
           <a:p>
-            <a:pPr algn="ctr">
-              <a:defRPr sz="1700" b="1">
+            <a:pPr algn="r" rtl="1"/>
+            <a:r>
+              <a:rPr sz="1900" b="1" lang="ar-SA" rtl="1">
                 <a:solidFill>
                   <a:srgbClr val="0F2B5C"/>
                 </a:solidFill>
                 <a:latin typeface="Arial"/>
-              </a:defRPr>
-            </a:pPr>
-            <a:r>
-              <a:t>💎 لغة البرمجة والتزامن</a:t>
-            </a:r>
-          </a:p>
-          <a:p>
-            <a:pPr>
+              </a:rPr>
+              <a:t>لغة البرمجة والتزامن العالي</a:t>
+            </a:r>
+          </a:p>
+          <a:p>
+            <a:pPr algn="r" rtl="0">
               <a:spcBef>
                 <a:spcPts val="300"/>
               </a:spcBef>
-              <a:defRPr sz="1300" b="1">
-                <a:solidFill>
-                  <a:srgbClr val="1E40AF"/>
+            </a:pPr>
+            <a:r>
+              <a:rPr sz="1300" b="1" lang="en-US" rtl="0">
+                <a:solidFill>
+                  <a:srgbClr val="059669"/>
                 </a:solidFill>
                 <a:latin typeface="Consolas"/>
-              </a:defRPr>
+              </a:rPr>
+              <a:t>[Kotlin 2.2.10 &amp; StateFlow]</a:t>
+            </a:r>
+          </a:p>
+          <a:p>
+            <a:pPr algn="r" rtl="1">
+              <a:spcBef>
+                <a:spcPts val="600"/>
+              </a:spcBef>
             </a:pPr>
             <a:r>
-              <a:t>Kotlin 2.2.10 &amp; Coroutines</a:t>
-            </a:r>
-          </a:p>
-          <a:p>
-            <a:pPr>
-              <a:spcBef>
-                <a:spcPts val="400"/>
-              </a:spcBef>
-              <a:defRPr sz="1500" b="1">
+              <a:rPr sz="1500" b="0" lang="ar-SA" rtl="1">
                 <a:solidFill>
                   <a:srgbClr val="0F172A"/>
                 </a:solidFill>
                 <a:latin typeface="Arial"/>
-              </a:defRPr>
-            </a:pPr>
-            <a:r>
-              <a:t>إدارة غير تزامنية عالية الكفاءة للمقابس والشبكة دون حظر واجهة المستخدم عبر Coroutines و Dispatchers.IO.</a:t>
+              </a:rPr>
+              <a:t>إدارة المقابس وشبكات P2P دون حظر واجهة المستخدم عبر Coroutines غير التزامنية.</a:t>
             </a:r>
           </a:p>
         </p:txBody>
@@ -5493,8 +5483,8 @@
         </p:nvSpPr>
         <p:spPr>
           <a:xfrm>
-            <a:off x="6126480" y="3886200"/>
-            <a:ext cx="5120640" cy="2057400"/>
+            <a:off x="822960" y="3566160"/>
+            <a:ext cx="5120640" cy="1828800"/>
           </a:xfrm>
           <a:prstGeom prst="roundRect">
             <a:avLst/>
@@ -5526,48 +5516,110 @@
           <a:bodyPr rtlCol="0" anchor="ctr" wrap="square"/>
           <a:lstStyle/>
           <a:p>
-            <a:pPr algn="ctr">
-              <a:defRPr sz="1700" b="1">
+            <a:pPr algn="r" rtl="1"/>
+            <a:r>
+              <a:rPr sz="1900" b="1" lang="ar-SA" rtl="1">
                 <a:solidFill>
                   <a:srgbClr val="0F2B5C"/>
                 </a:solidFill>
                 <a:latin typeface="Arial"/>
-              </a:defRPr>
-            </a:pPr>
-            <a:r>
-              <a:t>⚡ معالجة الرموز البرمجية</a:t>
-            </a:r>
-          </a:p>
-          <a:p>
-            <a:pPr>
+              </a:rPr>
+              <a:t>معالجة الرموز أثناء الترجمة</a:t>
+            </a:r>
+          </a:p>
+          <a:p>
+            <a:pPr algn="r" rtl="0">
               <a:spcBef>
                 <a:spcPts val="300"/>
               </a:spcBef>
-              <a:defRPr sz="1300" b="1">
+            </a:pPr>
+            <a:r>
+              <a:rPr sz="1300" b="1" lang="en-US" rtl="0">
+                <a:solidFill>
+                  <a:srgbClr val="059669"/>
+                </a:solidFill>
+                <a:latin typeface="Consolas"/>
+              </a:rPr>
+              <a:t>[KSP (Kotlin Symbol Processing)]</a:t>
+            </a:r>
+          </a:p>
+          <a:p>
+            <a:pPr algn="r" rtl="1">
+              <a:spcBef>
+                <a:spcPts val="600"/>
+              </a:spcBef>
+            </a:pPr>
+            <a:r>
+              <a:rPr sz="1500" b="0" lang="ar-SA" rtl="1">
+                <a:solidFill>
+                  <a:srgbClr val="0F172A"/>
+                </a:solidFill>
+                <a:latin typeface="Arial"/>
+              </a:rPr>
+              <a:t>توليد كود جداول قاعدة البيانات ومحولات البيانات بسرعة فائقة في وقت الترجمة.</a:t>
+            </a:r>
+          </a:p>
+        </p:txBody>
+      </p:sp>
+      <p:sp>
+        <p:nvSpPr>
+          <p:cNvPr id="13" name="Rounded Rectangle 12"/>
+          <p:cNvSpPr/>
+          <p:nvPr/>
+        </p:nvSpPr>
+        <p:spPr>
+          <a:xfrm>
+            <a:off x="822960" y="5623560"/>
+            <a:ext cx="10515600" cy="594360"/>
+          </a:xfrm>
+          <a:prstGeom prst="roundRect">
+            <a:avLst/>
+          </a:prstGeom>
+          <a:solidFill>
+            <a:srgbClr val="F8FAFC"/>
+          </a:solidFill>
+          <a:ln w="12700">
+            <a:solidFill>
+              <a:srgbClr val="CBD5E1"/>
+            </a:solidFill>
+          </a:ln>
+        </p:spPr>
+        <p:style>
+          <a:lnRef idx="1">
+            <a:schemeClr val="accent1"/>
+          </a:lnRef>
+          <a:fillRef idx="3">
+            <a:schemeClr val="accent1"/>
+          </a:fillRef>
+          <a:effectRef idx="2">
+            <a:schemeClr val="accent1"/>
+          </a:effectRef>
+          <a:fontRef idx="minor">
+            <a:schemeClr val="lt1"/>
+          </a:fontRef>
+        </p:style>
+        <p:txBody>
+          <a:bodyPr rtlCol="0" anchor="ctr"/>
+          <a:lstStyle/>
+          <a:p>
+            <a:pPr algn="r" rtl="1"/>
+            <a:r>
+              <a:rPr sz="1200" b="1" lang="ar-SA" rtl="1">
+                <a:solidFill>
+                  <a:srgbClr val="0F2B5C"/>
+                </a:solidFill>
+                <a:latin typeface="Arial"/>
+              </a:rPr>
+              <a:t>المكون البرمجي: ملفات تكوين البناء والتحكم في الإصدارات والتبعيات  |  </a:t>
+            </a:r>
+            <a:r>
+              <a:rPr sz="1200" b="1" lang="en-US" rtl="0">
                 <a:solidFill>
                   <a:srgbClr val="1E40AF"/>
                 </a:solidFill>
                 <a:latin typeface="Consolas"/>
-              </a:defRPr>
-            </a:pPr>
-            <a:r>
-              <a:t>KSP (Kotlin Symbol Processing)</a:t>
-            </a:r>
-          </a:p>
-          <a:p>
-            <a:pPr>
-              <a:spcBef>
-                <a:spcPts val="400"/>
-              </a:spcBef>
-              <a:defRPr sz="1500" b="1">
-                <a:solidFill>
-                  <a:srgbClr val="0F172A"/>
-                </a:solidFill>
-                <a:latin typeface="Arial"/>
-              </a:defRPr>
-            </a:pPr>
-            <a:r>
-              <a:t>توليد كود Room Database 6 ومحولات Moshi JSON بسرعة فائقة أثناء وقت الترجمة (Compile-time) بدلاً من kapt.</a:t>
+              </a:rPr>
+              <a:t>build.gradle.kts &amp; gradle/libs.versions.toml</a:t>
             </a:r>
           </a:p>
         </p:txBody>
@@ -5599,13 +5651,13 @@
         <p:spPr>
           <a:xfrm>
             <a:off x="0" y="0"/>
-            <a:ext cx="12191695" cy="91440"/>
+            <a:ext cx="12191695" cy="109728"/>
           </a:xfrm>
           <a:prstGeom prst="rect">
             <a:avLst/>
           </a:prstGeom>
           <a:solidFill>
-            <a:srgbClr val="1E40AF"/>
+            <a:srgbClr val="0F2B5C"/>
           </a:solidFill>
           <a:ln>
             <a:noFill/>
@@ -5641,44 +5693,8 @@
         </p:nvSpPr>
         <p:spPr>
           <a:xfrm>
-            <a:off x="822960" y="228600"/>
-            <a:ext cx="7772400" cy="320040"/>
-          </a:xfrm>
-          <a:prstGeom prst="rect">
-            <a:avLst/>
-          </a:prstGeom>
-          <a:noFill/>
-        </p:spPr>
-        <p:txBody>
-          <a:bodyPr wrap="square">
-            <a:spAutoFit/>
-          </a:bodyPr>
-          <a:lstStyle/>
-          <a:p>
-            <a:pPr>
-              <a:defRPr sz="1300" b="1">
-                <a:solidFill>
-                  <a:srgbClr val="1E40AF"/>
-                </a:solidFill>
-                <a:latin typeface="Arial"/>
-              </a:defRPr>
-            </a:pPr>
-            <a:r>
-              <a:t>LOCAL CONTACT P2P  |  إدارة المخاطر والنزاهة العلمية</a:t>
-            </a:r>
-          </a:p>
-        </p:txBody>
-      </p:sp>
-      <p:sp>
-        <p:nvSpPr>
-          <p:cNvPr id="4" name="TextBox 3"/>
-          <p:cNvSpPr txBox="1"/>
-          <p:nvPr/>
-        </p:nvSpPr>
-        <p:spPr>
-          <a:xfrm>
-            <a:off x="10241280" y="6309360"/>
-            <a:ext cx="1188720" cy="365760"/>
+            <a:off x="3200400" y="228600"/>
+            <a:ext cx="8138160" cy="320040"/>
           </a:xfrm>
           <a:prstGeom prst="rect">
             <a:avLst/>
@@ -5691,16 +5707,50 @@
           </a:bodyPr>
           <a:lstStyle/>
           <a:p>
-            <a:pPr algn="r">
-              <a:defRPr sz="1400" b="1">
-                <a:solidFill>
-                  <a:srgbClr val="0F2B5C"/>
-                </a:solidFill>
-                <a:latin typeface="Arial"/>
-              </a:defRPr>
-            </a:pPr>
-            <a:r>
-              <a:t>11 / 12</a:t>
+            <a:pPr algn="r" rtl="1"/>
+            <a:r>
+              <a:rPr sz="1300" b="1" lang="ar-SA" rtl="1">
+                <a:solidFill>
+                  <a:srgbClr val="1E40AF"/>
+                </a:solidFill>
+                <a:latin typeface="Arial"/>
+              </a:rPr>
+              <a:t>مشروع الاتصال المحلي المباشر  •  إدارة المخاطر والنزاهة</a:t>
+            </a:r>
+          </a:p>
+        </p:txBody>
+      </p:sp>
+      <p:sp>
+        <p:nvSpPr>
+          <p:cNvPr id="4" name="TextBox 3"/>
+          <p:cNvSpPr txBox="1"/>
+          <p:nvPr/>
+        </p:nvSpPr>
+        <p:spPr>
+          <a:xfrm>
+            <a:off x="822960" y="228600"/>
+            <a:ext cx="1828800" cy="320040"/>
+          </a:xfrm>
+          <a:prstGeom prst="rect">
+            <a:avLst/>
+          </a:prstGeom>
+          <a:noFill/>
+        </p:spPr>
+        <p:txBody>
+          <a:bodyPr wrap="none">
+            <a:spAutoFit/>
+          </a:bodyPr>
+          <a:lstStyle/>
+          <a:p>
+            <a:pPr algn="l" rtl="0"/>
+            <a:r>
+              <a:rPr sz="1200" b="1" lang="en-US" rtl="0">
+                <a:solidFill>
+                  <a:srgbClr val="475569"/>
+                </a:solidFill>
+                <a:latin typeface="Consolas"/>
+              </a:rPr>
+              <a:t>Slide 11 / 12</a:t>
             </a:r>
           </a:p>
         </p:txBody>
@@ -5713,8 +5763,8 @@
         </p:nvSpPr>
         <p:spPr>
           <a:xfrm>
-            <a:off x="822960" y="594360"/>
-            <a:ext cx="8961120" cy="685800"/>
+            <a:off x="4023360" y="566928"/>
+            <a:ext cx="7315200" cy="685800"/>
           </a:xfrm>
           <a:prstGeom prst="rect">
             <a:avLst/>
@@ -5722,21 +5772,20 @@
           <a:noFill/>
         </p:spPr>
         <p:txBody>
-          <a:bodyPr wrap="square">
+          <a:bodyPr wrap="none">
             <a:spAutoFit/>
           </a:bodyPr>
           <a:lstStyle/>
           <a:p>
-            <a:pPr>
-              <a:defRPr sz="2800" b="1">
+            <a:pPr algn="r" rtl="1"/>
+            <a:r>
+              <a:rPr sz="3000" b="1" lang="ar-SA" rtl="1">
                 <a:solidFill>
                   <a:srgbClr val="0F2B5C"/>
                 </a:solidFill>
                 <a:latin typeface="Arial"/>
-              </a:defRPr>
-            </a:pPr>
-            <a:r>
-              <a:t>إدارة المخاطر والفجوات الموثقة (Risk Management &amp; Gaps)</a:t>
+              </a:rPr>
+              <a:t>إدارة المخاطر والفجوات الموثقة بأمانة علمية</a:t>
             </a:r>
           </a:p>
         </p:txBody>
@@ -5749,8 +5798,8 @@
         </p:nvSpPr>
         <p:spPr>
           <a:xfrm>
-            <a:off x="8961120" y="621792"/>
-            <a:ext cx="2377440" cy="438912"/>
+            <a:off x="822960" y="621792"/>
+            <a:ext cx="3017520" cy="502920"/>
           </a:xfrm>
           <a:prstGeom prst="roundRect">
             <a:avLst/>
@@ -5782,16 +5831,15 @@
           <a:bodyPr rtlCol="0" anchor="ctr"/>
           <a:lstStyle/>
           <a:p>
-            <a:pPr algn="ctr">
-              <a:defRPr sz="1200" b="1">
+            <a:pPr algn="ctr" rtl="0"/>
+            <a:r>
+              <a:rPr sz="1400" b="1" lang="en-US" rtl="0">
                 <a:solidFill>
                   <a:srgbClr val="D97706"/>
                 </a:solidFill>
                 <a:latin typeface="Consolas"/>
-              </a:defRPr>
-            </a:pPr>
-            <a:r>
-              <a:t>HONEST ACADEMIC GAPS</a:t>
+              </a:rPr>
+              <a:t>Honest Academic Gaps</a:t>
             </a:r>
           </a:p>
         </p:txBody>
@@ -5804,7 +5852,7 @@
         </p:nvSpPr>
         <p:spPr>
           <a:xfrm>
-            <a:off x="822960" y="1353312"/>
+            <a:off x="822960" y="1325880"/>
             <a:ext cx="10515600" cy="18288"/>
           </a:xfrm>
           <a:prstGeom prst="rect">
@@ -5847,8 +5895,8 @@
         </p:nvSpPr>
         <p:spPr>
           <a:xfrm>
-            <a:off x="822960" y="6309360"/>
-            <a:ext cx="7315200" cy="320040"/>
+            <a:off x="822960" y="6355080"/>
+            <a:ext cx="10515600" cy="320040"/>
           </a:xfrm>
           <a:prstGeom prst="rect">
             <a:avLst/>
@@ -5861,16 +5909,15 @@
           </a:bodyPr>
           <a:lstStyle/>
           <a:p>
-            <a:pPr>
-              <a:defRPr sz="1100">
+            <a:pPr algn="r" rtl="1"/>
+            <a:r>
+              <a:rPr sz="1050" b="0" lang="ar-SA" rtl="1">
                 <a:solidFill>
                   <a:srgbClr val="475569"/>
                 </a:solidFill>
                 <a:latin typeface="Arial"/>
-              </a:defRPr>
-            </a:pPr>
-            <a:r>
-              <a:t>مشروع تخرج LOCAL CONTACT — مناقشة أكاديمية محكمة</a:t>
+              </a:rPr>
+              <a:t>مناقشة مشروع التخرج الأكاديمية — نظام اتصال محلي مستقل دون خادم وسيط</a:t>
             </a:r>
           </a:p>
         </p:txBody>
@@ -5883,8 +5930,8 @@
         </p:nvSpPr>
         <p:spPr>
           <a:xfrm>
-            <a:off x="822960" y="1645920"/>
-            <a:ext cx="5120640" cy="4389120"/>
+            <a:off x="6217920" y="1554480"/>
+            <a:ext cx="5120640" cy="1828800"/>
           </a:xfrm>
           <a:prstGeom prst="roundRect">
             <a:avLst/>
@@ -5916,80 +5963,47 @@
           <a:bodyPr rtlCol="0" anchor="ctr" wrap="square"/>
           <a:lstStyle/>
           <a:p>
-            <a:pPr algn="ctr">
-              <a:defRPr sz="2100" b="1">
+            <a:pPr algn="r" rtl="1"/>
+            <a:r>
+              <a:rPr sz="1900" b="1" lang="ar-SA" rtl="1">
+                <a:solidFill>
+                  <a:srgbClr val="0F2B5C"/>
+                </a:solidFill>
+                <a:latin typeface="Arial"/>
+              </a:rPr>
+              <a:t>الحذف الشبكي للرسائل</a:t>
+            </a:r>
+          </a:p>
+          <a:p>
+            <a:pPr algn="r" rtl="0">
+              <a:spcBef>
+                <a:spcPts val="300"/>
+              </a:spcBef>
+            </a:pPr>
+            <a:r>
+              <a:rPr sz="1300" b="1" lang="en-US" rtl="0">
                 <a:solidFill>
                   <a:srgbClr val="DC2626"/>
                 </a:solidFill>
-                <a:latin typeface="Arial"/>
-              </a:defRPr>
+                <a:latin typeface="Consolas"/>
+              </a:rPr>
+              <a:t>[FR-13: Missing Feature in Repo]</a:t>
+            </a:r>
+          </a:p>
+          <a:p>
+            <a:pPr algn="r" rtl="1">
+              <a:spcBef>
+                <a:spcPts val="600"/>
+              </a:spcBef>
             </a:pPr>
             <a:r>
-              <a:t>⚠️ ميزات موثقة كفجوات رسمية في SRS:</a:t>
-            </a:r>
-          </a:p>
-          <a:p>
-            <a:pPr>
-              <a:spcBef>
-                <a:spcPts val="1000"/>
-              </a:spcBef>
-              <a:defRPr sz="1600" b="1">
+              <a:rPr sz="1500" b="0" lang="ar-SA" rtl="1">
                 <a:solidFill>
                   <a:srgbClr val="0F172A"/>
                 </a:solidFill>
                 <a:latin typeface="Arial"/>
-              </a:defRPr>
-            </a:pPr>
-            <a:r>
-              <a:t>• FR-13: حذف الرسائل شبكياً — متاح محلياً فقط في قاعدة بيانات الهاتف، ولا توجد حزمة شبكية لحذفها من أجهزة الأقران عن بعد.</a:t>
-            </a:r>
-          </a:p>
-          <a:p>
-            <a:pPr>
-              <a:spcBef>
-                <a:spcPts val="1000"/>
-              </a:spcBef>
-              <a:defRPr sz="1600" b="1">
-                <a:solidFill>
-                  <a:srgbClr val="0F172A"/>
-                </a:solidFill>
-                <a:latin typeface="Arial"/>
-              </a:defRPr>
-            </a:pPr>
-            <a:r>
-              <a:t>• FR-19: فحص سلامة الملف كاملاً — الملف ينقل مجزأً ومشفر بنجاح، لكن تنقص مقارنة SHA-256 للملف كاملاً بعد اكتمال التنزيل.</a:t>
-            </a:r>
-          </a:p>
-          <a:p>
-            <a:pPr>
-              <a:spcBef>
-                <a:spcPts val="1000"/>
-              </a:spcBef>
-              <a:defRPr sz="1600" b="1">
-                <a:solidFill>
-                  <a:srgbClr val="0F172A"/>
-                </a:solidFill>
-                <a:latin typeface="Arial"/>
-              </a:defRPr>
-            </a:pPr>
-            <a:r>
-              <a:t>• مخاطر الشبكة الواقعية: عزل العملاء (AP Isolation) في أجهزة الراوتر يمنع الأجهزة من رؤية بعضها محلياً.</a:t>
-            </a:r>
-          </a:p>
-          <a:p>
-            <a:pPr>
-              <a:spcBef>
-                <a:spcPts val="1000"/>
-              </a:spcBef>
-              <a:defRPr sz="1600" b="1">
-                <a:solidFill>
-                  <a:srgbClr val="0F172A"/>
-                </a:solidFill>
-                <a:latin typeface="Arial"/>
-              </a:defRPr>
-            </a:pPr>
-            <a:r>
-              <a:t>• قيود أندرويد على Multicast: تتطلب أجهزة أندرويد حيازة MulticastLock بشكل صريح وإلا قد تُسقط حزم الاكتشاف.</a:t>
+              </a:rPr>
+              <a:t>الحذف متاح محلياً فقط في قاعدة بيانات الهاتف؛ لا توجد حزمة لحذفها عن بعد لدى القرين.</a:t>
             </a:r>
           </a:p>
         </p:txBody>
@@ -6002,8 +6016,180 @@
         </p:nvSpPr>
         <p:spPr>
           <a:xfrm>
-            <a:off x="6217920" y="1645920"/>
-            <a:ext cx="5120640" cy="4389120"/>
+            <a:off x="822960" y="1554480"/>
+            <a:ext cx="5120640" cy="1828800"/>
+          </a:xfrm>
+          <a:prstGeom prst="roundRect">
+            <a:avLst/>
+          </a:prstGeom>
+          <a:solidFill>
+            <a:srgbClr val="F8FAFC"/>
+          </a:solidFill>
+          <a:ln w="19050">
+            <a:solidFill>
+              <a:srgbClr val="D97706"/>
+            </a:solidFill>
+          </a:ln>
+        </p:spPr>
+        <p:style>
+          <a:lnRef idx="1">
+            <a:schemeClr val="accent1"/>
+          </a:lnRef>
+          <a:fillRef idx="3">
+            <a:schemeClr val="accent1"/>
+          </a:fillRef>
+          <a:effectRef idx="2">
+            <a:schemeClr val="accent1"/>
+          </a:effectRef>
+          <a:fontRef idx="minor">
+            <a:schemeClr val="lt1"/>
+          </a:fontRef>
+        </p:style>
+        <p:txBody>
+          <a:bodyPr rtlCol="0" anchor="ctr" wrap="square"/>
+          <a:lstStyle/>
+          <a:p>
+            <a:pPr algn="r" rtl="1"/>
+            <a:r>
+              <a:rPr sz="1900" b="1" lang="ar-SA" rtl="1">
+                <a:solidFill>
+                  <a:srgbClr val="0F2B5C"/>
+                </a:solidFill>
+                <a:latin typeface="Arial"/>
+              </a:rPr>
+              <a:t>فحص تجزئة الملف الكامل</a:t>
+            </a:r>
+          </a:p>
+          <a:p>
+            <a:pPr algn="r" rtl="0">
+              <a:spcBef>
+                <a:spcPts val="300"/>
+              </a:spcBef>
+            </a:pPr>
+            <a:r>
+              <a:rPr sz="1300" b="1" lang="en-US" rtl="0">
+                <a:solidFill>
+                  <a:srgbClr val="D97706"/>
+                </a:solidFill>
+                <a:latin typeface="Consolas"/>
+              </a:rPr>
+              <a:t>[FR-19: Checksum Verification Missing]</a:t>
+            </a:r>
+          </a:p>
+          <a:p>
+            <a:pPr algn="r" rtl="1">
+              <a:spcBef>
+                <a:spcPts val="600"/>
+              </a:spcBef>
+            </a:pPr>
+            <a:r>
+              <a:rPr sz="1500" b="0" lang="ar-SA" rtl="1">
+                <a:solidFill>
+                  <a:srgbClr val="0F172A"/>
+                </a:solidFill>
+                <a:latin typeface="Arial"/>
+              </a:rPr>
+              <a:t>كتل الملف مشفرة ومصادقة بنجاح، لكن تنقص مقارنة بصمة التجزئة للملف النهائي بعد التنزيل.</a:t>
+            </a:r>
+          </a:p>
+        </p:txBody>
+      </p:sp>
+      <p:sp>
+        <p:nvSpPr>
+          <p:cNvPr id="11" name="Rounded Rectangle 10"/>
+          <p:cNvSpPr/>
+          <p:nvPr/>
+        </p:nvSpPr>
+        <p:spPr>
+          <a:xfrm>
+            <a:off x="6217920" y="3566160"/>
+            <a:ext cx="5120640" cy="1828800"/>
+          </a:xfrm>
+          <a:prstGeom prst="roundRect">
+            <a:avLst/>
+          </a:prstGeom>
+          <a:solidFill>
+            <a:srgbClr val="F8FAFC"/>
+          </a:solidFill>
+          <a:ln w="19050">
+            <a:solidFill>
+              <a:srgbClr val="CBD5E1"/>
+            </a:solidFill>
+          </a:ln>
+        </p:spPr>
+        <p:style>
+          <a:lnRef idx="1">
+            <a:schemeClr val="accent1"/>
+          </a:lnRef>
+          <a:fillRef idx="3">
+            <a:schemeClr val="accent1"/>
+          </a:fillRef>
+          <a:effectRef idx="2">
+            <a:schemeClr val="accent1"/>
+          </a:effectRef>
+          <a:fontRef idx="minor">
+            <a:schemeClr val="lt1"/>
+          </a:fontRef>
+        </p:style>
+        <p:txBody>
+          <a:bodyPr rtlCol="0" anchor="ctr" wrap="square"/>
+          <a:lstStyle/>
+          <a:p>
+            <a:pPr algn="r" rtl="1"/>
+            <a:r>
+              <a:rPr sz="1900" b="1" lang="ar-SA" rtl="1">
+                <a:solidFill>
+                  <a:srgbClr val="0F2B5C"/>
+                </a:solidFill>
+                <a:latin typeface="Arial"/>
+              </a:rPr>
+              <a:t>مخاطر عزل الشبكة المحلية</a:t>
+            </a:r>
+          </a:p>
+          <a:p>
+            <a:pPr algn="r" rtl="0">
+              <a:spcBef>
+                <a:spcPts val="300"/>
+              </a:spcBef>
+            </a:pPr>
+            <a:r>
+              <a:rPr sz="1300" b="1" lang="en-US" rtl="0">
+                <a:solidFill>
+                  <a:srgbClr val="D97706"/>
+                </a:solidFill>
+                <a:latin typeface="Consolas"/>
+              </a:rPr>
+              <a:t>[AP Isolation Network Risk]</a:t>
+            </a:r>
+          </a:p>
+          <a:p>
+            <a:pPr algn="r" rtl="1">
+              <a:spcBef>
+                <a:spcPts val="600"/>
+              </a:spcBef>
+            </a:pPr>
+            <a:r>
+              <a:rPr sz="1500" b="0" lang="ar-SA" rtl="1">
+                <a:solidFill>
+                  <a:srgbClr val="0F172A"/>
+                </a:solidFill>
+                <a:latin typeface="Arial"/>
+              </a:rPr>
+              <a:t>ميزة عزل العملاء في بعض أجهزة الراوتر تمنع اكتشاف الأجهزة لبعضها محلياً.</a:t>
+            </a:r>
+          </a:p>
+        </p:txBody>
+      </p:sp>
+      <p:sp>
+        <p:nvSpPr>
+          <p:cNvPr id="12" name="Rounded Rectangle 11"/>
+          <p:cNvSpPr/>
+          <p:nvPr/>
+        </p:nvSpPr>
+        <p:spPr>
+          <a:xfrm>
+            <a:off x="822960" y="3566160"/>
+            <a:ext cx="5120640" cy="1828800"/>
           </a:xfrm>
           <a:prstGeom prst="roundRect">
             <a:avLst/>
@@ -6035,80 +6221,110 @@
           <a:bodyPr rtlCol="0" anchor="ctr" wrap="square"/>
           <a:lstStyle/>
           <a:p>
-            <a:pPr algn="ctr">
-              <a:defRPr sz="2100" b="1">
+            <a:pPr algn="r" rtl="1"/>
+            <a:r>
+              <a:rPr sz="1900" b="1" lang="ar-SA" rtl="1">
+                <a:solidFill>
+                  <a:srgbClr val="0F2B5C"/>
+                </a:solidFill>
+                <a:latin typeface="Arial"/>
+              </a:rPr>
+              <a:t>استراتيجية التخفيف المعتمدة</a:t>
+            </a:r>
+          </a:p>
+          <a:p>
+            <a:pPr algn="r" rtl="0">
+              <a:spcBef>
+                <a:spcPts val="300"/>
+              </a:spcBef>
+            </a:pPr>
+            <a:r>
+              <a:rPr sz="1300" b="1" lang="en-US" rtl="0">
                 <a:solidFill>
                   <a:srgbClr val="059669"/>
                 </a:solidFill>
-                <a:latin typeface="Arial"/>
-              </a:defRPr>
+                <a:latin typeface="Consolas"/>
+              </a:rPr>
+              <a:t>[Mitigation via Subnet Sweep &amp; SRS]</a:t>
+            </a:r>
+          </a:p>
+          <a:p>
+            <a:pPr algn="r" rtl="1">
+              <a:spcBef>
+                <a:spcPts val="600"/>
+              </a:spcBef>
             </a:pPr>
             <a:r>
-              <a:t>🛡️ استراتيجيات التخفيف والشفافية:</a:t>
-            </a:r>
-          </a:p>
-          <a:p>
-            <a:pPr>
-              <a:spcBef>
-                <a:spcPts val="1000"/>
-              </a:spcBef>
-              <a:defRPr sz="1600" b="1">
+              <a:rPr sz="1500" b="0" lang="ar-SA" rtl="1">
                 <a:solidFill>
                   <a:srgbClr val="0F172A"/>
                 </a:solidFill>
                 <a:latin typeface="Arial"/>
-              </a:defRPr>
-            </a:pPr>
-            <a:r>
-              <a:t>• التوثيق الشفاف: إدراج الفجوات صراحة في وثيقتي SRS و TraceabilityMatrix كـ Missing لمنع الادعاءات المضللة.</a:t>
-            </a:r>
-          </a:p>
-          <a:p>
-            <a:pPr>
-              <a:spcBef>
-                <a:spcPts val="1000"/>
-              </a:spcBef>
-              <a:defRPr sz="1600" b="1">
-                <a:solidFill>
-                  <a:srgbClr val="0F172A"/>
-                </a:solidFill>
-                <a:latin typeface="Arial"/>
-              </a:defRPr>
-            </a:pPr>
-            <a:r>
-              <a:t>• بدائل الاكتشاف الشبكي: إضافة مسح الشبكة الفرعية (Subnet Sweep) كبديل احتياطي في حال حظر حزم الـ Multicast على المنفذ 8888.</a:t>
-            </a:r>
-          </a:p>
-          <a:p>
-            <a:pPr>
-              <a:spcBef>
-                <a:spcPts val="1000"/>
-              </a:spcBef>
-              <a:defRPr sz="1600" b="1">
-                <a:solidFill>
-                  <a:srgbClr val="0F172A"/>
-                </a:solidFill>
-                <a:latin typeface="Arial"/>
-              </a:defRPr>
-            </a:pPr>
-            <a:r>
-              <a:t>• المعايير الهندسية: التعامل مع الفجوات كـ Backlog رسمي للتطوير المستقبلي بدلاً من تجاهلها.</a:t>
-            </a:r>
-          </a:p>
-          <a:p>
-            <a:pPr>
-              <a:spcBef>
-                <a:spcPts val="1000"/>
-              </a:spcBef>
-              <a:defRPr sz="1600" b="1">
-                <a:solidFill>
-                  <a:srgbClr val="0F172A"/>
-                </a:solidFill>
-                <a:latin typeface="Arial"/>
-              </a:defRPr>
-            </a:pPr>
-            <a:r>
-              <a:t>• القيمة المضافة: إثبات النزاهة العلمية يمنح المشروع مصداقية أكاديمية عالية أمام لجنة التحكيم.</a:t>
+              </a:rPr>
+              <a:t>توثيق الفجوات رسمياً في وثيقة المتطلبات والاعتماد على مسح الشبكة كبديل لحزم البث المتعدد.</a:t>
+            </a:r>
+          </a:p>
+        </p:txBody>
+      </p:sp>
+      <p:sp>
+        <p:nvSpPr>
+          <p:cNvPr id="13" name="Rounded Rectangle 12"/>
+          <p:cNvSpPr/>
+          <p:nvPr/>
+        </p:nvSpPr>
+        <p:spPr>
+          <a:xfrm>
+            <a:off x="822960" y="5623560"/>
+            <a:ext cx="10515600" cy="594360"/>
+          </a:xfrm>
+          <a:prstGeom prst="roundRect">
+            <a:avLst/>
+          </a:prstGeom>
+          <a:solidFill>
+            <a:srgbClr val="F8FAFC"/>
+          </a:solidFill>
+          <a:ln w="12700">
+            <a:solidFill>
+              <a:srgbClr val="CBD5E1"/>
+            </a:solidFill>
+          </a:ln>
+        </p:spPr>
+        <p:style>
+          <a:lnRef idx="1">
+            <a:schemeClr val="accent1"/>
+          </a:lnRef>
+          <a:fillRef idx="3">
+            <a:schemeClr val="accent1"/>
+          </a:fillRef>
+          <a:effectRef idx="2">
+            <a:schemeClr val="accent1"/>
+          </a:effectRef>
+          <a:fontRef idx="minor">
+            <a:schemeClr val="lt1"/>
+          </a:fontRef>
+        </p:style>
+        <p:txBody>
+          <a:bodyPr rtlCol="0" anchor="ctr"/>
+          <a:lstStyle/>
+          <a:p>
+            <a:pPr algn="r" rtl="1"/>
+            <a:r>
+              <a:rPr sz="1200" b="1" lang="ar-SA" rtl="1">
+                <a:solidFill>
+                  <a:srgbClr val="0F2B5C"/>
+                </a:solidFill>
+                <a:latin typeface="Arial"/>
+              </a:rPr>
+              <a:t>المكون البرمجي: حصر القيود والمخاطر الهندسية الموثقة في وثيقة المتطلبات  |  </a:t>
+            </a:r>
+            <a:r>
+              <a:rPr sz="1200" b="1" lang="en-US" rtl="0">
+                <a:solidFill>
+                  <a:srgbClr val="1E40AF"/>
+                </a:solidFill>
+                <a:latin typeface="Consolas"/>
+              </a:rPr>
+              <a:t>docs/SRS.md</a:t>
             </a:r>
           </a:p>
         </p:txBody>
@@ -6140,13 +6356,13 @@
         <p:spPr>
           <a:xfrm>
             <a:off x="0" y="0"/>
-            <a:ext cx="12191695" cy="91440"/>
+            <a:ext cx="12191695" cy="109728"/>
           </a:xfrm>
           <a:prstGeom prst="rect">
             <a:avLst/>
           </a:prstGeom>
           <a:solidFill>
-            <a:srgbClr val="1E40AF"/>
+            <a:srgbClr val="0F2B5C"/>
           </a:solidFill>
           <a:ln>
             <a:noFill/>
@@ -6182,44 +6398,8 @@
         </p:nvSpPr>
         <p:spPr>
           <a:xfrm>
-            <a:off x="822960" y="228600"/>
-            <a:ext cx="7772400" cy="320040"/>
-          </a:xfrm>
-          <a:prstGeom prst="rect">
-            <a:avLst/>
-          </a:prstGeom>
-          <a:noFill/>
-        </p:spPr>
-        <p:txBody>
-          <a:bodyPr wrap="square">
-            <a:spAutoFit/>
-          </a:bodyPr>
-          <a:lstStyle/>
-          <a:p>
-            <a:pPr>
-              <a:defRPr sz="1300" b="1">
-                <a:solidFill>
-                  <a:srgbClr val="1E40AF"/>
-                </a:solidFill>
-                <a:latin typeface="Arial"/>
-              </a:defRPr>
-            </a:pPr>
-            <a:r>
-              <a:t>LOCAL CONTACT P2P  |  الخاتمة والتوصيات</a:t>
-            </a:r>
-          </a:p>
-        </p:txBody>
-      </p:sp>
-      <p:sp>
-        <p:nvSpPr>
-          <p:cNvPr id="4" name="TextBox 3"/>
-          <p:cNvSpPr txBox="1"/>
-          <p:nvPr/>
-        </p:nvSpPr>
-        <p:spPr>
-          <a:xfrm>
-            <a:off x="10241280" y="6309360"/>
-            <a:ext cx="1188720" cy="365760"/>
+            <a:off x="3200400" y="228600"/>
+            <a:ext cx="8138160" cy="320040"/>
           </a:xfrm>
           <a:prstGeom prst="rect">
             <a:avLst/>
@@ -6232,16 +6412,50 @@
           </a:bodyPr>
           <a:lstStyle/>
           <a:p>
-            <a:pPr algn="r">
-              <a:defRPr sz="1400" b="1">
-                <a:solidFill>
-                  <a:srgbClr val="0F2B5C"/>
-                </a:solidFill>
-                <a:latin typeface="Arial"/>
-              </a:defRPr>
-            </a:pPr>
-            <a:r>
-              <a:t>12 / 12</a:t>
+            <a:pPr algn="r" rtl="1"/>
+            <a:r>
+              <a:rPr sz="1300" b="1" lang="ar-SA" rtl="1">
+                <a:solidFill>
+                  <a:srgbClr val="1E40AF"/>
+                </a:solidFill>
+                <a:latin typeface="Arial"/>
+              </a:rPr>
+              <a:t>مشروع الاتصال المحلي المباشر  •  الخاتمة والتوصيات</a:t>
+            </a:r>
+          </a:p>
+        </p:txBody>
+      </p:sp>
+      <p:sp>
+        <p:nvSpPr>
+          <p:cNvPr id="4" name="TextBox 3"/>
+          <p:cNvSpPr txBox="1"/>
+          <p:nvPr/>
+        </p:nvSpPr>
+        <p:spPr>
+          <a:xfrm>
+            <a:off x="822960" y="228600"/>
+            <a:ext cx="1828800" cy="320040"/>
+          </a:xfrm>
+          <a:prstGeom prst="rect">
+            <a:avLst/>
+          </a:prstGeom>
+          <a:noFill/>
+        </p:spPr>
+        <p:txBody>
+          <a:bodyPr wrap="none">
+            <a:spAutoFit/>
+          </a:bodyPr>
+          <a:lstStyle/>
+          <a:p>
+            <a:pPr algn="l" rtl="0"/>
+            <a:r>
+              <a:rPr sz="1200" b="1" lang="en-US" rtl="0">
+                <a:solidFill>
+                  <a:srgbClr val="475569"/>
+                </a:solidFill>
+                <a:latin typeface="Consolas"/>
+              </a:rPr>
+              <a:t>Slide 12 / 12</a:t>
             </a:r>
           </a:p>
         </p:txBody>
@@ -6254,8 +6468,8 @@
         </p:nvSpPr>
         <p:spPr>
           <a:xfrm>
-            <a:off x="822960" y="594360"/>
-            <a:ext cx="8961120" cy="685800"/>
+            <a:off x="4023360" y="566928"/>
+            <a:ext cx="7315200" cy="685800"/>
           </a:xfrm>
           <a:prstGeom prst="rect">
             <a:avLst/>
@@ -6263,21 +6477,20 @@
           <a:noFill/>
         </p:spPr>
         <p:txBody>
-          <a:bodyPr wrap="square">
+          <a:bodyPr wrap="none">
             <a:spAutoFit/>
           </a:bodyPr>
           <a:lstStyle/>
           <a:p>
-            <a:pPr>
-              <a:defRPr sz="2800" b="1">
+            <a:pPr algn="r" rtl="1"/>
+            <a:r>
+              <a:rPr sz="3000" b="1" lang="ar-SA" rtl="1">
                 <a:solidFill>
                   <a:srgbClr val="0F2B5C"/>
                 </a:solidFill>
                 <a:latin typeface="Arial"/>
-              </a:defRPr>
-            </a:pPr>
-            <a:r>
-              <a:t>الخلاصة الهندسية وخارطة الطريق المستقبلية (Roadmap)</a:t>
+              </a:rPr>
+              <a:t>الخلاصة الهندسية وخارطة الطريق المستقبلية</a:t>
             </a:r>
           </a:p>
         </p:txBody>
@@ -6290,8 +6503,8 @@
         </p:nvSpPr>
         <p:spPr>
           <a:xfrm>
-            <a:off x="8961120" y="621792"/>
-            <a:ext cx="2377440" cy="438912"/>
+            <a:off x="822960" y="621792"/>
+            <a:ext cx="3017520" cy="502920"/>
           </a:xfrm>
           <a:prstGeom prst="roundRect">
             <a:avLst/>
@@ -6323,16 +6536,15 @@
           <a:bodyPr rtlCol="0" anchor="ctr"/>
           <a:lstStyle/>
           <a:p>
-            <a:pPr algn="ctr">
-              <a:defRPr sz="1200" b="1">
+            <a:pPr algn="ctr" rtl="0"/>
+            <a:r>
+              <a:rPr sz="1400" b="1" lang="en-US" rtl="0">
                 <a:solidFill>
                   <a:srgbClr val="059669"/>
                 </a:solidFill>
                 <a:latin typeface="Consolas"/>
-              </a:defRPr>
-            </a:pPr>
-            <a:r>
-              <a:t>EXECUTIVE SUMMARY</a:t>
+              </a:rPr>
+              <a:t>Executive Summary</a:t>
             </a:r>
           </a:p>
         </p:txBody>
@@ -6345,7 +6557,7 @@
         </p:nvSpPr>
         <p:spPr>
           <a:xfrm>
-            <a:off x="822960" y="1353312"/>
+            <a:off x="822960" y="1325880"/>
             <a:ext cx="10515600" cy="18288"/>
           </a:xfrm>
           <a:prstGeom prst="rect">
@@ -6388,8 +6600,8 @@
         </p:nvSpPr>
         <p:spPr>
           <a:xfrm>
-            <a:off x="822960" y="6309360"/>
-            <a:ext cx="7315200" cy="320040"/>
+            <a:off x="822960" y="6355080"/>
+            <a:ext cx="10515600" cy="320040"/>
           </a:xfrm>
           <a:prstGeom prst="rect">
             <a:avLst/>
@@ -6402,16 +6614,15 @@
           </a:bodyPr>
           <a:lstStyle/>
           <a:p>
-            <a:pPr>
-              <a:defRPr sz="1100">
+            <a:pPr algn="r" rtl="1"/>
+            <a:r>
+              <a:rPr sz="1050" b="0" lang="ar-SA" rtl="1">
                 <a:solidFill>
                   <a:srgbClr val="475569"/>
                 </a:solidFill>
                 <a:latin typeface="Arial"/>
-              </a:defRPr>
-            </a:pPr>
-            <a:r>
-              <a:t>مشروع تخرج LOCAL CONTACT — مناقشة أكاديمية محكمة</a:t>
+              </a:rPr>
+              <a:t>مناقشة مشروع التخرج الأكاديمية — نظام اتصال محلي مستقل دون خادم وسيط</a:t>
             </a:r>
           </a:p>
         </p:txBody>
@@ -6424,8 +6635,8 @@
         </p:nvSpPr>
         <p:spPr>
           <a:xfrm>
-            <a:off x="822960" y="1645920"/>
-            <a:ext cx="5120640" cy="4389120"/>
+            <a:off x="6217920" y="1554480"/>
+            <a:ext cx="5120640" cy="1828800"/>
           </a:xfrm>
           <a:prstGeom prst="roundRect">
             <a:avLst/>
@@ -6435,7 +6646,7 @@
           </a:solidFill>
           <a:ln w="19050">
             <a:solidFill>
-              <a:srgbClr val="059669"/>
+              <a:srgbClr val="CBD5E1"/>
             </a:solidFill>
           </a:ln>
         </p:spPr>
@@ -6457,96 +6668,47 @@
           <a:bodyPr rtlCol="0" anchor="ctr" wrap="square"/>
           <a:lstStyle/>
           <a:p>
-            <a:pPr algn="ctr">
-              <a:defRPr sz="2100" b="1">
+            <a:pPr algn="r" rtl="1"/>
+            <a:r>
+              <a:rPr sz="1900" b="1" lang="ar-SA" rtl="1">
+                <a:solidFill>
+                  <a:srgbClr val="0F2B5C"/>
+                </a:solidFill>
+                <a:latin typeface="Arial"/>
+              </a:rPr>
+              <a:t>الانضباط التوثيقي والهندسي</a:t>
+            </a:r>
+          </a:p>
+          <a:p>
+            <a:pPr algn="r" rtl="0">
+              <a:spcBef>
+                <a:spcPts val="300"/>
+              </a:spcBef>
+            </a:pPr>
+            <a:r>
+              <a:rPr sz="1300" b="1" lang="en-US" rtl="0">
                 <a:solidFill>
                   <a:srgbClr val="059669"/>
                 </a:solidFill>
-                <a:latin typeface="Arial"/>
-              </a:defRPr>
+                <a:latin typeface="Consolas"/>
+              </a:rPr>
+              <a:t>[Documented Baseline &amp; RTM Traceability]</a:t>
+            </a:r>
+          </a:p>
+          <a:p>
+            <a:pPr algn="r" rtl="1">
+              <a:spcBef>
+                <a:spcPts val="600"/>
+              </a:spcBef>
             </a:pPr>
             <a:r>
-              <a:t>✅ ما تم إنجازه وتوثيقه هندسياً:</a:t>
-            </a:r>
-          </a:p>
-          <a:p>
-            <a:pPr>
-              <a:spcBef>
-                <a:spcPts val="1000"/>
-              </a:spcBef>
-              <a:defRPr sz="1600" b="1">
+              <a:rPr sz="1500" b="0" lang="ar-SA" rtl="1">
                 <a:solidFill>
                   <a:srgbClr val="0F172A"/>
                 </a:solidFill>
                 <a:latin typeface="Arial"/>
-              </a:defRPr>
-            </a:pPr>
-            <a:r>
-              <a:t>• صياغة وثيقة SRS.md تضم 31 متطلباً و 15 قصة مستخدم بنموذج تصنيف خماسي صارم.</a:t>
-            </a:r>
-          </a:p>
-          <a:p>
-            <a:pPr>
-              <a:spcBef>
-                <a:spcPts val="1000"/>
-              </a:spcBef>
-              <a:defRPr sz="1600" b="1">
-                <a:solidFill>
-                  <a:srgbClr val="0F172A"/>
-                </a:solidFill>
-                <a:latin typeface="Arial"/>
-              </a:defRPr>
-            </a:pPr>
-            <a:r>
-              <a:t>• تثبيت خط الأساس البرمجي (Baseline Commit 7111182) لضمان تكرارية البناء.</a:t>
-            </a:r>
-          </a:p>
-          <a:p>
-            <a:pPr>
-              <a:spcBef>
-                <a:spcPts val="1000"/>
-              </a:spcBef>
-              <a:defRPr sz="1600" b="1">
-                <a:solidFill>
-                  <a:srgbClr val="0F172A"/>
-                </a:solidFill>
-                <a:latin typeface="Arial"/>
-              </a:defRPr>
-            </a:pPr>
-            <a:r>
-              <a:t>• بناء مصفوفة تتبع RTM تربط كل متطلب بالكود المصدري ومعايير القبول.</a:t>
-            </a:r>
-          </a:p>
-          <a:p>
-            <a:pPr>
-              <a:spcBef>
-                <a:spcPts val="1000"/>
-              </a:spcBef>
-              <a:defRPr sz="1600" b="1">
-                <a:solidFill>
-                  <a:srgbClr val="0F172A"/>
-                </a:solidFill>
-                <a:latin typeface="Arial"/>
-              </a:defRPr>
-            </a:pPr>
-            <a:r>
-              <a:t>• تطبيق نمط المزود Provider لتحقيق إدارة تغيير آمنة دون كسر الكود القديم.</a:t>
-            </a:r>
-          </a:p>
-          <a:p>
-            <a:pPr>
-              <a:spcBef>
-                <a:spcPts val="1000"/>
-              </a:spcBef>
-              <a:defRPr sz="1600" b="1">
-                <a:solidFill>
-                  <a:srgbClr val="0F172A"/>
-                </a:solidFill>
-                <a:latin typeface="Arial"/>
-              </a:defRPr>
-            </a:pPr>
-            <a:r>
-              <a:t>• إثبات سلامة المحركات الحساسة عبر 33 اختبار وحدة آلي ناجح بنسبة 100%.</a:t>
+              </a:rPr>
+              <a:t>صياغة وثائق المتطلبات وخط الأساس ومصفوفة التتبع لضبط دورة حياة المشروع ومنع انزلاق النطاق.</a:t>
             </a:r>
           </a:p>
         </p:txBody>
@@ -6559,8 +6721,8 @@
         </p:nvSpPr>
         <p:spPr>
           <a:xfrm>
-            <a:off x="6217920" y="1645920"/>
-            <a:ext cx="5120640" cy="4389120"/>
+            <a:off x="822960" y="1554480"/>
+            <a:ext cx="5120640" cy="1828800"/>
           </a:xfrm>
           <a:prstGeom prst="roundRect">
             <a:avLst/>
@@ -6570,7 +6732,7 @@
           </a:solidFill>
           <a:ln w="19050">
             <a:solidFill>
-              <a:srgbClr val="1E40AF"/>
+              <a:srgbClr val="CBD5E1"/>
             </a:solidFill>
           </a:ln>
         </p:spPr>
@@ -6592,80 +6754,282 @@
           <a:bodyPr rtlCol="0" anchor="ctr" wrap="square"/>
           <a:lstStyle/>
           <a:p>
-            <a:pPr algn="ctr">
-              <a:defRPr sz="2100" b="1">
+            <a:pPr algn="r" rtl="1"/>
+            <a:r>
+              <a:rPr sz="1900" b="1" lang="ar-SA" rtl="1">
                 <a:solidFill>
                   <a:srgbClr val="0F2B5C"/>
                 </a:solidFill>
                 <a:latin typeface="Arial"/>
-              </a:defRPr>
+              </a:rPr>
+              <a:t>التصميم المعماري المرن</a:t>
+            </a:r>
+          </a:p>
+          <a:p>
+            <a:pPr algn="r" rtl="0">
+              <a:spcBef>
+                <a:spcPts val="300"/>
+              </a:spcBef>
             </a:pPr>
             <a:r>
-              <a:t>🚀 خارطة الطريق الهندسية المستقبلية:</a:t>
-            </a:r>
-          </a:p>
-          <a:p>
-            <a:pPr>
+              <a:rPr sz="1300" b="1" lang="en-US" rtl="0">
+                <a:solidFill>
+                  <a:srgbClr val="059669"/>
+                </a:solidFill>
+                <a:latin typeface="Consolas"/>
+              </a:rPr>
+              <a:t>[SOLID Principles &amp; Provider Pattern]</a:t>
+            </a:r>
+          </a:p>
+          <a:p>
+            <a:pPr algn="r" rtl="1">
               <a:spcBef>
-                <a:spcPts val="1000"/>
+                <a:spcPts val="600"/>
               </a:spcBef>
-              <a:defRPr sz="1600" b="1">
+            </a:pPr>
+            <a:r>
+              <a:rPr sz="1500" b="0" lang="ar-SA" rtl="1">
                 <a:solidFill>
                   <a:srgbClr val="0F172A"/>
                 </a:solidFill>
                 <a:latin typeface="Arial"/>
-              </a:defRPr>
+              </a:rPr>
+              <a:t>تطبيق مبادئ التصميم المتين ونمط المزود لإدارة التغيير المعماري دون كسر الكود القائم.</a:t>
+            </a:r>
+          </a:p>
+        </p:txBody>
+      </p:sp>
+      <p:sp>
+        <p:nvSpPr>
+          <p:cNvPr id="11" name="Rounded Rectangle 10"/>
+          <p:cNvSpPr/>
+          <p:nvPr/>
+        </p:nvSpPr>
+        <p:spPr>
+          <a:xfrm>
+            <a:off x="6217920" y="3566160"/>
+            <a:ext cx="5120640" cy="1828800"/>
+          </a:xfrm>
+          <a:prstGeom prst="roundRect">
+            <a:avLst/>
+          </a:prstGeom>
+          <a:solidFill>
+            <a:srgbClr val="F8FAFC"/>
+          </a:solidFill>
+          <a:ln w="19050">
+            <a:solidFill>
+              <a:srgbClr val="CBD5E1"/>
+            </a:solidFill>
+          </a:ln>
+        </p:spPr>
+        <p:style>
+          <a:lnRef idx="1">
+            <a:schemeClr val="accent1"/>
+          </a:lnRef>
+          <a:fillRef idx="3">
+            <a:schemeClr val="accent1"/>
+          </a:fillRef>
+          <a:effectRef idx="2">
+            <a:schemeClr val="accent1"/>
+          </a:effectRef>
+          <a:fontRef idx="minor">
+            <a:schemeClr val="lt1"/>
+          </a:fontRef>
+        </p:style>
+        <p:txBody>
+          <a:bodyPr rtlCol="0" anchor="ctr" wrap="square"/>
+          <a:lstStyle/>
+          <a:p>
+            <a:pPr algn="r" rtl="1"/>
+            <a:r>
+              <a:rPr sz="1900" b="1" lang="ar-SA" rtl="1">
+                <a:solidFill>
+                  <a:srgbClr val="0F2B5C"/>
+                </a:solidFill>
+                <a:latin typeface="Arial"/>
+              </a:rPr>
+              <a:t>التحقق البرمجي المؤتمت</a:t>
+            </a:r>
+          </a:p>
+          <a:p>
+            <a:pPr algn="r" rtl="0">
+              <a:spcBef>
+                <a:spcPts val="300"/>
+              </a:spcBef>
             </a:pPr>
             <a:r>
-              <a:t>• 1. تفكيك الكلاسات الضخمة (God Classes): تقسيم LocalP2PEngine و MainViewModel إلى خدمات فرعية متخصصة ومستقلة.</a:t>
-            </a:r>
-          </a:p>
-          <a:p>
-            <a:pPr>
+              <a:rPr sz="1300" b="1" lang="en-US" rtl="0">
+                <a:solidFill>
+                  <a:srgbClr val="059669"/>
+                </a:solidFill>
+                <a:latin typeface="Consolas"/>
+              </a:rPr>
+              <a:t>[33/33 Automated JVM Unit Tests Passed]</a:t>
+            </a:r>
+          </a:p>
+          <a:p>
+            <a:pPr algn="r" rtl="1">
               <a:spcBef>
-                <a:spcPts val="1000"/>
+                <a:spcPts val="600"/>
               </a:spcBef>
-              <a:defRPr sz="1600" b="1">
+            </a:pPr>
+            <a:r>
+              <a:rPr sz="1500" b="0" lang="ar-SA" rtl="1">
                 <a:solidFill>
                   <a:srgbClr val="0F172A"/>
                 </a:solidFill>
                 <a:latin typeface="Arial"/>
-              </a:defRPr>
+              </a:rPr>
+              <a:t>إثبات المنطق والعمليات الحساسة عبر 33 اختبار وحدة آلي ناجح بنسبة 100%.</a:t>
+            </a:r>
+          </a:p>
+        </p:txBody>
+      </p:sp>
+      <p:sp>
+        <p:nvSpPr>
+          <p:cNvPr id="12" name="Rounded Rectangle 11"/>
+          <p:cNvSpPr/>
+          <p:nvPr/>
+        </p:nvSpPr>
+        <p:spPr>
+          <a:xfrm>
+            <a:off x="822960" y="3566160"/>
+            <a:ext cx="5120640" cy="1828800"/>
+          </a:xfrm>
+          <a:prstGeom prst="roundRect">
+            <a:avLst/>
+          </a:prstGeom>
+          <a:solidFill>
+            <a:srgbClr val="F8FAFC"/>
+          </a:solidFill>
+          <a:ln w="19050">
+            <a:solidFill>
+              <a:srgbClr val="CBD5E1"/>
+            </a:solidFill>
+          </a:ln>
+        </p:spPr>
+        <p:style>
+          <a:lnRef idx="1">
+            <a:schemeClr val="accent1"/>
+          </a:lnRef>
+          <a:fillRef idx="3">
+            <a:schemeClr val="accent1"/>
+          </a:fillRef>
+          <a:effectRef idx="2">
+            <a:schemeClr val="accent1"/>
+          </a:effectRef>
+          <a:fontRef idx="minor">
+            <a:schemeClr val="lt1"/>
+          </a:fontRef>
+        </p:style>
+        <p:txBody>
+          <a:bodyPr rtlCol="0" anchor="ctr" wrap="square"/>
+          <a:lstStyle/>
+          <a:p>
+            <a:pPr algn="r" rtl="1"/>
+            <a:r>
+              <a:rPr sz="1900" b="1" lang="ar-SA" rtl="1">
+                <a:solidFill>
+                  <a:srgbClr val="0F2B5C"/>
+                </a:solidFill>
+                <a:latin typeface="Arial"/>
+              </a:rPr>
+              <a:t>خارطة الطريق المستقبلية</a:t>
+            </a:r>
+          </a:p>
+          <a:p>
+            <a:pPr algn="r" rtl="0">
+              <a:spcBef>
+                <a:spcPts val="300"/>
+              </a:spcBef>
             </a:pPr>
             <a:r>
-              <a:t>• 2. بناء اختبارات تكاملية على أجهزة حقيقية: إعداد Instrumented Tests عبر AndroidX Test و Espresso لفحص بيئة الشبكة الفعلية.</a:t>
-            </a:r>
-          </a:p>
-          <a:p>
-            <a:pPr>
+              <a:rPr sz="1300" b="1" lang="en-US" rtl="0">
+                <a:solidFill>
+                  <a:srgbClr val="1E40AF"/>
+                </a:solidFill>
+                <a:latin typeface="Consolas"/>
+              </a:rPr>
+              <a:t>[Future Architecture Roadmap Defined]</a:t>
+            </a:r>
+          </a:p>
+          <a:p>
+            <a:pPr algn="r" rtl="1">
               <a:spcBef>
-                <a:spcPts val="1000"/>
+                <a:spcPts val="600"/>
               </a:spcBef>
-              <a:defRPr sz="1600" b="1">
+            </a:pPr>
+            <a:r>
+              <a:rPr sz="1500" b="0" lang="ar-SA" rtl="1">
                 <a:solidFill>
                   <a:srgbClr val="0F172A"/>
                 </a:solidFill>
                 <a:latin typeface="Arial"/>
-              </a:defRPr>
-            </a:pPr>
-            <a:r>
-              <a:t>• 3. استكمال ميزة الحذف الشبكي (FR-13) وتدقيق تجزئة الملف النهائي SHA-256.</a:t>
-            </a:r>
-          </a:p>
-          <a:p>
-            <a:pPr>
-              <a:spcBef>
-                <a:spcPts val="1000"/>
-              </a:spcBef>
-              <a:defRPr sz="1600" b="1">
-                <a:solidFill>
-                  <a:srgbClr val="0F172A"/>
-                </a:solidFill>
-                <a:latin typeface="Arial"/>
-              </a:defRPr>
-            </a:pPr>
-            <a:r>
-              <a:t>• الخلاصة: تحول المشروع من كود أولي غير منظم إلى منظومة برمجية خاضعة لأرقى معايير هندسة البرمجيات وقابلة للاستدامة والتطوير.</a:t>
+              </a:rPr>
+              <a:t>تفكيك الكلاسات الضخمة وبناء اختبارات تكاملية على أجهزة حقيقية عبر الاختبارات الوظيفية.</a:t>
+            </a:r>
+          </a:p>
+        </p:txBody>
+      </p:sp>
+      <p:sp>
+        <p:nvSpPr>
+          <p:cNvPr id="13" name="Rounded Rectangle 12"/>
+          <p:cNvSpPr/>
+          <p:nvPr/>
+        </p:nvSpPr>
+        <p:spPr>
+          <a:xfrm>
+            <a:off x="822960" y="5623560"/>
+            <a:ext cx="10515600" cy="594360"/>
+          </a:xfrm>
+          <a:prstGeom prst="roundRect">
+            <a:avLst/>
+          </a:prstGeom>
+          <a:solidFill>
+            <a:srgbClr val="F8FAFC"/>
+          </a:solidFill>
+          <a:ln w="12700">
+            <a:solidFill>
+              <a:srgbClr val="CBD5E1"/>
+            </a:solidFill>
+          </a:ln>
+        </p:spPr>
+        <p:style>
+          <a:lnRef idx="1">
+            <a:schemeClr val="accent1"/>
+          </a:lnRef>
+          <a:fillRef idx="3">
+            <a:schemeClr val="accent1"/>
+          </a:fillRef>
+          <a:effectRef idx="2">
+            <a:schemeClr val="accent1"/>
+          </a:effectRef>
+          <a:fontRef idx="minor">
+            <a:schemeClr val="lt1"/>
+          </a:fontRef>
+        </p:style>
+        <p:txBody>
+          <a:bodyPr rtlCol="0" anchor="ctr"/>
+          <a:lstStyle/>
+          <a:p>
+            <a:pPr algn="r" rtl="1"/>
+            <a:r>
+              <a:rPr sz="1200" b="1" lang="ar-SA" rtl="1">
+                <a:solidFill>
+                  <a:srgbClr val="0F2B5C"/>
+                </a:solidFill>
+                <a:latin typeface="Arial"/>
+              </a:rPr>
+              <a:t>المكون البرمجي: الخلاصة: نقل المشروع من كود غير موثق إلى منظومة هندسية محكمة  |  </a:t>
+            </a:r>
+            <a:r>
+              <a:rPr sz="1200" b="1" lang="en-US" rtl="0">
+                <a:solidFill>
+                  <a:srgbClr val="1E40AF"/>
+                </a:solidFill>
+                <a:latin typeface="Consolas"/>
+              </a:rPr>
+              <a:t>docs/Baseline.md &amp; docs/SRS.md</a:t>
             </a:r>
           </a:p>
         </p:txBody>
@@ -6697,13 +7061,13 @@
         <p:spPr>
           <a:xfrm>
             <a:off x="0" y="0"/>
-            <a:ext cx="12191695" cy="91440"/>
+            <a:ext cx="12191695" cy="109728"/>
           </a:xfrm>
           <a:prstGeom prst="rect">
             <a:avLst/>
           </a:prstGeom>
           <a:solidFill>
-            <a:srgbClr val="1E40AF"/>
+            <a:srgbClr val="0F2B5C"/>
           </a:solidFill>
           <a:ln>
             <a:noFill/>
@@ -6739,44 +7103,8 @@
         </p:nvSpPr>
         <p:spPr>
           <a:xfrm>
-            <a:off x="822960" y="228600"/>
-            <a:ext cx="7772400" cy="320040"/>
-          </a:xfrm>
-          <a:prstGeom prst="rect">
-            <a:avLst/>
-          </a:prstGeom>
-          <a:noFill/>
-        </p:spPr>
-        <p:txBody>
-          <a:bodyPr wrap="square">
-            <a:spAutoFit/>
-          </a:bodyPr>
-          <a:lstStyle/>
-          <a:p>
-            <a:pPr>
-              <a:defRPr sz="1300" b="1">
-                <a:solidFill>
-                  <a:srgbClr val="1E40AF"/>
-                </a:solidFill>
-                <a:latin typeface="Arial"/>
-              </a:defRPr>
-            </a:pPr>
-            <a:r>
-              <a:t>LOCAL CONTACT P2P  |  تشخيص واقع النظام</a:t>
-            </a:r>
-          </a:p>
-        </p:txBody>
-      </p:sp>
-      <p:sp>
-        <p:nvSpPr>
-          <p:cNvPr id="4" name="TextBox 3"/>
-          <p:cNvSpPr txBox="1"/>
-          <p:nvPr/>
-        </p:nvSpPr>
-        <p:spPr>
-          <a:xfrm>
-            <a:off x="10241280" y="6309360"/>
-            <a:ext cx="1188720" cy="365760"/>
+            <a:off x="3200400" y="228600"/>
+            <a:ext cx="8138160" cy="320040"/>
           </a:xfrm>
           <a:prstGeom prst="rect">
             <a:avLst/>
@@ -6789,16 +7117,50 @@
           </a:bodyPr>
           <a:lstStyle/>
           <a:p>
-            <a:pPr algn="r">
-              <a:defRPr sz="1400" b="1">
-                <a:solidFill>
-                  <a:srgbClr val="0F2B5C"/>
-                </a:solidFill>
-                <a:latin typeface="Arial"/>
-              </a:defRPr>
-            </a:pPr>
-            <a:r>
-              <a:t>2 / 12</a:t>
+            <a:pPr algn="r" rtl="1"/>
+            <a:r>
+              <a:rPr sz="1300" b="1" lang="ar-SA" rtl="1">
+                <a:solidFill>
+                  <a:srgbClr val="1E40AF"/>
+                </a:solidFill>
+                <a:latin typeface="Arial"/>
+              </a:rPr>
+              <a:t>مشروع الاتصال المحلي المباشر  •  تشخيص واقع النظام</a:t>
+            </a:r>
+          </a:p>
+        </p:txBody>
+      </p:sp>
+      <p:sp>
+        <p:nvSpPr>
+          <p:cNvPr id="4" name="TextBox 3"/>
+          <p:cNvSpPr txBox="1"/>
+          <p:nvPr/>
+        </p:nvSpPr>
+        <p:spPr>
+          <a:xfrm>
+            <a:off x="822960" y="228600"/>
+            <a:ext cx="1828800" cy="320040"/>
+          </a:xfrm>
+          <a:prstGeom prst="rect">
+            <a:avLst/>
+          </a:prstGeom>
+          <a:noFill/>
+        </p:spPr>
+        <p:txBody>
+          <a:bodyPr wrap="none">
+            <a:spAutoFit/>
+          </a:bodyPr>
+          <a:lstStyle/>
+          <a:p>
+            <a:pPr algn="l" rtl="0"/>
+            <a:r>
+              <a:rPr sz="1200" b="1" lang="en-US" rtl="0">
+                <a:solidFill>
+                  <a:srgbClr val="475569"/>
+                </a:solidFill>
+                <a:latin typeface="Consolas"/>
+              </a:rPr>
+              <a:t>Slide 2 / 12</a:t>
             </a:r>
           </a:p>
         </p:txBody>
@@ -6811,8 +7173,8 @@
         </p:nvSpPr>
         <p:spPr>
           <a:xfrm>
-            <a:off x="822960" y="594360"/>
-            <a:ext cx="8961120" cy="685800"/>
+            <a:off x="4023360" y="566928"/>
+            <a:ext cx="7315200" cy="685800"/>
           </a:xfrm>
           <a:prstGeom prst="rect">
             <a:avLst/>
@@ -6820,20 +7182,19 @@
           <a:noFill/>
         </p:spPr>
         <p:txBody>
-          <a:bodyPr wrap="square">
+          <a:bodyPr wrap="none">
             <a:spAutoFit/>
           </a:bodyPr>
           <a:lstStyle/>
           <a:p>
-            <a:pPr>
-              <a:defRPr sz="2800" b="1">
+            <a:pPr algn="r" rtl="1"/>
+            <a:r>
+              <a:rPr sz="3000" b="1" lang="ar-SA" rtl="1">
                 <a:solidFill>
                   <a:srgbClr val="0F2B5C"/>
                 </a:solidFill>
                 <a:latin typeface="Arial"/>
-              </a:defRPr>
-            </a:pPr>
-            <a:r>
+              </a:rPr>
               <a:t>حالة المشروع قبل التدخل الهندسي والمشكلات المكتشفة</a:t>
             </a:r>
           </a:p>
@@ -6847,8 +7208,8 @@
         </p:nvSpPr>
         <p:spPr>
           <a:xfrm>
-            <a:off x="8961120" y="621792"/>
-            <a:ext cx="2377440" cy="438912"/>
+            <a:off x="822960" y="621792"/>
+            <a:ext cx="3017520" cy="502920"/>
           </a:xfrm>
           <a:prstGeom prst="roundRect">
             <a:avLst/>
@@ -6880,15 +7241,14 @@
           <a:bodyPr rtlCol="0" anchor="ctr"/>
           <a:lstStyle/>
           <a:p>
-            <a:pPr algn="ctr">
-              <a:defRPr sz="1200" b="1">
+            <a:pPr algn="ctr" rtl="0"/>
+            <a:r>
+              <a:rPr sz="1400" b="1" lang="en-US" rtl="0">
                 <a:solidFill>
                   <a:srgbClr val="DC2626"/>
                 </a:solidFill>
                 <a:latin typeface="Consolas"/>
-              </a:defRPr>
-            </a:pPr>
-            <a:r>
+              </a:rPr>
               <a:t>PRE-SE AUDIT</a:t>
             </a:r>
           </a:p>
@@ -6902,7 +7262,7 @@
         </p:nvSpPr>
         <p:spPr>
           <a:xfrm>
-            <a:off x="822960" y="1353312"/>
+            <a:off x="822960" y="1325880"/>
             <a:ext cx="10515600" cy="18288"/>
           </a:xfrm>
           <a:prstGeom prst="rect">
@@ -6945,8 +7305,8 @@
         </p:nvSpPr>
         <p:spPr>
           <a:xfrm>
-            <a:off x="822960" y="6309360"/>
-            <a:ext cx="7315200" cy="320040"/>
+            <a:off x="822960" y="6355080"/>
+            <a:ext cx="10515600" cy="320040"/>
           </a:xfrm>
           <a:prstGeom prst="rect">
             <a:avLst/>
@@ -6959,16 +7319,15 @@
           </a:bodyPr>
           <a:lstStyle/>
           <a:p>
-            <a:pPr>
-              <a:defRPr sz="1100">
+            <a:pPr algn="r" rtl="1"/>
+            <a:r>
+              <a:rPr sz="1050" b="0" lang="ar-SA" rtl="1">
                 <a:solidFill>
                   <a:srgbClr val="475569"/>
                 </a:solidFill>
                 <a:latin typeface="Arial"/>
-              </a:defRPr>
-            </a:pPr>
-            <a:r>
-              <a:t>مشروع تخرج LOCAL CONTACT — مناقشة أكاديمية محكمة</a:t>
+              </a:rPr>
+              <a:t>مناقشة مشروع التخرج الأكاديمية — نظام اتصال محلي مستقل دون خادم وسيط</a:t>
             </a:r>
           </a:p>
         </p:txBody>
@@ -6981,8 +7340,8 @@
         </p:nvSpPr>
         <p:spPr>
           <a:xfrm>
-            <a:off x="822960" y="1645920"/>
-            <a:ext cx="5120640" cy="4389120"/>
+            <a:off x="6217920" y="1554480"/>
+            <a:ext cx="5120640" cy="1828800"/>
           </a:xfrm>
           <a:prstGeom prst="roundRect">
             <a:avLst/>
@@ -7014,80 +7373,47 @@
           <a:bodyPr rtlCol="0" anchor="ctr" wrap="square"/>
           <a:lstStyle/>
           <a:p>
-            <a:pPr algn="ctr">
-              <a:defRPr sz="2200" b="1">
+            <a:pPr algn="r" rtl="1"/>
+            <a:r>
+              <a:rPr sz="1900" b="1" lang="ar-SA" rtl="1">
+                <a:solidFill>
+                  <a:srgbClr val="0F2B5C"/>
+                </a:solidFill>
+                <a:latin typeface="Arial"/>
+              </a:rPr>
+              <a:t>غياب التوصيف الرسمي للمتطلبات</a:t>
+            </a:r>
+          </a:p>
+          <a:p>
+            <a:pPr algn="r" rtl="0">
+              <a:spcBef>
+                <a:spcPts val="300"/>
+              </a:spcBef>
+            </a:pPr>
+            <a:r>
+              <a:rPr sz="1300" b="1" lang="en-US" rtl="0">
                 <a:solidFill>
                   <a:srgbClr val="DC2626"/>
                 </a:solidFill>
-                <a:latin typeface="Arial"/>
-              </a:defRPr>
+                <a:latin typeface="Consolas"/>
+              </a:rPr>
+              <a:t>[No Documented SRS]</a:t>
+            </a:r>
+          </a:p>
+          <a:p>
+            <a:pPr algn="r" rtl="1">
+              <a:spcBef>
+                <a:spcPts val="600"/>
+              </a:spcBef>
             </a:pPr>
             <a:r>
-              <a:t>⚠️ غياب التوثيق والمنهجية الهندسية:</a:t>
-            </a:r>
-          </a:p>
-          <a:p>
-            <a:pPr>
-              <a:spcBef>
-                <a:spcPts val="1200"/>
-              </a:spcBef>
-              <a:defRPr sz="1700" b="1">
+              <a:rPr sz="1500" b="0" lang="ar-SA" rtl="1">
                 <a:solidFill>
                   <a:srgbClr val="0F172A"/>
                 </a:solidFill>
                 <a:latin typeface="Arial"/>
-              </a:defRPr>
-            </a:pPr>
-            <a:r>
-              <a:t>• غياب وثيقة المتطلبات الرسمية (No SRS): الميزات مبنية دون توصيف دقيق للمدخلات والمخرجات أو معايير القبول.</a:t>
-            </a:r>
-          </a:p>
-          <a:p>
-            <a:pPr>
-              <a:spcBef>
-                <a:spcPts val="1200"/>
-              </a:spcBef>
-              <a:defRPr sz="1700" b="1">
-                <a:solidFill>
-                  <a:srgbClr val="0F172A"/>
-                </a:solidFill>
-                <a:latin typeface="Arial"/>
-              </a:defRPr>
-            </a:pPr>
-            <a:r>
-              <a:t>• انعدام خط الأساس الهندسي (No Baseline): عدم وجود مرجع ثابت لتتبع أثر التعديلات البرمجية وضبط التفرع.</a:t>
-            </a:r>
-          </a:p>
-          <a:p>
-            <a:pPr>
-              <a:spcBef>
-                <a:spcPts val="1200"/>
-              </a:spcBef>
-              <a:defRPr sz="1700" b="1">
-                <a:solidFill>
-                  <a:srgbClr val="0F172A"/>
-                </a:solidFill>
-                <a:latin typeface="Arial"/>
-              </a:defRPr>
-            </a:pPr>
-            <a:r>
-              <a:t>• غياب مصفوفة التتبع (No Traceability): صعوبة تحديد أي متطلب وظيفي يرتبط بأي ملف برمجي في المشروع.</a:t>
-            </a:r>
-          </a:p>
-          <a:p>
-            <a:pPr>
-              <a:spcBef>
-                <a:spcPts val="1200"/>
-              </a:spcBef>
-              <a:defRPr sz="1700" b="1">
-                <a:solidFill>
-                  <a:srgbClr val="0F172A"/>
-                </a:solidFill>
-                <a:latin typeface="Arial"/>
-              </a:defRPr>
-            </a:pPr>
-            <a:r>
-              <a:t>• انعدام الاختبارات الآلية (Zero Unit Tests): الاعتماد على الاختبار اليدوي العشوائي دون إثبات برمجي مؤتمت.</a:t>
+              </a:rPr>
+              <a:t>الميزات مبنية برمجياً دون وثيقة متطلبات رسمية ودون معايير قبول واضحة.</a:t>
             </a:r>
           </a:p>
         </p:txBody>
@@ -7100,8 +7426,94 @@
         </p:nvSpPr>
         <p:spPr>
           <a:xfrm>
-            <a:off x="6217920" y="1645920"/>
-            <a:ext cx="5120640" cy="4389120"/>
+            <a:off x="822960" y="1554480"/>
+            <a:ext cx="5120640" cy="1828800"/>
+          </a:xfrm>
+          <a:prstGeom prst="roundRect">
+            <a:avLst/>
+          </a:prstGeom>
+          <a:solidFill>
+            <a:srgbClr val="F8FAFC"/>
+          </a:solidFill>
+          <a:ln w="19050">
+            <a:solidFill>
+              <a:srgbClr val="DC2626"/>
+            </a:solidFill>
+          </a:ln>
+        </p:spPr>
+        <p:style>
+          <a:lnRef idx="1">
+            <a:schemeClr val="accent1"/>
+          </a:lnRef>
+          <a:fillRef idx="3">
+            <a:schemeClr val="accent1"/>
+          </a:fillRef>
+          <a:effectRef idx="2">
+            <a:schemeClr val="accent1"/>
+          </a:effectRef>
+          <a:fontRef idx="minor">
+            <a:schemeClr val="lt1"/>
+          </a:fontRef>
+        </p:style>
+        <p:txBody>
+          <a:bodyPr rtlCol="0" anchor="ctr" wrap="square"/>
+          <a:lstStyle/>
+          <a:p>
+            <a:pPr algn="r" rtl="1"/>
+            <a:r>
+              <a:rPr sz="1900" b="1" lang="ar-SA" rtl="1">
+                <a:solidFill>
+                  <a:srgbClr val="0F2B5C"/>
+                </a:solidFill>
+                <a:latin typeface="Arial"/>
+              </a:rPr>
+              <a:t>انعدام خط الأساس البرمجي</a:t>
+            </a:r>
+          </a:p>
+          <a:p>
+            <a:pPr algn="r" rtl="0">
+              <a:spcBef>
+                <a:spcPts val="300"/>
+              </a:spcBef>
+            </a:pPr>
+            <a:r>
+              <a:rPr sz="1300" b="1" lang="en-US" rtl="0">
+                <a:solidFill>
+                  <a:srgbClr val="DC2626"/>
+                </a:solidFill>
+                <a:latin typeface="Consolas"/>
+              </a:rPr>
+              <a:t>[No Project Baseline]</a:t>
+            </a:r>
+          </a:p>
+          <a:p>
+            <a:pPr algn="r" rtl="1">
+              <a:spcBef>
+                <a:spcPts val="600"/>
+              </a:spcBef>
+            </a:pPr>
+            <a:r>
+              <a:rPr sz="1500" b="0" lang="ar-SA" rtl="1">
+                <a:solidFill>
+                  <a:srgbClr val="0F172A"/>
+                </a:solidFill>
+                <a:latin typeface="Arial"/>
+              </a:rPr>
+              <a:t>غياب مرجع ثابت للإصدارات يحدد نطاق العمل ويمنع التعديلات العشوائية غير المتتبعة.</a:t>
+            </a:r>
+          </a:p>
+        </p:txBody>
+      </p:sp>
+      <p:sp>
+        <p:nvSpPr>
+          <p:cNvPr id="11" name="Rounded Rectangle 10"/>
+          <p:cNvSpPr/>
+          <p:nvPr/>
+        </p:nvSpPr>
+        <p:spPr>
+          <a:xfrm>
+            <a:off x="6217920" y="3566160"/>
+            <a:ext cx="5120640" cy="1828800"/>
           </a:xfrm>
           <a:prstGeom prst="roundRect">
             <a:avLst/>
@@ -7133,80 +7545,196 @@
           <a:bodyPr rtlCol="0" anchor="ctr" wrap="square"/>
           <a:lstStyle/>
           <a:p>
-            <a:pPr algn="ctr">
-              <a:defRPr sz="2200" b="1">
+            <a:pPr algn="r" rtl="1"/>
+            <a:r>
+              <a:rPr sz="1900" b="1" lang="ar-SA" rtl="1">
                 <a:solidFill>
                   <a:srgbClr val="0F2B5C"/>
                 </a:solidFill>
                 <a:latin typeface="Arial"/>
-              </a:defRPr>
+              </a:rPr>
+              <a:t>ظاهرة الكلاسات المتضخمة</a:t>
+            </a:r>
+          </a:p>
+          <a:p>
+            <a:pPr algn="r" rtl="0">
+              <a:spcBef>
+                <a:spcPts val="300"/>
+              </a:spcBef>
             </a:pPr>
             <a:r>
-              <a:t>🧩 الروائح المعمارية في الكود (Code Smells):</a:t>
-            </a:r>
-          </a:p>
-          <a:p>
-            <a:pPr>
+              <a:rPr sz="1300" b="1" lang="en-US" rtl="0">
+                <a:solidFill>
+                  <a:srgbClr val="D97706"/>
+                </a:solidFill>
+                <a:latin typeface="Consolas"/>
+              </a:rPr>
+              <a:t>[God Classes Smell]</a:t>
+            </a:r>
+          </a:p>
+          <a:p>
+            <a:pPr algn="r" rtl="1">
               <a:spcBef>
-                <a:spcPts val="1200"/>
+                <a:spcPts val="600"/>
               </a:spcBef>
-              <a:defRPr sz="1700" b="1">
+            </a:pPr>
+            <a:r>
+              <a:rPr sz="1500" b="0" lang="ar-SA" rtl="1">
                 <a:solidFill>
                   <a:srgbClr val="0F172A"/>
                 </a:solidFill>
                 <a:latin typeface="Arial"/>
-              </a:defRPr>
+              </a:rPr>
+              <a:t>كلاسات ضخمة تجمع عدة مسؤوليات غير متجانسة من شبكة وواجهات ومكالمات.</a:t>
+            </a:r>
+          </a:p>
+        </p:txBody>
+      </p:sp>
+      <p:sp>
+        <p:nvSpPr>
+          <p:cNvPr id="12" name="Rounded Rectangle 11"/>
+          <p:cNvSpPr/>
+          <p:nvPr/>
+        </p:nvSpPr>
+        <p:spPr>
+          <a:xfrm>
+            <a:off x="822960" y="3566160"/>
+            <a:ext cx="5120640" cy="1828800"/>
+          </a:xfrm>
+          <a:prstGeom prst="roundRect">
+            <a:avLst/>
+          </a:prstGeom>
+          <a:solidFill>
+            <a:srgbClr val="F8FAFC"/>
+          </a:solidFill>
+          <a:ln w="19050">
+            <a:solidFill>
+              <a:srgbClr val="CBD5E1"/>
+            </a:solidFill>
+          </a:ln>
+        </p:spPr>
+        <p:style>
+          <a:lnRef idx="1">
+            <a:schemeClr val="accent1"/>
+          </a:lnRef>
+          <a:fillRef idx="3">
+            <a:schemeClr val="accent1"/>
+          </a:fillRef>
+          <a:effectRef idx="2">
+            <a:schemeClr val="accent1"/>
+          </a:effectRef>
+          <a:fontRef idx="minor">
+            <a:schemeClr val="lt1"/>
+          </a:fontRef>
+        </p:style>
+        <p:txBody>
+          <a:bodyPr rtlCol="0" anchor="ctr" wrap="square"/>
+          <a:lstStyle/>
+          <a:p>
+            <a:pPr algn="r" rtl="1"/>
+            <a:r>
+              <a:rPr sz="1900" b="1" lang="ar-SA" rtl="1">
+                <a:solidFill>
+                  <a:srgbClr val="0F2B5C"/>
+                </a:solidFill>
+                <a:latin typeface="Arial"/>
+              </a:rPr>
+              <a:t>غياب الاختبارات المؤتمتة</a:t>
+            </a:r>
+          </a:p>
+          <a:p>
+            <a:pPr algn="r" rtl="0">
+              <a:spcBef>
+                <a:spcPts val="300"/>
+              </a:spcBef>
             </a:pPr>
             <a:r>
-              <a:t>• ظاهرة الكلاسات المتضخمة (God Classes): كلاس LocalP2PEngine.kt بلغ 2,496 سطراً ليجمع الاكتشاف والرسائل والمكالمات في مكان واحد.</a:t>
-            </a:r>
-          </a:p>
-          <a:p>
-            <a:pPr>
+              <a:rPr sz="1300" b="1" lang="en-US" rtl="0">
+                <a:solidFill>
+                  <a:srgbClr val="D97706"/>
+                </a:solidFill>
+                <a:latin typeface="Consolas"/>
+              </a:rPr>
+              <a:t>[Zero Automated Unit Tests]</a:t>
+            </a:r>
+          </a:p>
+          <a:p>
+            <a:pPr algn="r" rtl="1">
               <a:spcBef>
-                <a:spcPts val="1200"/>
+                <a:spcPts val="600"/>
               </a:spcBef>
-              <a:defRPr sz="1700" b="1">
+            </a:pPr>
+            <a:r>
+              <a:rPr sz="1500" b="0" lang="ar-SA" rtl="1">
                 <a:solidFill>
                   <a:srgbClr val="0F172A"/>
                 </a:solidFill>
                 <a:latin typeface="Arial"/>
-              </a:defRPr>
-            </a:pPr>
-            <a:r>
-              <a:t>• تضخم الـ ViewModel: كلاس MainViewModel.kt بلغ 1,839 سطراً ليجمع إدارة الواجهات واستعلامات قاعدة البيانات معاً.</a:t>
-            </a:r>
-          </a:p>
-          <a:p>
-            <a:pPr>
-              <a:spcBef>
-                <a:spcPts val="1200"/>
-              </a:spcBef>
-              <a:defRPr sz="1700" b="1">
-                <a:solidFill>
-                  <a:srgbClr val="0F172A"/>
-                </a:solidFill>
-                <a:latin typeface="Arial"/>
-              </a:defRPr>
-            </a:pPr>
-            <a:r>
-              <a:t>• الاقتران الصلب (Tight Coupling): دمج منطق التشفير وإدارة المفاتيح داخل نفس الكلاس في LocalCryptoEngine.kt.</a:t>
-            </a:r>
-          </a:p>
-          <a:p>
-            <a:pPr>
-              <a:spcBef>
-                <a:spcPts val="1200"/>
-              </a:spcBef>
-              <a:defRPr sz="1700" b="1">
-                <a:solidFill>
-                  <a:srgbClr val="0F172A"/>
-                </a:solidFill>
-                <a:latin typeface="Arial"/>
-              </a:defRPr>
-            </a:pPr>
-            <a:r>
-              <a:t>• انتهاك مبادئ SOLID: انتهاك صريح لمبدأ المسؤولية الواحدة (SRP) ومبدأ انعكاس الاعتمادية (DIP).</a:t>
+              </a:rPr>
+              <a:t>انعدام اختبارات الوحدة الآلية للتحقق من سلامة المحركات والعمليات الحسابية.</a:t>
+            </a:r>
+          </a:p>
+        </p:txBody>
+      </p:sp>
+      <p:sp>
+        <p:nvSpPr>
+          <p:cNvPr id="13" name="Rounded Rectangle 12"/>
+          <p:cNvSpPr/>
+          <p:nvPr/>
+        </p:nvSpPr>
+        <p:spPr>
+          <a:xfrm>
+            <a:off x="822960" y="5623560"/>
+            <a:ext cx="10515600" cy="594360"/>
+          </a:xfrm>
+          <a:prstGeom prst="roundRect">
+            <a:avLst/>
+          </a:prstGeom>
+          <a:solidFill>
+            <a:srgbClr val="F8FAFC"/>
+          </a:solidFill>
+          <a:ln w="12700">
+            <a:solidFill>
+              <a:srgbClr val="CBD5E1"/>
+            </a:solidFill>
+          </a:ln>
+        </p:spPr>
+        <p:style>
+          <a:lnRef idx="1">
+            <a:schemeClr val="accent1"/>
+          </a:lnRef>
+          <a:fillRef idx="3">
+            <a:schemeClr val="accent1"/>
+          </a:fillRef>
+          <a:effectRef idx="2">
+            <a:schemeClr val="accent1"/>
+          </a:effectRef>
+          <a:fontRef idx="minor">
+            <a:schemeClr val="lt1"/>
+          </a:fontRef>
+        </p:style>
+        <p:txBody>
+          <a:bodyPr rtlCol="0" anchor="ctr"/>
+          <a:lstStyle/>
+          <a:p>
+            <a:pPr algn="r" rtl="1"/>
+            <a:r>
+              <a:rPr sz="1200" b="1" lang="ar-SA" rtl="1">
+                <a:solidFill>
+                  <a:srgbClr val="0F2B5C"/>
+                </a:solidFill>
+                <a:latin typeface="Arial"/>
+              </a:rPr>
+              <a:t>المكون البرمجي: تشخيص الفجوات المنهجية في مرحلة التقييم الأولي  |  </a:t>
+            </a:r>
+            <a:r>
+              <a:rPr sz="1200" b="1" lang="en-US" rtl="0">
+                <a:solidFill>
+                  <a:srgbClr val="1E40AF"/>
+                </a:solidFill>
+                <a:latin typeface="Consolas"/>
+              </a:rPr>
+              <a:t>docs/Baseline.md</a:t>
             </a:r>
           </a:p>
         </p:txBody>
@@ -7238,13 +7766,13 @@
         <p:spPr>
           <a:xfrm>
             <a:off x="0" y="0"/>
-            <a:ext cx="12191695" cy="91440"/>
+            <a:ext cx="12191695" cy="109728"/>
           </a:xfrm>
           <a:prstGeom prst="rect">
             <a:avLst/>
           </a:prstGeom>
           <a:solidFill>
-            <a:srgbClr val="1E40AF"/>
+            <a:srgbClr val="0F2B5C"/>
           </a:solidFill>
           <a:ln>
             <a:noFill/>
@@ -7280,44 +7808,8 @@
         </p:nvSpPr>
         <p:spPr>
           <a:xfrm>
-            <a:off x="822960" y="228600"/>
-            <a:ext cx="7772400" cy="320040"/>
-          </a:xfrm>
-          <a:prstGeom prst="rect">
-            <a:avLst/>
-          </a:prstGeom>
-          <a:noFill/>
-        </p:spPr>
-        <p:txBody>
-          <a:bodyPr wrap="square">
-            <a:spAutoFit/>
-          </a:bodyPr>
-          <a:lstStyle/>
-          <a:p>
-            <a:pPr>
-              <a:defRPr sz="1300" b="1">
-                <a:solidFill>
-                  <a:srgbClr val="1E40AF"/>
-                </a:solidFill>
-                <a:latin typeface="Arial"/>
-              </a:defRPr>
-            </a:pPr>
-            <a:r>
-              <a:t>LOCAL CONTACT P2P  |  هندسة المتطلبات</a:t>
-            </a:r>
-          </a:p>
-        </p:txBody>
-      </p:sp>
-      <p:sp>
-        <p:nvSpPr>
-          <p:cNvPr id="4" name="TextBox 3"/>
-          <p:cNvSpPr txBox="1"/>
-          <p:nvPr/>
-        </p:nvSpPr>
-        <p:spPr>
-          <a:xfrm>
-            <a:off x="10241280" y="6309360"/>
-            <a:ext cx="1188720" cy="365760"/>
+            <a:off x="3200400" y="228600"/>
+            <a:ext cx="8138160" cy="320040"/>
           </a:xfrm>
           <a:prstGeom prst="rect">
             <a:avLst/>
@@ -7330,16 +7822,50 @@
           </a:bodyPr>
           <a:lstStyle/>
           <a:p>
-            <a:pPr algn="r">
-              <a:defRPr sz="1400" b="1">
-                <a:solidFill>
-                  <a:srgbClr val="0F2B5C"/>
-                </a:solidFill>
-                <a:latin typeface="Arial"/>
-              </a:defRPr>
-            </a:pPr>
-            <a:r>
-              <a:t>3 / 12</a:t>
+            <a:pPr algn="r" rtl="1"/>
+            <a:r>
+              <a:rPr sz="1300" b="1" lang="ar-SA" rtl="1">
+                <a:solidFill>
+                  <a:srgbClr val="1E40AF"/>
+                </a:solidFill>
+                <a:latin typeface="Arial"/>
+              </a:rPr>
+              <a:t>مشروع الاتصال المحلي المباشر  •  هندسة المتطلبات</a:t>
+            </a:r>
+          </a:p>
+        </p:txBody>
+      </p:sp>
+      <p:sp>
+        <p:nvSpPr>
+          <p:cNvPr id="4" name="TextBox 3"/>
+          <p:cNvSpPr txBox="1"/>
+          <p:nvPr/>
+        </p:nvSpPr>
+        <p:spPr>
+          <a:xfrm>
+            <a:off x="822960" y="228600"/>
+            <a:ext cx="1828800" cy="320040"/>
+          </a:xfrm>
+          <a:prstGeom prst="rect">
+            <a:avLst/>
+          </a:prstGeom>
+          <a:noFill/>
+        </p:spPr>
+        <p:txBody>
+          <a:bodyPr wrap="none">
+            <a:spAutoFit/>
+          </a:bodyPr>
+          <a:lstStyle/>
+          <a:p>
+            <a:pPr algn="l" rtl="0"/>
+            <a:r>
+              <a:rPr sz="1200" b="1" lang="en-US" rtl="0">
+                <a:solidFill>
+                  <a:srgbClr val="475569"/>
+                </a:solidFill>
+                <a:latin typeface="Consolas"/>
+              </a:rPr>
+              <a:t>Slide 3 / 12</a:t>
             </a:r>
           </a:p>
         </p:txBody>
@@ -7352,8 +7878,8 @@
         </p:nvSpPr>
         <p:spPr>
           <a:xfrm>
-            <a:off x="822960" y="594360"/>
-            <a:ext cx="8961120" cy="685800"/>
+            <a:off x="4023360" y="566928"/>
+            <a:ext cx="7315200" cy="685800"/>
           </a:xfrm>
           <a:prstGeom prst="rect">
             <a:avLst/>
@@ -7361,21 +7887,20 @@
           <a:noFill/>
         </p:spPr>
         <p:txBody>
-          <a:bodyPr wrap="square">
+          <a:bodyPr wrap="none">
             <a:spAutoFit/>
           </a:bodyPr>
           <a:lstStyle/>
           <a:p>
-            <a:pPr>
-              <a:defRPr sz="2800" b="1">
+            <a:pPr algn="r" rtl="1"/>
+            <a:r>
+              <a:rPr sz="3000" b="1" lang="ar-SA" rtl="1">
                 <a:solidFill>
                   <a:srgbClr val="0F2B5C"/>
                 </a:solidFill>
                 <a:latin typeface="Arial"/>
-              </a:defRPr>
-            </a:pPr>
-            <a:r>
-              <a:t>توثيق مواصفات المتطلبات البرمجية (SRS Specification)</a:t>
+              </a:rPr>
+              <a:t>توثيق مواصفات المتطلبات البرمجية</a:t>
             </a:r>
           </a:p>
         </p:txBody>
@@ -7388,8 +7913,8 @@
         </p:nvSpPr>
         <p:spPr>
           <a:xfrm>
-            <a:off x="8961120" y="621792"/>
-            <a:ext cx="2377440" cy="438912"/>
+            <a:off x="822960" y="621792"/>
+            <a:ext cx="3017520" cy="502920"/>
           </a:xfrm>
           <a:prstGeom prst="roundRect">
             <a:avLst/>
@@ -7421,16 +7946,15 @@
           <a:bodyPr rtlCol="0" anchor="ctr"/>
           <a:lstStyle/>
           <a:p>
-            <a:pPr algn="ctr">
-              <a:defRPr sz="1200" b="1">
+            <a:pPr algn="ctr" rtl="0"/>
+            <a:r>
+              <a:rPr sz="1400" b="1" lang="en-US" rtl="0">
                 <a:solidFill>
                   <a:srgbClr val="059669"/>
                 </a:solidFill>
                 <a:latin typeface="Consolas"/>
-              </a:defRPr>
-            </a:pPr>
-            <a:r>
-              <a:t>docs/SRS.md</a:t>
+              </a:rPr>
+              <a:t>docs/SRS.md (622 lines)</a:t>
             </a:r>
           </a:p>
         </p:txBody>
@@ -7443,7 +7967,7 @@
         </p:nvSpPr>
         <p:spPr>
           <a:xfrm>
-            <a:off x="822960" y="1353312"/>
+            <a:off x="822960" y="1325880"/>
             <a:ext cx="10515600" cy="18288"/>
           </a:xfrm>
           <a:prstGeom prst="rect">
@@ -7486,8 +8010,8 @@
         </p:nvSpPr>
         <p:spPr>
           <a:xfrm>
-            <a:off x="822960" y="6309360"/>
-            <a:ext cx="7315200" cy="320040"/>
+            <a:off x="822960" y="6355080"/>
+            <a:ext cx="10515600" cy="320040"/>
           </a:xfrm>
           <a:prstGeom prst="rect">
             <a:avLst/>
@@ -7500,16 +8024,15 @@
           </a:bodyPr>
           <a:lstStyle/>
           <a:p>
-            <a:pPr>
-              <a:defRPr sz="1100">
+            <a:pPr algn="r" rtl="1"/>
+            <a:r>
+              <a:rPr sz="1050" b="0" lang="ar-SA" rtl="1">
                 <a:solidFill>
                   <a:srgbClr val="475569"/>
                 </a:solidFill>
                 <a:latin typeface="Arial"/>
-              </a:defRPr>
-            </a:pPr>
-            <a:r>
-              <a:t>مشروع تخرج LOCAL CONTACT — مناقشة أكاديمية محكمة</a:t>
+              </a:rPr>
+              <a:t>مناقشة مشروع التخرج الأكاديمية — نظام اتصال محلي مستقل دون خادم وسيط</a:t>
             </a:r>
           </a:p>
         </p:txBody>
@@ -7522,143 +8045,8 @@
         </p:nvSpPr>
         <p:spPr>
           <a:xfrm>
-            <a:off x="822960" y="1645920"/>
-            <a:ext cx="5120640" cy="4389120"/>
-          </a:xfrm>
-          <a:prstGeom prst="roundRect">
-            <a:avLst/>
-          </a:prstGeom>
-          <a:solidFill>
-            <a:srgbClr val="F8FAFC"/>
-          </a:solidFill>
-          <a:ln w="19050">
-            <a:solidFill>
-              <a:srgbClr val="1E40AF"/>
-            </a:solidFill>
-          </a:ln>
-        </p:spPr>
-        <p:style>
-          <a:lnRef idx="1">
-            <a:schemeClr val="accent1"/>
-          </a:lnRef>
-          <a:fillRef idx="3">
-            <a:schemeClr val="accent1"/>
-          </a:fillRef>
-          <a:effectRef idx="2">
-            <a:schemeClr val="accent1"/>
-          </a:effectRef>
-          <a:fontRef idx="minor">
-            <a:schemeClr val="lt1"/>
-          </a:fontRef>
-        </p:style>
-        <p:txBody>
-          <a:bodyPr rtlCol="0" anchor="ctr" wrap="square"/>
-          <a:lstStyle/>
-          <a:p>
-            <a:pPr algn="ctr">
-              <a:defRPr sz="2100" b="1">
-                <a:solidFill>
-                  <a:srgbClr val="0F2B5C"/>
-                </a:solidFill>
-                <a:latin typeface="Arial"/>
-              </a:defRPr>
-            </a:pPr>
-            <a:r>
-              <a:t>🎯 نموذج تصنيف المتطلبات الخماسي المبتكر:</a:t>
-            </a:r>
-          </a:p>
-          <a:p>
-            <a:pPr>
-              <a:spcBef>
-                <a:spcPts val="800"/>
-              </a:spcBef>
-              <a:defRPr sz="1600" b="1">
-                <a:solidFill>
-                  <a:srgbClr val="0F172A"/>
-                </a:solidFill>
-                <a:latin typeface="Arial"/>
-              </a:defRPr>
-            </a:pPr>
-            <a:r>
-              <a:t>• 1. Official Requirement: المتطلبات الرسمية الصريحة المطلوبة أكاديمياً.</a:t>
-            </a:r>
-          </a:p>
-          <a:p>
-            <a:pPr>
-              <a:spcBef>
-                <a:spcPts val="800"/>
-              </a:spcBef>
-              <a:defRPr sz="1600" b="1">
-                <a:solidFill>
-                  <a:srgbClr val="0F172A"/>
-                </a:solidFill>
-                <a:latin typeface="Arial"/>
-              </a:defRPr>
-            </a:pPr>
-            <a:r>
-              <a:t>• 2. Existing Capability: وظيفة مبنية بالفعل في الكود ولكنها تحتاج إثباتاً تشغيلياً.</a:t>
-            </a:r>
-          </a:p>
-          <a:p>
-            <a:pPr>
-              <a:spcBef>
-                <a:spcPts val="800"/>
-              </a:spcBef>
-              <a:defRPr sz="1600" b="1">
-                <a:solidFill>
-                  <a:srgbClr val="0F172A"/>
-                </a:solidFill>
-                <a:latin typeface="Arial"/>
-              </a:defRPr>
-            </a:pPr>
-            <a:r>
-              <a:t>• 3. Proposed Improvement: تحسينات مقترحة للمستقبل ولا تعد جزءاً من خط الأساس.</a:t>
-            </a:r>
-          </a:p>
-          <a:p>
-            <a:pPr>
-              <a:spcBef>
-                <a:spcPts val="800"/>
-              </a:spcBef>
-              <a:defRPr sz="1600" b="1">
-                <a:solidFill>
-                  <a:srgbClr val="0F172A"/>
-                </a:solidFill>
-                <a:latin typeface="Arial"/>
-              </a:defRPr>
-            </a:pPr>
-            <a:r>
-              <a:t>• 4. Missing: وظيفة متوقعة لكن فحص الكود أثبت غيابها (مثل الحذف الشبكي).</a:t>
-            </a:r>
-          </a:p>
-          <a:p>
-            <a:pPr>
-              <a:spcBef>
-                <a:spcPts val="800"/>
-              </a:spcBef>
-              <a:defRPr sz="1600" b="1">
-                <a:solidFill>
-                  <a:srgbClr val="0F172A"/>
-                </a:solidFill>
-                <a:latin typeface="Arial"/>
-              </a:defRPr>
-            </a:pPr>
-            <a:r>
-              <a:t>• 5. Not Verified: كود موجود بالمستودع لم يُختبر بين جهازين حقيقيين.</a:t>
-            </a:r>
-          </a:p>
-        </p:txBody>
-      </p:sp>
-      <p:sp>
-        <p:nvSpPr>
-          <p:cNvPr id="10" name="Rounded Rectangle 9"/>
-          <p:cNvSpPr/>
-          <p:nvPr/>
-        </p:nvSpPr>
-        <p:spPr>
-          <a:xfrm>
-            <a:off x="6217920" y="1645920"/>
-            <a:ext cx="5120640" cy="4389120"/>
+            <a:off x="6217920" y="1554480"/>
+            <a:ext cx="5120640" cy="1828800"/>
           </a:xfrm>
           <a:prstGeom prst="roundRect">
             <a:avLst/>
@@ -7690,96 +8078,368 @@
           <a:bodyPr rtlCol="0" anchor="ctr" wrap="square"/>
           <a:lstStyle/>
           <a:p>
-            <a:pPr algn="ctr">
-              <a:defRPr sz="2100" b="1">
+            <a:pPr algn="r" rtl="1"/>
+            <a:r>
+              <a:rPr sz="1900" b="1" lang="ar-SA" rtl="1">
                 <a:solidFill>
                   <a:srgbClr val="0F2B5C"/>
                 </a:solidFill>
                 <a:latin typeface="Arial"/>
-              </a:defRPr>
+              </a:rPr>
+              <a:t>نموذج التصنيف الخماسي للمتطلبات</a:t>
+            </a:r>
+          </a:p>
+          <a:p>
+            <a:pPr algn="r" rtl="0">
+              <a:spcBef>
+                <a:spcPts val="300"/>
+              </a:spcBef>
             </a:pPr>
             <a:r>
-              <a:t>📑 محتويات وثيقة SRS المعتمدة:</a:t>
-            </a:r>
-          </a:p>
-          <a:p>
-            <a:pPr>
+              <a:rPr sz="1300" b="1" lang="en-US" rtl="0">
+                <a:solidFill>
+                  <a:srgbClr val="059669"/>
+                </a:solidFill>
+                <a:latin typeface="Consolas"/>
+              </a:rPr>
+              <a:t>[5-Tier Requirement Classification]</a:t>
+            </a:r>
+          </a:p>
+          <a:p>
+            <a:pPr algn="r" rtl="1">
               <a:spcBef>
-                <a:spcPts val="800"/>
+                <a:spcPts val="600"/>
               </a:spcBef>
-              <a:defRPr sz="1600" b="1">
+            </a:pPr>
+            <a:r>
+              <a:rPr sz="1500" b="0" lang="ar-SA" rtl="1">
                 <a:solidFill>
                   <a:srgbClr val="0F172A"/>
                 </a:solidFill>
                 <a:latin typeface="Arial"/>
-              </a:defRPr>
+              </a:rPr>
+              <a:t>تصنيف صارم للمتطلبات إلى: رسمي، إمكانية حالية، مقترح، مفقود، وغير مثبت تشغيلياً.</a:t>
+            </a:r>
+          </a:p>
+        </p:txBody>
+      </p:sp>
+      <p:sp>
+        <p:nvSpPr>
+          <p:cNvPr id="10" name="Rounded Rectangle 9"/>
+          <p:cNvSpPr/>
+          <p:nvPr/>
+        </p:nvSpPr>
+        <p:spPr>
+          <a:xfrm>
+            <a:off x="822960" y="1554480"/>
+            <a:ext cx="5120640" cy="1828800"/>
+          </a:xfrm>
+          <a:prstGeom prst="roundRect">
+            <a:avLst/>
+          </a:prstGeom>
+          <a:solidFill>
+            <a:srgbClr val="F8FAFC"/>
+          </a:solidFill>
+          <a:ln w="19050">
+            <a:solidFill>
+              <a:srgbClr val="CBD5E1"/>
+            </a:solidFill>
+          </a:ln>
+        </p:spPr>
+        <p:style>
+          <a:lnRef idx="1">
+            <a:schemeClr val="accent1"/>
+          </a:lnRef>
+          <a:fillRef idx="3">
+            <a:schemeClr val="accent1"/>
+          </a:fillRef>
+          <a:effectRef idx="2">
+            <a:schemeClr val="accent1"/>
+          </a:effectRef>
+          <a:fontRef idx="minor">
+            <a:schemeClr val="lt1"/>
+          </a:fontRef>
+        </p:style>
+        <p:txBody>
+          <a:bodyPr rtlCol="0" anchor="ctr" wrap="square"/>
+          <a:lstStyle/>
+          <a:p>
+            <a:pPr algn="r" rtl="1"/>
+            <a:r>
+              <a:rPr sz="1900" b="1" lang="ar-SA" rtl="1">
+                <a:solidFill>
+                  <a:srgbClr val="0F2B5C"/>
+                </a:solidFill>
+                <a:latin typeface="Arial"/>
+              </a:rPr>
+              <a:t>31 متطلباً وظيفياً مفصلاً</a:t>
+            </a:r>
+          </a:p>
+          <a:p>
+            <a:pPr algn="r" rtl="0">
+              <a:spcBef>
+                <a:spcPts val="300"/>
+              </a:spcBef>
             </a:pPr>
             <a:r>
-              <a:t>• نطاق النظام (Scope): تحديد دقيق لما يقدمه النظام (P2P محلي) وما يقع خارجه (لا خوادم سحابية، لا STUN/TURN).</a:t>
-            </a:r>
-          </a:p>
-          <a:p>
-            <a:pPr>
+              <a:rPr sz="1300" b="1" lang="en-US" rtl="0">
+                <a:solidFill>
+                  <a:srgbClr val="1E40AF"/>
+                </a:solidFill>
+                <a:latin typeface="Consolas"/>
+              </a:rPr>
+              <a:t>[31 Functional Requirements (FR-01 to FR-31)]</a:t>
+            </a:r>
+          </a:p>
+          <a:p>
+            <a:pPr algn="r" rtl="1">
               <a:spcBef>
-                <a:spcPts val="800"/>
+                <a:spcPts val="600"/>
               </a:spcBef>
-              <a:defRPr sz="1600" b="1">
+            </a:pPr>
+            <a:r>
+              <a:rPr sz="1500" b="0" lang="ar-SA" rtl="1">
                 <a:solidFill>
                   <a:srgbClr val="0F172A"/>
                 </a:solidFill>
                 <a:latin typeface="Arial"/>
-              </a:defRPr>
+              </a:rPr>
+              <a:t>توصيف دقيق للمدخلات والمخرجات والمعالجة لكافة وظائف الشبكة والمحادثات والملفات.</a:t>
+            </a:r>
+          </a:p>
+        </p:txBody>
+      </p:sp>
+      <p:sp>
+        <p:nvSpPr>
+          <p:cNvPr id="11" name="Rounded Rectangle 10"/>
+          <p:cNvSpPr/>
+          <p:nvPr/>
+        </p:nvSpPr>
+        <p:spPr>
+          <a:xfrm>
+            <a:off x="6217920" y="3566160"/>
+            <a:ext cx="5120640" cy="1828800"/>
+          </a:xfrm>
+          <a:prstGeom prst="roundRect">
+            <a:avLst/>
+          </a:prstGeom>
+          <a:solidFill>
+            <a:srgbClr val="F8FAFC"/>
+          </a:solidFill>
+          <a:ln w="19050">
+            <a:solidFill>
+              <a:srgbClr val="CBD5E1"/>
+            </a:solidFill>
+          </a:ln>
+        </p:spPr>
+        <p:style>
+          <a:lnRef idx="1">
+            <a:schemeClr val="accent1"/>
+          </a:lnRef>
+          <a:fillRef idx="3">
+            <a:schemeClr val="accent1"/>
+          </a:fillRef>
+          <a:effectRef idx="2">
+            <a:schemeClr val="accent1"/>
+          </a:effectRef>
+          <a:fontRef idx="minor">
+            <a:schemeClr val="lt1"/>
+          </a:fontRef>
+        </p:style>
+        <p:txBody>
+          <a:bodyPr rtlCol="0" anchor="ctr" wrap="square"/>
+          <a:lstStyle/>
+          <a:p>
+            <a:pPr algn="r" rtl="1"/>
+            <a:r>
+              <a:rPr sz="1900" b="1" lang="ar-SA" rtl="1">
+                <a:solidFill>
+                  <a:srgbClr val="0F2B5C"/>
+                </a:solidFill>
+                <a:latin typeface="Arial"/>
+              </a:rPr>
+              <a:t>15 قصة مستخدم قياسية</a:t>
+            </a:r>
+          </a:p>
+          <a:p>
+            <a:pPr algn="r" rtl="0">
+              <a:spcBef>
+                <a:spcPts val="300"/>
+              </a:spcBef>
             </a:pPr>
             <a:r>
-              <a:t>• الأطراف الفاعلة (Actors): المستخدم المحلي، القرين البعيد، نظام Android، عتاد الكاميرا والصوت، وقاعدة بيانات Room.</a:t>
-            </a:r>
-          </a:p>
-          <a:p>
-            <a:pPr>
+              <a:rPr sz="1300" b="1" lang="en-US" rtl="0">
+                <a:solidFill>
+                  <a:srgbClr val="1E40AF"/>
+                </a:solidFill>
+                <a:latin typeface="Consolas"/>
+              </a:rPr>
+              <a:t>[15 Standard User Stories (US-01 to US-15)]</a:t>
+            </a:r>
+          </a:p>
+          <a:p>
+            <a:pPr algn="r" rtl="1">
               <a:spcBef>
-                <a:spcPts val="800"/>
+                <a:spcPts val="600"/>
               </a:spcBef>
-              <a:defRPr sz="1600" b="1">
+            </a:pPr>
+            <a:r>
+              <a:rPr sz="1500" b="0" lang="ar-SA" rtl="1">
                 <a:solidFill>
                   <a:srgbClr val="0F172A"/>
                 </a:solidFill>
                 <a:latin typeface="Arial"/>
-              </a:defRPr>
+              </a:rPr>
+              <a:t>صياغة هندسية قياسية تعبر عن احتياجات المستخدمين وقيمة كل وظيفة مضافة في النظام.</a:t>
+            </a:r>
+          </a:p>
+        </p:txBody>
+      </p:sp>
+      <p:sp>
+        <p:nvSpPr>
+          <p:cNvPr id="12" name="Rounded Rectangle 11"/>
+          <p:cNvSpPr/>
+          <p:nvPr/>
+        </p:nvSpPr>
+        <p:spPr>
+          <a:xfrm>
+            <a:off x="822960" y="3566160"/>
+            <a:ext cx="5120640" cy="1828800"/>
+          </a:xfrm>
+          <a:prstGeom prst="roundRect">
+            <a:avLst/>
+          </a:prstGeom>
+          <a:solidFill>
+            <a:srgbClr val="F8FAFC"/>
+          </a:solidFill>
+          <a:ln w="19050">
+            <a:solidFill>
+              <a:srgbClr val="CBD5E1"/>
+            </a:solidFill>
+          </a:ln>
+        </p:spPr>
+        <p:style>
+          <a:lnRef idx="1">
+            <a:schemeClr val="accent1"/>
+          </a:lnRef>
+          <a:fillRef idx="3">
+            <a:schemeClr val="accent1"/>
+          </a:fillRef>
+          <a:effectRef idx="2">
+            <a:schemeClr val="accent1"/>
+          </a:effectRef>
+          <a:fontRef idx="minor">
+            <a:schemeClr val="lt1"/>
+          </a:fontRef>
+        </p:style>
+        <p:txBody>
+          <a:bodyPr rtlCol="0" anchor="ctr" wrap="square"/>
+          <a:lstStyle/>
+          <a:p>
+            <a:pPr algn="r" rtl="1"/>
+            <a:r>
+              <a:rPr sz="1900" b="1" lang="ar-SA" rtl="1">
+                <a:solidFill>
+                  <a:srgbClr val="0F2B5C"/>
+                </a:solidFill>
+                <a:latin typeface="Arial"/>
+              </a:rPr>
+              <a:t>28 معيار قبول لاختبار النظام</a:t>
+            </a:r>
+          </a:p>
+          <a:p>
+            <a:pPr algn="r" rtl="0">
+              <a:spcBef>
+                <a:spcPts val="300"/>
+              </a:spcBef>
             </a:pPr>
             <a:r>
-              <a:t>• 31 متطلباً وظيفياً (FR-01 إلى FR-31): تغطي الاكتشاف، التراسل، نقل الملفات، المكالمات الصوتية والمرئية، والتشفير.</a:t>
-            </a:r>
-          </a:p>
-          <a:p>
-            <a:pPr>
+              <a:rPr sz="1300" b="1" lang="en-US" rtl="0">
+                <a:solidFill>
+                  <a:srgbClr val="059669"/>
+                </a:solidFill>
+                <a:latin typeface="Consolas"/>
+              </a:rPr>
+              <a:t>[28 Acceptance Criteria (Given/When/Then)]</a:t>
+            </a:r>
+          </a:p>
+          <a:p>
+            <a:pPr algn="r" rtl="1">
               <a:spcBef>
-                <a:spcPts val="800"/>
+                <a:spcPts val="600"/>
               </a:spcBef>
-              <a:defRPr sz="1600" b="1">
+            </a:pPr>
+            <a:r>
+              <a:rPr sz="1500" b="0" lang="ar-SA" rtl="1">
                 <a:solidFill>
                   <a:srgbClr val="0F172A"/>
                 </a:solidFill>
                 <a:latin typeface="Arial"/>
-              </a:defRPr>
-            </a:pPr>
-            <a:r>
-              <a:t>• 15 قصة مستخدم قياسية (US-01 إلى US-15): صياغة هندسية قياسية تعبر عن أهداف المستخدمين.</a:t>
-            </a:r>
-          </a:p>
-          <a:p>
-            <a:pPr>
-              <a:spcBef>
-                <a:spcPts val="800"/>
-              </a:spcBef>
-              <a:defRPr sz="1600" b="1">
-                <a:solidFill>
-                  <a:srgbClr val="0F172A"/>
-                </a:solidFill>
-                <a:latin typeface="Arial"/>
-              </a:defRPr>
-            </a:pPr>
-            <a:r>
-              <a:t>• معايير القبول (Acceptance Criteria): 28 معيار قبول بصيغة (Given / When / Then) لضبط التحقق.</a:t>
+              </a:rPr>
+              <a:t>صياغة معايير القبول بصيغة الشرطية لضبط التحقق من اكتمال المتطلبات.</a:t>
+            </a:r>
+          </a:p>
+        </p:txBody>
+      </p:sp>
+      <p:sp>
+        <p:nvSpPr>
+          <p:cNvPr id="13" name="Rounded Rectangle 12"/>
+          <p:cNvSpPr/>
+          <p:nvPr/>
+        </p:nvSpPr>
+        <p:spPr>
+          <a:xfrm>
+            <a:off x="822960" y="5623560"/>
+            <a:ext cx="10515600" cy="594360"/>
+          </a:xfrm>
+          <a:prstGeom prst="roundRect">
+            <a:avLst/>
+          </a:prstGeom>
+          <a:solidFill>
+            <a:srgbClr val="F8FAFC"/>
+          </a:solidFill>
+          <a:ln w="12700">
+            <a:solidFill>
+              <a:srgbClr val="CBD5E1"/>
+            </a:solidFill>
+          </a:ln>
+        </p:spPr>
+        <p:style>
+          <a:lnRef idx="1">
+            <a:schemeClr val="accent1"/>
+          </a:lnRef>
+          <a:fillRef idx="3">
+            <a:schemeClr val="accent1"/>
+          </a:fillRef>
+          <a:effectRef idx="2">
+            <a:schemeClr val="accent1"/>
+          </a:effectRef>
+          <a:fontRef idx="minor">
+            <a:schemeClr val="lt1"/>
+          </a:fontRef>
+        </p:style>
+        <p:txBody>
+          <a:bodyPr rtlCol="0" anchor="ctr"/>
+          <a:lstStyle/>
+          <a:p>
+            <a:pPr algn="r" rtl="1"/>
+            <a:r>
+              <a:rPr sz="1200" b="1" lang="ar-SA" rtl="1">
+                <a:solidFill>
+                  <a:srgbClr val="0F2B5C"/>
+                </a:solidFill>
+                <a:latin typeface="Arial"/>
+              </a:rPr>
+              <a:t>المكون البرمجي: وثيقة مواصفات المتطلبات البرمجية المعتمدة رسمياً  |  </a:t>
+            </a:r>
+            <a:r>
+              <a:rPr sz="1200" b="1" lang="en-US" rtl="0">
+                <a:solidFill>
+                  <a:srgbClr val="1E40AF"/>
+                </a:solidFill>
+                <a:latin typeface="Consolas"/>
+              </a:rPr>
+              <a:t>docs/SRS.md</a:t>
             </a:r>
           </a:p>
         </p:txBody>
@@ -7811,13 +8471,13 @@
         <p:spPr>
           <a:xfrm>
             <a:off x="0" y="0"/>
-            <a:ext cx="12191695" cy="91440"/>
+            <a:ext cx="12191695" cy="109728"/>
           </a:xfrm>
           <a:prstGeom prst="rect">
             <a:avLst/>
           </a:prstGeom>
           <a:solidFill>
-            <a:srgbClr val="1E40AF"/>
+            <a:srgbClr val="0F2B5C"/>
           </a:solidFill>
           <a:ln>
             <a:noFill/>
@@ -7853,44 +8513,8 @@
         </p:nvSpPr>
         <p:spPr>
           <a:xfrm>
-            <a:off x="822960" y="228600"/>
-            <a:ext cx="7772400" cy="320040"/>
-          </a:xfrm>
-          <a:prstGeom prst="rect">
-            <a:avLst/>
-          </a:prstGeom>
-          <a:noFill/>
-        </p:spPr>
-        <p:txBody>
-          <a:bodyPr wrap="square">
-            <a:spAutoFit/>
-          </a:bodyPr>
-          <a:lstStyle/>
-          <a:p>
-            <a:pPr>
-              <a:defRPr sz="1300" b="1">
-                <a:solidFill>
-                  <a:srgbClr val="1E40AF"/>
-                </a:solidFill>
-                <a:latin typeface="Arial"/>
-              </a:defRPr>
-            </a:pPr>
-            <a:r>
-              <a:t>LOCAL CONTACT P2P  |  إدارة خط الأساس</a:t>
-            </a:r>
-          </a:p>
-        </p:txBody>
-      </p:sp>
-      <p:sp>
-        <p:nvSpPr>
-          <p:cNvPr id="4" name="TextBox 3"/>
-          <p:cNvSpPr txBox="1"/>
-          <p:nvPr/>
-        </p:nvSpPr>
-        <p:spPr>
-          <a:xfrm>
-            <a:off x="10241280" y="6309360"/>
-            <a:ext cx="1188720" cy="365760"/>
+            <a:off x="3200400" y="228600"/>
+            <a:ext cx="8138160" cy="320040"/>
           </a:xfrm>
           <a:prstGeom prst="rect">
             <a:avLst/>
@@ -7903,16 +8527,50 @@
           </a:bodyPr>
           <a:lstStyle/>
           <a:p>
-            <a:pPr algn="r">
-              <a:defRPr sz="1400" b="1">
-                <a:solidFill>
-                  <a:srgbClr val="0F2B5C"/>
-                </a:solidFill>
-                <a:latin typeface="Arial"/>
-              </a:defRPr>
-            </a:pPr>
-            <a:r>
-              <a:t>4 / 12</a:t>
+            <a:pPr algn="r" rtl="1"/>
+            <a:r>
+              <a:rPr sz="1300" b="1" lang="ar-SA" rtl="1">
+                <a:solidFill>
+                  <a:srgbClr val="1E40AF"/>
+                </a:solidFill>
+                <a:latin typeface="Arial"/>
+              </a:rPr>
+              <a:t>مشروع الاتصال المحلي المباشر  •  إدارة خط الأساس</a:t>
+            </a:r>
+          </a:p>
+        </p:txBody>
+      </p:sp>
+      <p:sp>
+        <p:nvSpPr>
+          <p:cNvPr id="4" name="TextBox 3"/>
+          <p:cNvSpPr txBox="1"/>
+          <p:nvPr/>
+        </p:nvSpPr>
+        <p:spPr>
+          <a:xfrm>
+            <a:off x="822960" y="228600"/>
+            <a:ext cx="1828800" cy="320040"/>
+          </a:xfrm>
+          <a:prstGeom prst="rect">
+            <a:avLst/>
+          </a:prstGeom>
+          <a:noFill/>
+        </p:spPr>
+        <p:txBody>
+          <a:bodyPr wrap="none">
+            <a:spAutoFit/>
+          </a:bodyPr>
+          <a:lstStyle/>
+          <a:p>
+            <a:pPr algn="l" rtl="0"/>
+            <a:r>
+              <a:rPr sz="1200" b="1" lang="en-US" rtl="0">
+                <a:solidFill>
+                  <a:srgbClr val="475569"/>
+                </a:solidFill>
+                <a:latin typeface="Consolas"/>
+              </a:rPr>
+              <a:t>Slide 4 / 12</a:t>
             </a:r>
           </a:p>
         </p:txBody>
@@ -7925,8 +8583,8 @@
         </p:nvSpPr>
         <p:spPr>
           <a:xfrm>
-            <a:off x="822960" y="594360"/>
-            <a:ext cx="8961120" cy="685800"/>
+            <a:off x="4023360" y="566928"/>
+            <a:ext cx="7315200" cy="685800"/>
           </a:xfrm>
           <a:prstGeom prst="rect">
             <a:avLst/>
@@ -7934,21 +8592,20 @@
           <a:noFill/>
         </p:spPr>
         <p:txBody>
-          <a:bodyPr wrap="square">
+          <a:bodyPr wrap="none">
             <a:spAutoFit/>
           </a:bodyPr>
           <a:lstStyle/>
           <a:p>
-            <a:pPr>
-              <a:defRPr sz="2800" b="1">
+            <a:pPr algn="r" rtl="1"/>
+            <a:r>
+              <a:rPr sz="3000" b="1" lang="ar-SA" rtl="1">
                 <a:solidFill>
                   <a:srgbClr val="0F2B5C"/>
                 </a:solidFill>
                 <a:latin typeface="Arial"/>
-              </a:defRPr>
-            </a:pPr>
-            <a:r>
-              <a:t>توثيق خط الأساس وضبط بيئة البناء (Baseline &amp; Git)</a:t>
+              </a:rPr>
+              <a:t>توثيق خط الأساس وضبط بيئة البناء</a:t>
             </a:r>
           </a:p>
         </p:txBody>
@@ -7961,8 +8618,8 @@
         </p:nvSpPr>
         <p:spPr>
           <a:xfrm>
-            <a:off x="8961120" y="621792"/>
-            <a:ext cx="2377440" cy="438912"/>
+            <a:off x="822960" y="621792"/>
+            <a:ext cx="3017520" cy="502920"/>
           </a:xfrm>
           <a:prstGeom prst="roundRect">
             <a:avLst/>
@@ -7994,16 +8651,15 @@
           <a:bodyPr rtlCol="0" anchor="ctr"/>
           <a:lstStyle/>
           <a:p>
-            <a:pPr algn="ctr">
-              <a:defRPr sz="1200" b="1">
+            <a:pPr algn="ctr" rtl="0"/>
+            <a:r>
+              <a:rPr sz="1400" b="1" lang="en-US" rtl="0">
                 <a:solidFill>
                   <a:srgbClr val="059669"/>
                 </a:solidFill>
                 <a:latin typeface="Consolas"/>
-              </a:defRPr>
-            </a:pPr>
-            <a:r>
-              <a:t>docs/Baseline.md</a:t>
+              </a:rPr>
+              <a:t>docs/Baseline.md (308 lines)</a:t>
             </a:r>
           </a:p>
         </p:txBody>
@@ -8016,7 +8672,7 @@
         </p:nvSpPr>
         <p:spPr>
           <a:xfrm>
-            <a:off x="822960" y="1353312"/>
+            <a:off x="822960" y="1325880"/>
             <a:ext cx="10515600" cy="18288"/>
           </a:xfrm>
           <a:prstGeom prst="rect">
@@ -8059,8 +8715,8 @@
         </p:nvSpPr>
         <p:spPr>
           <a:xfrm>
-            <a:off x="822960" y="6309360"/>
-            <a:ext cx="7315200" cy="320040"/>
+            <a:off x="822960" y="6355080"/>
+            <a:ext cx="10515600" cy="320040"/>
           </a:xfrm>
           <a:prstGeom prst="rect">
             <a:avLst/>
@@ -8073,16 +8729,15 @@
           </a:bodyPr>
           <a:lstStyle/>
           <a:p>
-            <a:pPr>
-              <a:defRPr sz="1100">
+            <a:pPr algn="r" rtl="1"/>
+            <a:r>
+              <a:rPr sz="1050" b="0" lang="ar-SA" rtl="1">
                 <a:solidFill>
                   <a:srgbClr val="475569"/>
                 </a:solidFill>
                 <a:latin typeface="Arial"/>
-              </a:defRPr>
-            </a:pPr>
-            <a:r>
-              <a:t>مشروع تخرج LOCAL CONTACT — مناقشة أكاديمية محكمة</a:t>
+              </a:rPr>
+              <a:t>مناقشة مشروع التخرج الأكاديمية — نظام اتصال محلي مستقل دون خادم وسيط</a:t>
             </a:r>
           </a:p>
         </p:txBody>
@@ -8095,8 +8750,8 @@
         </p:nvSpPr>
         <p:spPr>
           <a:xfrm>
-            <a:off x="822960" y="1645920"/>
-            <a:ext cx="10515600" cy="4389120"/>
+            <a:off x="6217920" y="1554480"/>
+            <a:ext cx="5120640" cy="1828800"/>
           </a:xfrm>
           <a:prstGeom prst="roundRect">
             <a:avLst/>
@@ -8128,96 +8783,368 @@
           <a:bodyPr rtlCol="0" anchor="ctr" wrap="square"/>
           <a:lstStyle/>
           <a:p>
-            <a:pPr algn="ctr">
-              <a:defRPr sz="2200" b="1">
+            <a:pPr algn="r" rtl="1"/>
+            <a:r>
+              <a:rPr sz="1900" b="1" lang="ar-SA" rtl="1">
                 <a:solidFill>
                   <a:srgbClr val="0F2B5C"/>
                 </a:solidFill>
                 <a:latin typeface="Arial"/>
-              </a:defRPr>
+              </a:rPr>
+              <a:t>النسخة المرجعية المعتمدة</a:t>
+            </a:r>
+          </a:p>
+          <a:p>
+            <a:pPr algn="r" rtl="0">
+              <a:spcBef>
+                <a:spcPts val="300"/>
+              </a:spcBef>
             </a:pPr>
             <a:r>
-              <a:t>📌 عناصر خط الأساس المعتمد في docs/Baseline.md (308 lines):</a:t>
-            </a:r>
-          </a:p>
-          <a:p>
-            <a:pPr>
+              <a:rPr sz="1300" b="1" lang="en-US" rtl="0">
+                <a:solidFill>
+                  <a:srgbClr val="059669"/>
+                </a:solidFill>
+                <a:latin typeface="Consolas"/>
+              </a:rPr>
+              <a:t>[Baseline Commit: 7111182 (Clean Tree)]</a:t>
+            </a:r>
+          </a:p>
+          <a:p>
+            <a:pPr algn="r" rtl="1">
               <a:spcBef>
-                <a:spcPts val="1200"/>
+                <a:spcPts val="600"/>
               </a:spcBef>
-              <a:defRPr sz="1800" b="1">
+            </a:pPr>
+            <a:r>
+              <a:rPr sz="1500" b="0" lang="ar-SA" rtl="1">
                 <a:solidFill>
                   <a:srgbClr val="0F172A"/>
                 </a:solidFill>
                 <a:latin typeface="Arial"/>
-              </a:defRPr>
+              </a:rPr>
+              <a:t>تثبيت نقطة بداية رسمية موثقة عبر فحص شجرة العمل لضمان نظافتها وخلوها من التعليق.</a:t>
+            </a:r>
+          </a:p>
+        </p:txBody>
+      </p:sp>
+      <p:sp>
+        <p:nvSpPr>
+          <p:cNvPr id="10" name="Rounded Rectangle 9"/>
+          <p:cNvSpPr/>
+          <p:nvPr/>
+        </p:nvSpPr>
+        <p:spPr>
+          <a:xfrm>
+            <a:off x="822960" y="1554480"/>
+            <a:ext cx="5120640" cy="1828800"/>
+          </a:xfrm>
+          <a:prstGeom prst="roundRect">
+            <a:avLst/>
+          </a:prstGeom>
+          <a:solidFill>
+            <a:srgbClr val="F8FAFC"/>
+          </a:solidFill>
+          <a:ln w="19050">
+            <a:solidFill>
+              <a:srgbClr val="CBD5E1"/>
+            </a:solidFill>
+          </a:ln>
+        </p:spPr>
+        <p:style>
+          <a:lnRef idx="1">
+            <a:schemeClr val="accent1"/>
+          </a:lnRef>
+          <a:fillRef idx="3">
+            <a:schemeClr val="accent1"/>
+          </a:fillRef>
+          <a:effectRef idx="2">
+            <a:schemeClr val="accent1"/>
+          </a:effectRef>
+          <a:fontRef idx="minor">
+            <a:schemeClr val="lt1"/>
+          </a:fontRef>
+        </p:style>
+        <p:txBody>
+          <a:bodyPr rtlCol="0" anchor="ctr" wrap="square"/>
+          <a:lstStyle/>
+          <a:p>
+            <a:pPr algn="r" rtl="1"/>
+            <a:r>
+              <a:rPr sz="1900" b="1" lang="ar-SA" rtl="1">
+                <a:solidFill>
+                  <a:srgbClr val="0F2B5C"/>
+                </a:solidFill>
+                <a:latin typeface="Arial"/>
+              </a:rPr>
+              <a:t>تكرارية بيئة البناء</a:t>
+            </a:r>
+          </a:p>
+          <a:p>
+            <a:pPr algn="r" rtl="0">
+              <a:spcBef>
+                <a:spcPts val="300"/>
+              </a:spcBef>
             </a:pPr>
             <a:r>
-              <a:t>• Commit Hash المرجعي الثابت: 71111825645c2b3c6a926f739455c4ffda3c0963 — تم التحقق من نظافة شجرة العمل (Clean Tree).</a:t>
-            </a:r>
-          </a:p>
-          <a:p>
-            <a:pPr>
+              <a:rPr sz="1300" b="1" lang="en-US" rtl="0">
+                <a:solidFill>
+                  <a:srgbClr val="1E40AF"/>
+                </a:solidFill>
+                <a:latin typeface="Consolas"/>
+              </a:rPr>
+              <a:t>[Gradle 9.4.1 &amp; AGP 9.1.1 &amp; Kotlin 2.2]</a:t>
+            </a:r>
+          </a:p>
+          <a:p>
+            <a:pPr algn="r" rtl="1">
               <a:spcBef>
-                <a:spcPts val="1200"/>
+                <a:spcPts val="600"/>
               </a:spcBef>
-              <a:defRPr sz="1800" b="1">
+            </a:pPr>
+            <a:r>
+              <a:rPr sz="1500" b="0" lang="ar-SA" rtl="1">
                 <a:solidFill>
                   <a:srgbClr val="0F172A"/>
                 </a:solidFill>
                 <a:latin typeface="Arial"/>
-              </a:defRPr>
+              </a:rPr>
+              <a:t>تثبيت أدوات ومحركات البناء لضمان إنتاج نفس حزمة التطبيق عند أي مهندس آخر.</a:t>
+            </a:r>
+          </a:p>
+        </p:txBody>
+      </p:sp>
+      <p:sp>
+        <p:nvSpPr>
+          <p:cNvPr id="11" name="Rounded Rectangle 10"/>
+          <p:cNvSpPr/>
+          <p:nvPr/>
+        </p:nvSpPr>
+        <p:spPr>
+          <a:xfrm>
+            <a:off x="6217920" y="3566160"/>
+            <a:ext cx="5120640" cy="1828800"/>
+          </a:xfrm>
+          <a:prstGeom prst="roundRect">
+            <a:avLst/>
+          </a:prstGeom>
+          <a:solidFill>
+            <a:srgbClr val="F8FAFC"/>
+          </a:solidFill>
+          <a:ln w="19050">
+            <a:solidFill>
+              <a:srgbClr val="CBD5E1"/>
+            </a:solidFill>
+          </a:ln>
+        </p:spPr>
+        <p:style>
+          <a:lnRef idx="1">
+            <a:schemeClr val="accent1"/>
+          </a:lnRef>
+          <a:fillRef idx="3">
+            <a:schemeClr val="accent1"/>
+          </a:fillRef>
+          <a:effectRef idx="2">
+            <a:schemeClr val="accent1"/>
+          </a:effectRef>
+          <a:fontRef idx="minor">
+            <a:schemeClr val="lt1"/>
+          </a:fontRef>
+        </p:style>
+        <p:txBody>
+          <a:bodyPr rtlCol="0" anchor="ctr" wrap="square"/>
+          <a:lstStyle/>
+          <a:p>
+            <a:pPr algn="r" rtl="1"/>
+            <a:r>
+              <a:rPr sz="1900" b="1" lang="ar-SA" rtl="1">
+                <a:solidFill>
+                  <a:srgbClr val="0F2B5C"/>
+                </a:solidFill>
+                <a:latin typeface="Arial"/>
+              </a:rPr>
+              <a:t>مكافحة انزلاق النطاق</a:t>
+            </a:r>
+          </a:p>
+          <a:p>
+            <a:pPr algn="r" rtl="0">
+              <a:spcBef>
+                <a:spcPts val="300"/>
+              </a:spcBef>
             </a:pPr>
             <a:r>
-              <a:t>• تكرارية بيئة البناء (Reproducibility): Gradle 9.4.1 و AGP 9.1.1 و Kotlin 2.2.10 لضمان بناء نفس حزمة الـ APK عند أي طرف.</a:t>
-            </a:r>
-          </a:p>
-          <a:p>
-            <a:pPr>
+              <a:rPr sz="1300" b="1" lang="en-US" rtl="0">
+                <a:solidFill>
+                  <a:srgbClr val="059669"/>
+                </a:solidFill>
+                <a:latin typeface="Consolas"/>
+              </a:rPr>
+              <a:t>[Anti Scope Creep Enforced]</a:t>
+            </a:r>
+          </a:p>
+          <a:p>
+            <a:pPr algn="r" rtl="1">
               <a:spcBef>
-                <a:spcPts val="1200"/>
+                <a:spcPts val="600"/>
               </a:spcBef>
-              <a:defRPr sz="1800" b="1">
+            </a:pPr>
+            <a:r>
+              <a:rPr sz="1500" b="0" lang="ar-SA" rtl="1">
                 <a:solidFill>
                   <a:srgbClr val="0F172A"/>
                 </a:solidFill>
                 <a:latin typeface="Arial"/>
-              </a:defRPr>
+              </a:rPr>
+              <a:t>منع إضافة ميزات عشوائية دون دراسة أثرها الهندسي على كفاءة واستقرار التطبيق.</a:t>
+            </a:r>
+          </a:p>
+        </p:txBody>
+      </p:sp>
+      <p:sp>
+        <p:nvSpPr>
+          <p:cNvPr id="12" name="Rounded Rectangle 11"/>
+          <p:cNvSpPr/>
+          <p:nvPr/>
+        </p:nvSpPr>
+        <p:spPr>
+          <a:xfrm>
+            <a:off x="822960" y="3566160"/>
+            <a:ext cx="5120640" cy="1828800"/>
+          </a:xfrm>
+          <a:prstGeom prst="roundRect">
+            <a:avLst/>
+          </a:prstGeom>
+          <a:solidFill>
+            <a:srgbClr val="F8FAFC"/>
+          </a:solidFill>
+          <a:ln w="19050">
+            <a:solidFill>
+              <a:srgbClr val="CBD5E1"/>
+            </a:solidFill>
+          </a:ln>
+        </p:spPr>
+        <p:style>
+          <a:lnRef idx="1">
+            <a:schemeClr val="accent1"/>
+          </a:lnRef>
+          <a:fillRef idx="3">
+            <a:schemeClr val="accent1"/>
+          </a:fillRef>
+          <a:effectRef idx="2">
+            <a:schemeClr val="accent1"/>
+          </a:effectRef>
+          <a:fontRef idx="minor">
+            <a:schemeClr val="lt1"/>
+          </a:fontRef>
+        </p:style>
+        <p:txBody>
+          <a:bodyPr rtlCol="0" anchor="ctr" wrap="square"/>
+          <a:lstStyle/>
+          <a:p>
+            <a:pPr algn="r" rtl="1"/>
+            <a:r>
+              <a:rPr sz="1900" b="1" lang="ar-SA" rtl="1">
+                <a:solidFill>
+                  <a:srgbClr val="0F2B5C"/>
+                </a:solidFill>
+                <a:latin typeface="Arial"/>
+              </a:rPr>
+              <a:t>حصر الوظائف الميداني</a:t>
+            </a:r>
+          </a:p>
+          <a:p>
+            <a:pPr algn="r" rtl="0">
+              <a:spcBef>
+                <a:spcPts val="300"/>
+              </a:spcBef>
             </a:pPr>
             <a:r>
-              <a:t>• مستويات SDK ومكتبات النظام: compileSdk = 36، minSdk = 24 (Android 7.0+)، واستخدام KSP لمعالجة الرموز في Room DB و Moshi.</a:t>
-            </a:r>
-          </a:p>
-          <a:p>
-            <a:pPr>
+              <a:rPr sz="1300" b="1" lang="en-US" rtl="0">
+                <a:solidFill>
+                  <a:srgbClr val="1E40AF"/>
+                </a:solidFill>
+                <a:latin typeface="Consolas"/>
+              </a:rPr>
+              <a:t>[Features Inventory Table]</a:t>
+            </a:r>
+          </a:p>
+          <a:p>
+            <a:pPr algn="r" rtl="1">
               <a:spcBef>
-                <a:spcPts val="1200"/>
+                <a:spcPts val="600"/>
               </a:spcBef>
-              <a:defRPr sz="1800" b="1">
+            </a:pPr>
+            <a:r>
+              <a:rPr sz="1500" b="0" lang="ar-SA" rtl="1">
                 <a:solidFill>
                   <a:srgbClr val="0F172A"/>
                 </a:solidFill>
                 <a:latin typeface="Arial"/>
-              </a:defRPr>
-            </a:pPr>
-            <a:r>
-              <a:t>• منع انزلاق النطاق (Scope Creep): تثبيت النطاق المرجعي يمنع إضافة ميزات غير مدروسة دون توثيق أثرها الهندسي على النظام.</a:t>
-            </a:r>
-          </a:p>
-          <a:p>
-            <a:pPr>
-              <a:spcBef>
-                <a:spcPts val="1200"/>
-              </a:spcBef>
-              <a:defRPr sz="1800" b="1">
-                <a:solidFill>
-                  <a:srgbClr val="0F172A"/>
-                </a:solidFill>
-                <a:latin typeface="Arial"/>
-              </a:defRPr>
-            </a:pPr>
-            <a:r>
-              <a:t>• حصر الوظائف (Features Inventory): توثيق 14 ميزة رئيسية مع ربطها بملفات الكود وحالتها الدقيقة (Implemented - Not Tested).</a:t>
+              </a:rPr>
+              <a:t>جدول تفصيلي يضم 14 ميزة رئيسية يربط كل ميزة بملفات الكود وحالتها الدقيقة.</a:t>
+            </a:r>
+          </a:p>
+        </p:txBody>
+      </p:sp>
+      <p:sp>
+        <p:nvSpPr>
+          <p:cNvPr id="13" name="Rounded Rectangle 12"/>
+          <p:cNvSpPr/>
+          <p:nvPr/>
+        </p:nvSpPr>
+        <p:spPr>
+          <a:xfrm>
+            <a:off x="822960" y="5623560"/>
+            <a:ext cx="10515600" cy="594360"/>
+          </a:xfrm>
+          <a:prstGeom prst="roundRect">
+            <a:avLst/>
+          </a:prstGeom>
+          <a:solidFill>
+            <a:srgbClr val="F8FAFC"/>
+          </a:solidFill>
+          <a:ln w="12700">
+            <a:solidFill>
+              <a:srgbClr val="CBD5E1"/>
+            </a:solidFill>
+          </a:ln>
+        </p:spPr>
+        <p:style>
+          <a:lnRef idx="1">
+            <a:schemeClr val="accent1"/>
+          </a:lnRef>
+          <a:fillRef idx="3">
+            <a:schemeClr val="accent1"/>
+          </a:fillRef>
+          <a:effectRef idx="2">
+            <a:schemeClr val="accent1"/>
+          </a:effectRef>
+          <a:fontRef idx="minor">
+            <a:schemeClr val="lt1"/>
+          </a:fontRef>
+        </p:style>
+        <p:txBody>
+          <a:bodyPr rtlCol="0" anchor="ctr"/>
+          <a:lstStyle/>
+          <a:p>
+            <a:pPr algn="r" rtl="1"/>
+            <a:r>
+              <a:rPr sz="1200" b="1" lang="ar-SA" rtl="1">
+                <a:solidFill>
+                  <a:srgbClr val="0F2B5C"/>
+                </a:solidFill>
+                <a:latin typeface="Arial"/>
+              </a:rPr>
+              <a:t>المكون البرمجي: وثيقة خط الأساس الهندسي وضبط الإصدارات  |  </a:t>
+            </a:r>
+            <a:r>
+              <a:rPr sz="1200" b="1" lang="en-US" rtl="0">
+                <a:solidFill>
+                  <a:srgbClr val="1E40AF"/>
+                </a:solidFill>
+                <a:latin typeface="Consolas"/>
+              </a:rPr>
+              <a:t>docs/Baseline.md</a:t>
             </a:r>
           </a:p>
         </p:txBody>
@@ -8249,13 +9176,13 @@
         <p:spPr>
           <a:xfrm>
             <a:off x="0" y="0"/>
-            <a:ext cx="12191695" cy="91440"/>
+            <a:ext cx="12191695" cy="109728"/>
           </a:xfrm>
           <a:prstGeom prst="rect">
             <a:avLst/>
           </a:prstGeom>
           <a:solidFill>
-            <a:srgbClr val="1E40AF"/>
+            <a:srgbClr val="0F2B5C"/>
           </a:solidFill>
           <a:ln>
             <a:noFill/>
@@ -8291,44 +9218,8 @@
         </p:nvSpPr>
         <p:spPr>
           <a:xfrm>
-            <a:off x="822960" y="228600"/>
-            <a:ext cx="7772400" cy="320040"/>
-          </a:xfrm>
-          <a:prstGeom prst="rect">
-            <a:avLst/>
-          </a:prstGeom>
-          <a:noFill/>
-        </p:spPr>
-        <p:txBody>
-          <a:bodyPr wrap="square">
-            <a:spAutoFit/>
-          </a:bodyPr>
-          <a:lstStyle/>
-          <a:p>
-            <a:pPr>
-              <a:defRPr sz="1300" b="1">
-                <a:solidFill>
-                  <a:srgbClr val="1E40AF"/>
-                </a:solidFill>
-                <a:latin typeface="Arial"/>
-              </a:defRPr>
-            </a:pPr>
-            <a:r>
-              <a:t>LOCAL CONTACT P2P  |  التصميم المعماري</a:t>
-            </a:r>
-          </a:p>
-        </p:txBody>
-      </p:sp>
-      <p:sp>
-        <p:nvSpPr>
-          <p:cNvPr id="4" name="TextBox 3"/>
-          <p:cNvSpPr txBox="1"/>
-          <p:nvPr/>
-        </p:nvSpPr>
-        <p:spPr>
-          <a:xfrm>
-            <a:off x="10241280" y="6309360"/>
-            <a:ext cx="1188720" cy="365760"/>
+            <a:off x="3200400" y="228600"/>
+            <a:ext cx="8138160" cy="320040"/>
           </a:xfrm>
           <a:prstGeom prst="rect">
             <a:avLst/>
@@ -8341,16 +9232,50 @@
           </a:bodyPr>
           <a:lstStyle/>
           <a:p>
-            <a:pPr algn="r">
-              <a:defRPr sz="1400" b="1">
-                <a:solidFill>
-                  <a:srgbClr val="0F2B5C"/>
-                </a:solidFill>
-                <a:latin typeface="Arial"/>
-              </a:defRPr>
-            </a:pPr>
-            <a:r>
-              <a:t>5 / 12</a:t>
+            <a:pPr algn="r" rtl="1"/>
+            <a:r>
+              <a:rPr sz="1300" b="1" lang="ar-SA" rtl="1">
+                <a:solidFill>
+                  <a:srgbClr val="1E40AF"/>
+                </a:solidFill>
+                <a:latin typeface="Arial"/>
+              </a:rPr>
+              <a:t>مشروع الاتصال المحلي المباشر  •  التصميم المعماري</a:t>
+            </a:r>
+          </a:p>
+        </p:txBody>
+      </p:sp>
+      <p:sp>
+        <p:nvSpPr>
+          <p:cNvPr id="4" name="TextBox 3"/>
+          <p:cNvSpPr txBox="1"/>
+          <p:nvPr/>
+        </p:nvSpPr>
+        <p:spPr>
+          <a:xfrm>
+            <a:off x="822960" y="228600"/>
+            <a:ext cx="1828800" cy="320040"/>
+          </a:xfrm>
+          <a:prstGeom prst="rect">
+            <a:avLst/>
+          </a:prstGeom>
+          <a:noFill/>
+        </p:spPr>
+        <p:txBody>
+          <a:bodyPr wrap="none">
+            <a:spAutoFit/>
+          </a:bodyPr>
+          <a:lstStyle/>
+          <a:p>
+            <a:pPr algn="l" rtl="0"/>
+            <a:r>
+              <a:rPr sz="1200" b="1" lang="en-US" rtl="0">
+                <a:solidFill>
+                  <a:srgbClr val="475569"/>
+                </a:solidFill>
+                <a:latin typeface="Consolas"/>
+              </a:rPr>
+              <a:t>Slide 5 / 12</a:t>
             </a:r>
           </a:p>
         </p:txBody>
@@ -8363,8 +9288,8 @@
         </p:nvSpPr>
         <p:spPr>
           <a:xfrm>
-            <a:off x="822960" y="594360"/>
-            <a:ext cx="8961120" cy="685800"/>
+            <a:off x="4023360" y="566928"/>
+            <a:ext cx="7315200" cy="685800"/>
           </a:xfrm>
           <a:prstGeom prst="rect">
             <a:avLst/>
@@ -8372,21 +9297,20 @@
           <a:noFill/>
         </p:spPr>
         <p:txBody>
-          <a:bodyPr wrap="square">
+          <a:bodyPr wrap="none">
             <a:spAutoFit/>
           </a:bodyPr>
           <a:lstStyle/>
           <a:p>
-            <a:pPr>
-              <a:defRPr sz="2800" b="1">
+            <a:pPr algn="r" rtl="1"/>
+            <a:r>
+              <a:rPr sz="3000" b="1" lang="ar-SA" rtl="1">
                 <a:solidFill>
                   <a:srgbClr val="0F2B5C"/>
                 </a:solidFill>
                 <a:latin typeface="Arial"/>
-              </a:defRPr>
-            </a:pPr>
-            <a:r>
-              <a:t>السياق المعماري للنظام وتوزيع المسؤوليات (P2P Architecture)</a:t>
+              </a:rPr>
+              <a:t>السياق المعماري للنظام وهيكلية شبكة P2P</a:t>
             </a:r>
           </a:p>
         </p:txBody>
@@ -8399,8 +9323,8 @@
         </p:nvSpPr>
         <p:spPr>
           <a:xfrm>
-            <a:off x="8961120" y="621792"/>
-            <a:ext cx="2377440" cy="438912"/>
+            <a:off x="822960" y="621792"/>
+            <a:ext cx="3017520" cy="502920"/>
           </a:xfrm>
           <a:prstGeom prst="roundRect">
             <a:avLst/>
@@ -8432,16 +9356,15 @@
           <a:bodyPr rtlCol="0" anchor="ctr"/>
           <a:lstStyle/>
           <a:p>
-            <a:pPr algn="ctr">
-              <a:defRPr sz="1200" b="1">
+            <a:pPr algn="ctr" rtl="0"/>
+            <a:r>
+              <a:rPr sz="1400" b="1" lang="en-US" rtl="0">
                 <a:solidFill>
                   <a:srgbClr val="1E40AF"/>
                 </a:solidFill>
                 <a:latin typeface="Consolas"/>
-              </a:defRPr>
-            </a:pPr>
-            <a:r>
-              <a:t>DECENTRALIZED P2P</a:t>
+              </a:rPr>
+              <a:t>Decentralized P2P Architecture</a:t>
             </a:r>
           </a:p>
         </p:txBody>
@@ -8454,7 +9377,7 @@
         </p:nvSpPr>
         <p:spPr>
           <a:xfrm>
-            <a:off x="822960" y="1353312"/>
+            <a:off x="822960" y="1325880"/>
             <a:ext cx="10515600" cy="18288"/>
           </a:xfrm>
           <a:prstGeom prst="rect">
@@ -8497,8 +9420,8 @@
         </p:nvSpPr>
         <p:spPr>
           <a:xfrm>
-            <a:off x="822960" y="6309360"/>
-            <a:ext cx="7315200" cy="320040"/>
+            <a:off x="822960" y="6355080"/>
+            <a:ext cx="10515600" cy="320040"/>
           </a:xfrm>
           <a:prstGeom prst="rect">
             <a:avLst/>
@@ -8511,16 +9434,15 @@
           </a:bodyPr>
           <a:lstStyle/>
           <a:p>
-            <a:pPr>
-              <a:defRPr sz="1100">
+            <a:pPr algn="r" rtl="1"/>
+            <a:r>
+              <a:rPr sz="1050" b="0" lang="ar-SA" rtl="1">
                 <a:solidFill>
                   <a:srgbClr val="475569"/>
                 </a:solidFill>
                 <a:latin typeface="Arial"/>
-              </a:defRPr>
-            </a:pPr>
-            <a:r>
-              <a:t>مشروع تخرج LOCAL CONTACT — مناقشة أكاديمية محكمة</a:t>
+              </a:rPr>
+              <a:t>مناقشة مشروع التخرج الأكاديمية — نظام اتصال محلي مستقل دون خادم وسيط</a:t>
             </a:r>
           </a:p>
         </p:txBody>
@@ -8533,8 +9455,8 @@
         </p:nvSpPr>
         <p:spPr>
           <a:xfrm>
-            <a:off x="822960" y="1645920"/>
-            <a:ext cx="5120640" cy="2057400"/>
+            <a:off x="6217920" y="1554480"/>
+            <a:ext cx="5120640" cy="1828800"/>
           </a:xfrm>
           <a:prstGeom prst="roundRect">
             <a:avLst/>
@@ -8566,48 +9488,47 @@
           <a:bodyPr rtlCol="0" anchor="ctr" wrap="square"/>
           <a:lstStyle/>
           <a:p>
-            <a:pPr algn="ctr">
-              <a:defRPr sz="1700" b="1">
+            <a:pPr algn="r" rtl="1"/>
+            <a:r>
+              <a:rPr sz="1900" b="1" lang="ar-SA" rtl="1">
                 <a:solidFill>
                   <a:srgbClr val="0F2B5C"/>
                 </a:solidFill>
                 <a:latin typeface="Arial"/>
-              </a:defRPr>
-            </a:pPr>
-            <a:r>
-              <a:t>📱 طبقة العرض والواجهات (Presentation Layer)</a:t>
-            </a:r>
-          </a:p>
-          <a:p>
-            <a:pPr>
+              </a:rPr>
+              <a:t>طبقة العرض والواجهات التفاعلية</a:t>
+            </a:r>
+          </a:p>
+          <a:p>
+            <a:pPr algn="r" rtl="0">
               <a:spcBef>
                 <a:spcPts val="300"/>
               </a:spcBef>
-              <a:defRPr sz="1300" b="1">
+            </a:pPr>
+            <a:r>
+              <a:rPr sz="1300" b="1" lang="en-US" rtl="0">
                 <a:solidFill>
                   <a:srgbClr val="1E40AF"/>
                 </a:solidFill>
                 <a:latin typeface="Consolas"/>
-              </a:defRPr>
+              </a:rPr>
+              <a:t>[Jetpack Compose UI (app/.../ui/)]</a:t>
+            </a:r>
+          </a:p>
+          <a:p>
+            <a:pPr algn="r" rtl="1">
+              <a:spcBef>
+                <a:spcPts val="600"/>
+              </a:spcBef>
             </a:pPr>
             <a:r>
-              <a:t>app/.../ui/</a:t>
-            </a:r>
-          </a:p>
-          <a:p>
-            <a:pPr>
-              <a:spcBef>
-                <a:spcPts val="400"/>
-              </a:spcBef>
-              <a:defRPr sz="1500" b="1">
+              <a:rPr sz="1500" b="0" lang="ar-SA" rtl="1">
                 <a:solidFill>
                   <a:srgbClr val="0F172A"/>
                 </a:solidFill>
                 <a:latin typeface="Arial"/>
-              </a:defRPr>
-            </a:pPr>
-            <a:r>
-              <a:t>واجهات Jetpack Compose التعلانية: شاشات المحادثة والأقران والغرف، وحوارات المكالمات، والمكونات التفاعلية.</a:t>
+              </a:rPr>
+              <a:t>واجهات مستخدم تعلانية حديثة مقسمة إلى شاشات وحوارات ومكونات قابلة لإعادة الاستخدام.</a:t>
             </a:r>
           </a:p>
         </p:txBody>
@@ -8620,8 +9541,8 @@
         </p:nvSpPr>
         <p:spPr>
           <a:xfrm>
-            <a:off x="6126480" y="1645920"/>
-            <a:ext cx="5120640" cy="2057400"/>
+            <a:off x="822960" y="1554480"/>
+            <a:ext cx="5120640" cy="1828800"/>
           </a:xfrm>
           <a:prstGeom prst="roundRect">
             <a:avLst/>
@@ -8653,48 +9574,47 @@
           <a:bodyPr rtlCol="0" anchor="ctr" wrap="square"/>
           <a:lstStyle/>
           <a:p>
-            <a:pPr algn="ctr">
-              <a:defRPr sz="1700" b="1">
+            <a:pPr algn="r" rtl="1"/>
+            <a:r>
+              <a:rPr sz="1900" b="1" lang="ar-SA" rtl="1">
                 <a:solidFill>
                   <a:srgbClr val="0F2B5C"/>
                 </a:solidFill>
                 <a:latin typeface="Arial"/>
-              </a:defRPr>
-            </a:pPr>
-            <a:r>
-              <a:t>🧠 طبقة التنسيق والحالة (ViewModel / Coordination)</a:t>
-            </a:r>
-          </a:p>
-          <a:p>
-            <a:pPr>
+              </a:rPr>
+              <a:t>طبقة التنسيق وإدارة الحالة</a:t>
+            </a:r>
+          </a:p>
+          <a:p>
+            <a:pPr algn="r" rtl="0">
               <a:spcBef>
                 <a:spcPts val="300"/>
               </a:spcBef>
-              <a:defRPr sz="1300" b="1">
+            </a:pPr>
+            <a:r>
+              <a:rPr sz="1300" b="1" lang="en-US" rtl="0">
                 <a:solidFill>
                   <a:srgbClr val="1E40AF"/>
                 </a:solidFill>
                 <a:latin typeface="Consolas"/>
-              </a:defRPr>
+              </a:rPr>
+              <a:t>[StateFlow Coordinator (MainViewModel.kt)]</a:t>
+            </a:r>
+          </a:p>
+          <a:p>
+            <a:pPr algn="r" rtl="1">
+              <a:spcBef>
+                <a:spcPts val="600"/>
+              </a:spcBef>
             </a:pPr>
             <a:r>
-              <a:t>MainViewModel.kt</a:t>
-            </a:r>
-          </a:p>
-          <a:p>
-            <a:pPr>
-              <a:spcBef>
-                <a:spcPts val="400"/>
-              </a:spcBef>
-              <a:defRPr sz="1500" b="1">
+              <a:rPr sz="1500" b="0" lang="ar-SA" rtl="1">
                 <a:solidFill>
                   <a:srgbClr val="0F172A"/>
                 </a:solidFill>
                 <a:latin typeface="Arial"/>
-              </a:defRPr>
-            </a:pPr>
-            <a:r>
-              <a:t>إدارة تدفقات StateFlow للواجهات، معالجة الأحداث، وتوجيه البيانات بين المحركات الشبكية وقاعدة البيانات.</a:t>
+              </a:rPr>
+              <a:t>إدارة تدفقات البيانات للواجهة وتوجيه الرسائل والمكالمات بين المحركات وقاعدة البيانات.</a:t>
             </a:r>
           </a:p>
         </p:txBody>
@@ -8707,8 +9627,8 @@
         </p:nvSpPr>
         <p:spPr>
           <a:xfrm>
-            <a:off x="822960" y="3886200"/>
-            <a:ext cx="5120640" cy="2057400"/>
+            <a:off x="6217920" y="3566160"/>
+            <a:ext cx="5120640" cy="1828800"/>
           </a:xfrm>
           <a:prstGeom prst="roundRect">
             <a:avLst/>
@@ -8740,48 +9660,47 @@
           <a:bodyPr rtlCol="0" anchor="ctr" wrap="square"/>
           <a:lstStyle/>
           <a:p>
-            <a:pPr algn="ctr">
-              <a:defRPr sz="1700" b="1">
+            <a:pPr algn="r" rtl="1"/>
+            <a:r>
+              <a:rPr sz="1900" b="1" lang="ar-SA" rtl="1">
                 <a:solidFill>
                   <a:srgbClr val="0F2B5C"/>
                 </a:solidFill>
                 <a:latin typeface="Arial"/>
-              </a:defRPr>
-            </a:pPr>
-            <a:r>
-              <a:t>🌐 طبقة المحركات الشبكية (Network Engines Layer)</a:t>
-            </a:r>
-          </a:p>
-          <a:p>
-            <a:pPr>
+              </a:rPr>
+              <a:t>طبقة المحركات الشبكية المستقلة</a:t>
+            </a:r>
+          </a:p>
+          <a:p>
+            <a:pPr algn="r" rtl="0">
               <a:spcBef>
                 <a:spcPts val="300"/>
               </a:spcBef>
-              <a:defRPr sz="1300" b="1">
-                <a:solidFill>
-                  <a:srgbClr val="1E40AF"/>
+            </a:pPr>
+            <a:r>
+              <a:rPr sz="1300" b="1" lang="en-US" rtl="0">
+                <a:solidFill>
+                  <a:srgbClr val="059669"/>
                 </a:solidFill>
                 <a:latin typeface="Consolas"/>
-              </a:defRPr>
+              </a:rPr>
+              <a:t>[Isolated Network Engines (UDP &amp; TCP)]</a:t>
+            </a:r>
+          </a:p>
+          <a:p>
+            <a:pPr algn="r" rtl="1">
+              <a:spcBef>
+                <a:spcPts val="600"/>
+              </a:spcBef>
             </a:pPr>
             <a:r>
-              <a:t>app/.../network/</a:t>
-            </a:r>
-          </a:p>
-          <a:p>
-            <a:pPr>
-              <a:spcBef>
-                <a:spcPts val="400"/>
-              </a:spcBef>
-              <a:defRPr sz="1500" b="1">
+              <a:rPr sz="1500" b="0" lang="ar-SA" rtl="1">
                 <a:solidFill>
                   <a:srgbClr val="0F172A"/>
                 </a:solidFill>
                 <a:latin typeface="Arial"/>
-              </a:defRPr>
-            </a:pPr>
-            <a:r>
-              <a:t>عزل قنوات الاتصال المستقلة: الاكتشاف والرسائل (8888)، الصوت (8889)، الفيديو (8890)، ونقل الملفات (8891).</a:t>
+              </a:rPr>
+              <a:t>عزل قنوات الاتصال: الاكتشاف والرسائل (8888)، الصوت (8889)، ونقل الملفات (8891).</a:t>
             </a:r>
           </a:p>
         </p:txBody>
@@ -8794,8 +9713,8 @@
         </p:nvSpPr>
         <p:spPr>
           <a:xfrm>
-            <a:off x="6126480" y="3886200"/>
-            <a:ext cx="5120640" cy="2057400"/>
+            <a:off x="822960" y="3566160"/>
+            <a:ext cx="5120640" cy="1828800"/>
           </a:xfrm>
           <a:prstGeom prst="roundRect">
             <a:avLst/>
@@ -8827,48 +9746,110 @@
           <a:bodyPr rtlCol="0" anchor="ctr" wrap="square"/>
           <a:lstStyle/>
           <a:p>
-            <a:pPr algn="ctr">
-              <a:defRPr sz="1700" b="1">
+            <a:pPr algn="r" rtl="1"/>
+            <a:r>
+              <a:rPr sz="1900" b="1" lang="ar-SA" rtl="1">
                 <a:solidFill>
                   <a:srgbClr val="0F2B5C"/>
                 </a:solidFill>
                 <a:latin typeface="Arial"/>
-              </a:defRPr>
-            </a:pPr>
-            <a:r>
-              <a:t>💾 طبقة البيانات والتخزين (Persistence Layer)</a:t>
-            </a:r>
-          </a:p>
-          <a:p>
-            <a:pPr>
+              </a:rPr>
+              <a:t>طبقة البيانات والتخزين المحلي</a:t>
+            </a:r>
+          </a:p>
+          <a:p>
+            <a:pPr algn="r" rtl="0">
               <a:spcBef>
                 <a:spcPts val="300"/>
               </a:spcBef>
-              <a:defRPr sz="1300" b="1">
+            </a:pPr>
+            <a:r>
+              <a:rPr sz="1300" b="1" lang="en-US" rtl="0">
+                <a:solidFill>
+                  <a:srgbClr val="059669"/>
+                </a:solidFill>
+                <a:latin typeface="Consolas"/>
+              </a:rPr>
+              <a:t>[Room Database 6 &amp; DataStore]</a:t>
+            </a:r>
+          </a:p>
+          <a:p>
+            <a:pPr algn="r" rtl="1">
+              <a:spcBef>
+                <a:spcPts val="600"/>
+              </a:spcBef>
+            </a:pPr>
+            <a:r>
+              <a:rPr sz="1500" b="0" lang="ar-SA" rtl="1">
+                <a:solidFill>
+                  <a:srgbClr val="0F172A"/>
+                </a:solidFill>
+                <a:latin typeface="Arial"/>
+              </a:rPr>
+              <a:t>إدارة جداول الرسائل والغرف محلياً في قاعدة بيانات خفيفة وتخزين التفضيلات.</a:t>
+            </a:r>
+          </a:p>
+        </p:txBody>
+      </p:sp>
+      <p:sp>
+        <p:nvSpPr>
+          <p:cNvPr id="13" name="Rounded Rectangle 12"/>
+          <p:cNvSpPr/>
+          <p:nvPr/>
+        </p:nvSpPr>
+        <p:spPr>
+          <a:xfrm>
+            <a:off x="822960" y="5623560"/>
+            <a:ext cx="10515600" cy="594360"/>
+          </a:xfrm>
+          <a:prstGeom prst="roundRect">
+            <a:avLst/>
+          </a:prstGeom>
+          <a:solidFill>
+            <a:srgbClr val="F8FAFC"/>
+          </a:solidFill>
+          <a:ln w="12700">
+            <a:solidFill>
+              <a:srgbClr val="CBD5E1"/>
+            </a:solidFill>
+          </a:ln>
+        </p:spPr>
+        <p:style>
+          <a:lnRef idx="1">
+            <a:schemeClr val="accent1"/>
+          </a:lnRef>
+          <a:fillRef idx="3">
+            <a:schemeClr val="accent1"/>
+          </a:fillRef>
+          <a:effectRef idx="2">
+            <a:schemeClr val="accent1"/>
+          </a:effectRef>
+          <a:fontRef idx="minor">
+            <a:schemeClr val="lt1"/>
+          </a:fontRef>
+        </p:style>
+        <p:txBody>
+          <a:bodyPr rtlCol="0" anchor="ctr"/>
+          <a:lstStyle/>
+          <a:p>
+            <a:pPr algn="r" rtl="1"/>
+            <a:r>
+              <a:rPr sz="1200" b="1" lang="ar-SA" rtl="1">
+                <a:solidFill>
+                  <a:srgbClr val="0F2B5C"/>
+                </a:solidFill>
+                <a:latin typeface="Arial"/>
+              </a:rPr>
+              <a:t>المكون البرمجي: الهيكل المعماري والطبقات الأربع للنظام  |  </a:t>
+            </a:r>
+            <a:r>
+              <a:rPr sz="1200" b="1" lang="en-US" rtl="0">
                 <a:solidFill>
                   <a:srgbClr val="1E40AF"/>
                 </a:solidFill>
                 <a:latin typeface="Consolas"/>
-              </a:defRPr>
-            </a:pPr>
-            <a:r>
-              <a:t>app/.../data/</a:t>
-            </a:r>
-          </a:p>
-          <a:p>
-            <a:pPr>
-              <a:spcBef>
-                <a:spcPts val="400"/>
-              </a:spcBef>
-              <a:defRPr sz="1500" b="1">
-                <a:solidFill>
-                  <a:srgbClr val="0F172A"/>
-                </a:solidFill>
-                <a:latin typeface="Arial"/>
-              </a:defRPr>
-            </a:pPr>
-            <a:r>
-              <a:t>إدارة البيانات محلياً عبر Room Database (AppDatabase.kt) لرسائل الغرف والمستخدم، وحفظ التفضيلات عبر DataStore.</a:t>
+              </a:rPr>
+              <a:t>app/src/main/java/com/example/</a:t>
             </a:r>
           </a:p>
         </p:txBody>
@@ -8900,13 +9881,13 @@
         <p:spPr>
           <a:xfrm>
             <a:off x="0" y="0"/>
-            <a:ext cx="12191695" cy="91440"/>
+            <a:ext cx="12191695" cy="109728"/>
           </a:xfrm>
           <a:prstGeom prst="rect">
             <a:avLst/>
           </a:prstGeom>
           <a:solidFill>
-            <a:srgbClr val="1E40AF"/>
+            <a:srgbClr val="0F2B5C"/>
           </a:solidFill>
           <a:ln>
             <a:noFill/>
@@ -8942,44 +9923,8 @@
         </p:nvSpPr>
         <p:spPr>
           <a:xfrm>
-            <a:off x="822960" y="228600"/>
-            <a:ext cx="7772400" cy="320040"/>
-          </a:xfrm>
-          <a:prstGeom prst="rect">
-            <a:avLst/>
-          </a:prstGeom>
-          <a:noFill/>
-        </p:spPr>
-        <p:txBody>
-          <a:bodyPr wrap="square">
-            <a:spAutoFit/>
-          </a:bodyPr>
-          <a:lstStyle/>
-          <a:p>
-            <a:pPr>
-              <a:defRPr sz="1300" b="1">
-                <a:solidFill>
-                  <a:srgbClr val="1E40AF"/>
-                </a:solidFill>
-                <a:latin typeface="Arial"/>
-              </a:defRPr>
-            </a:pPr>
-            <a:r>
-              <a:t>LOCAL CONTACT P2P  |  الروائح المعمارية وإعادة الهيكلة</a:t>
-            </a:r>
-          </a:p>
-        </p:txBody>
-      </p:sp>
-      <p:sp>
-        <p:nvSpPr>
-          <p:cNvPr id="4" name="TextBox 3"/>
-          <p:cNvSpPr txBox="1"/>
-          <p:nvPr/>
-        </p:nvSpPr>
-        <p:spPr>
-          <a:xfrm>
-            <a:off x="10241280" y="6309360"/>
-            <a:ext cx="1188720" cy="365760"/>
+            <a:off x="3200400" y="228600"/>
+            <a:ext cx="8138160" cy="320040"/>
           </a:xfrm>
           <a:prstGeom prst="rect">
             <a:avLst/>
@@ -8992,16 +9937,50 @@
           </a:bodyPr>
           <a:lstStyle/>
           <a:p>
-            <a:pPr algn="r">
-              <a:defRPr sz="1400" b="1">
-                <a:solidFill>
-                  <a:srgbClr val="0F2B5C"/>
-                </a:solidFill>
-                <a:latin typeface="Arial"/>
-              </a:defRPr>
-            </a:pPr>
-            <a:r>
-              <a:t>6 / 12</a:t>
+            <a:pPr algn="r" rtl="1"/>
+            <a:r>
+              <a:rPr sz="1300" b="1" lang="ar-SA" rtl="1">
+                <a:solidFill>
+                  <a:srgbClr val="1E40AF"/>
+                </a:solidFill>
+                <a:latin typeface="Arial"/>
+              </a:rPr>
+              <a:t>مشروع الاتصال المحلي المباشر  •  الروائح المعمارية وإعادة الهيكلة</a:t>
+            </a:r>
+          </a:p>
+        </p:txBody>
+      </p:sp>
+      <p:sp>
+        <p:nvSpPr>
+          <p:cNvPr id="4" name="TextBox 3"/>
+          <p:cNvSpPr txBox="1"/>
+          <p:nvPr/>
+        </p:nvSpPr>
+        <p:spPr>
+          <a:xfrm>
+            <a:off x="822960" y="228600"/>
+            <a:ext cx="1828800" cy="320040"/>
+          </a:xfrm>
+          <a:prstGeom prst="rect">
+            <a:avLst/>
+          </a:prstGeom>
+          <a:noFill/>
+        </p:spPr>
+        <p:txBody>
+          <a:bodyPr wrap="none">
+            <a:spAutoFit/>
+          </a:bodyPr>
+          <a:lstStyle/>
+          <a:p>
+            <a:pPr algn="l" rtl="0"/>
+            <a:r>
+              <a:rPr sz="1200" b="1" lang="en-US" rtl="0">
+                <a:solidFill>
+                  <a:srgbClr val="475569"/>
+                </a:solidFill>
+                <a:latin typeface="Consolas"/>
+              </a:rPr>
+              <a:t>Slide 6 / 12</a:t>
             </a:r>
           </a:p>
         </p:txBody>
@@ -9014,8 +9993,8 @@
         </p:nvSpPr>
         <p:spPr>
           <a:xfrm>
-            <a:off x="822960" y="594360"/>
-            <a:ext cx="8961120" cy="685800"/>
+            <a:off x="4023360" y="566928"/>
+            <a:ext cx="7315200" cy="685800"/>
           </a:xfrm>
           <a:prstGeom prst="rect">
             <a:avLst/>
@@ -9023,21 +10002,20 @@
           <a:noFill/>
         </p:spPr>
         <p:txBody>
-          <a:bodyPr wrap="square">
+          <a:bodyPr wrap="none">
             <a:spAutoFit/>
           </a:bodyPr>
           <a:lstStyle/>
           <a:p>
-            <a:pPr>
-              <a:defRPr sz="2800" b="1">
+            <a:pPr algn="r" rtl="1"/>
+            <a:r>
+              <a:rPr sz="3000" b="1" lang="ar-SA" rtl="1">
                 <a:solidFill>
                   <a:srgbClr val="0F2B5C"/>
                 </a:solidFill>
                 <a:latin typeface="Arial"/>
-              </a:defRPr>
-            </a:pPr>
-            <a:r>
-              <a:t>تحليل الكلاسات المتضخمة وتطبيق مبادئ SOLID</a:t>
+              </a:rPr>
+              <a:t>تحليل الكلاسات المتضخمة ومبادئ SOLID</a:t>
             </a:r>
           </a:p>
         </p:txBody>
@@ -9050,8 +10028,8 @@
         </p:nvSpPr>
         <p:spPr>
           <a:xfrm>
-            <a:off x="8961120" y="621792"/>
-            <a:ext cx="2377440" cy="438912"/>
+            <a:off x="822960" y="621792"/>
+            <a:ext cx="3017520" cy="502920"/>
           </a:xfrm>
           <a:prstGeom prst="roundRect">
             <a:avLst/>
@@ -9083,16 +10061,15 @@
           <a:bodyPr rtlCol="0" anchor="ctr"/>
           <a:lstStyle/>
           <a:p>
-            <a:pPr algn="ctr">
-              <a:defRPr sz="1200" b="1">
+            <a:pPr algn="ctr" rtl="0"/>
+            <a:r>
+              <a:rPr sz="1400" b="1" lang="en-US" rtl="0">
                 <a:solidFill>
                   <a:srgbClr val="D97706"/>
                 </a:solidFill>
                 <a:latin typeface="Consolas"/>
-              </a:defRPr>
-            </a:pPr>
-            <a:r>
-              <a:t>ARCHITECTURAL SMELLS</a:t>
+              </a:rPr>
+              <a:t>Architectural Smells &amp; Refactoring</a:t>
             </a:r>
           </a:p>
         </p:txBody>
@@ -9105,7 +10082,7 @@
         </p:nvSpPr>
         <p:spPr>
           <a:xfrm>
-            <a:off x="822960" y="1353312"/>
+            <a:off x="822960" y="1325880"/>
             <a:ext cx="10515600" cy="18288"/>
           </a:xfrm>
           <a:prstGeom prst="rect">
@@ -9148,8 +10125,8 @@
         </p:nvSpPr>
         <p:spPr>
           <a:xfrm>
-            <a:off x="822960" y="6309360"/>
-            <a:ext cx="7315200" cy="320040"/>
+            <a:off x="822960" y="6355080"/>
+            <a:ext cx="10515600" cy="320040"/>
           </a:xfrm>
           <a:prstGeom prst="rect">
             <a:avLst/>
@@ -9162,16 +10139,15 @@
           </a:bodyPr>
           <a:lstStyle/>
           <a:p>
-            <a:pPr>
-              <a:defRPr sz="1100">
+            <a:pPr algn="r" rtl="1"/>
+            <a:r>
+              <a:rPr sz="1050" b="0" lang="ar-SA" rtl="1">
                 <a:solidFill>
                   <a:srgbClr val="475569"/>
                 </a:solidFill>
                 <a:latin typeface="Arial"/>
-              </a:defRPr>
-            </a:pPr>
-            <a:r>
-              <a:t>مشروع تخرج LOCAL CONTACT — مناقشة أكاديمية محكمة</a:t>
+              </a:rPr>
+              <a:t>مناقشة مشروع التخرج الأكاديمية — نظام اتصال محلي مستقل دون خادم وسيط</a:t>
             </a:r>
           </a:p>
         </p:txBody>
@@ -9184,8 +10160,8 @@
         </p:nvSpPr>
         <p:spPr>
           <a:xfrm>
-            <a:off x="822960" y="1645920"/>
-            <a:ext cx="5120640" cy="4389120"/>
+            <a:off x="6217920" y="1554480"/>
+            <a:ext cx="5120640" cy="1828800"/>
           </a:xfrm>
           <a:prstGeom prst="roundRect">
             <a:avLst/>
@@ -9217,80 +10193,47 @@
           <a:bodyPr rtlCol="0" anchor="ctr" wrap="square"/>
           <a:lstStyle/>
           <a:p>
-            <a:pPr algn="ctr">
-              <a:defRPr sz="2200" b="1">
+            <a:pPr algn="r" rtl="1"/>
+            <a:r>
+              <a:rPr sz="1900" b="1" lang="ar-SA" rtl="1">
+                <a:solidFill>
+                  <a:srgbClr val="0F2B5C"/>
+                </a:solidFill>
+                <a:latin typeface="Arial"/>
+              </a:rPr>
+              <a:t>الكلاس المتضخم الأول</a:t>
+            </a:r>
+          </a:p>
+          <a:p>
+            <a:pPr algn="r" rtl="0">
+              <a:spcBef>
+                <a:spcPts val="300"/>
+              </a:spcBef>
+            </a:pPr>
+            <a:r>
+              <a:rPr sz="1300" b="1" lang="en-US" rtl="0">
                 <a:solidFill>
                   <a:srgbClr val="D97706"/>
                 </a:solidFill>
-                <a:latin typeface="Arial"/>
-              </a:defRPr>
+                <a:latin typeface="Consolas"/>
+              </a:rPr>
+              <a:t>[LocalP2PEngine.kt (2,496 lines)]</a:t>
+            </a:r>
+          </a:p>
+          <a:p>
+            <a:pPr algn="r" rtl="1">
+              <a:spcBef>
+                <a:spcPts val="600"/>
+              </a:spcBef>
             </a:pPr>
             <a:r>
-              <a:t>⚠️ الكلاسات المتضخمة المرصودة:</a:t>
-            </a:r>
-          </a:p>
-          <a:p>
-            <a:pPr>
-              <a:spcBef>
-                <a:spcPts val="1000"/>
-              </a:spcBef>
-              <a:defRPr sz="1600" b="1">
+              <a:rPr sz="1500" b="0" lang="ar-SA" rtl="1">
                 <a:solidFill>
                   <a:srgbClr val="0F172A"/>
                 </a:solidFill>
                 <a:latin typeface="Arial"/>
-              </a:defRPr>
-            </a:pPr>
-            <a:r>
-              <a:t>• LocalP2PEngine.kt (2,496 سطر): يجمع مهام بث واكتشاف الأقران، إدارة مقابس UDP، إشارات المكالمات، وإشعارات التسليم في كلاس واحد.</a:t>
-            </a:r>
-          </a:p>
-          <a:p>
-            <a:pPr>
-              <a:spcBef>
-                <a:spcPts val="1000"/>
-              </a:spcBef>
-              <a:defRPr sz="1600" b="1">
-                <a:solidFill>
-                  <a:srgbClr val="0F172A"/>
-                </a:solidFill>
-                <a:latin typeface="Arial"/>
-              </a:defRPr>
-            </a:pPr>
-            <a:r>
-              <a:t>• MainViewModel.kt (1,839 سطر): يجمع منطق تنقل الشاشات، استعلامات قاعدة بيانات Room، والتفاعل المباشر مع محركات الشبكة.</a:t>
-            </a:r>
-          </a:p>
-          <a:p>
-            <a:pPr>
-              <a:spcBef>
-                <a:spcPts val="1000"/>
-              </a:spcBef>
-              <a:defRPr sz="1600" b="1">
-                <a:solidFill>
-                  <a:srgbClr val="0F172A"/>
-                </a:solidFill>
-                <a:latin typeface="Arial"/>
-              </a:defRPr>
-            </a:pPr>
-            <a:r>
-              <a:t>• انتهاك مبدأ Single Responsibility (SRP): تجميع عدة مسؤوليات غير متجانسة يزيد من صعوبة الصيانة والاختبار المعزول.</a:t>
-            </a:r>
-          </a:p>
-          <a:p>
-            <a:pPr>
-              <a:spcBef>
-                <a:spcPts val="1000"/>
-              </a:spcBef>
-              <a:defRPr sz="1600" b="1">
-                <a:solidFill>
-                  <a:srgbClr val="0F172A"/>
-                </a:solidFill>
-                <a:latin typeface="Arial"/>
-              </a:defRPr>
-            </a:pPr>
-            <a:r>
-              <a:t>• الديون التقنية (Technical Debt): توثيق هذه الكلاسات رسمياً في الـ SRS كديون تقنية مطلوب إعادة هيكلتها.</a:t>
+              </a:rPr>
+              <a:t>يجمع بث واكتشاف الأقران، إدارة مقابس الشبكة، وإشارات المكالمات في كلاس واحد.</a:t>
             </a:r>
           </a:p>
         </p:txBody>
@@ -9303,8 +10246,94 @@
         </p:nvSpPr>
         <p:spPr>
           <a:xfrm>
-            <a:off x="6217920" y="1645920"/>
-            <a:ext cx="5120640" cy="4389120"/>
+            <a:off x="822960" y="1554480"/>
+            <a:ext cx="5120640" cy="1828800"/>
+          </a:xfrm>
+          <a:prstGeom prst="roundRect">
+            <a:avLst/>
+          </a:prstGeom>
+          <a:solidFill>
+            <a:srgbClr val="F8FAFC"/>
+          </a:solidFill>
+          <a:ln w="19050">
+            <a:solidFill>
+              <a:srgbClr val="D97706"/>
+            </a:solidFill>
+          </a:ln>
+        </p:spPr>
+        <p:style>
+          <a:lnRef idx="1">
+            <a:schemeClr val="accent1"/>
+          </a:lnRef>
+          <a:fillRef idx="3">
+            <a:schemeClr val="accent1"/>
+          </a:fillRef>
+          <a:effectRef idx="2">
+            <a:schemeClr val="accent1"/>
+          </a:effectRef>
+          <a:fontRef idx="minor">
+            <a:schemeClr val="lt1"/>
+          </a:fontRef>
+        </p:style>
+        <p:txBody>
+          <a:bodyPr rtlCol="0" anchor="ctr" wrap="square"/>
+          <a:lstStyle/>
+          <a:p>
+            <a:pPr algn="r" rtl="1"/>
+            <a:r>
+              <a:rPr sz="1900" b="1" lang="ar-SA" rtl="1">
+                <a:solidFill>
+                  <a:srgbClr val="0F2B5C"/>
+                </a:solidFill>
+                <a:latin typeface="Arial"/>
+              </a:rPr>
+              <a:t>الكلاس المتضخم الثاني</a:t>
+            </a:r>
+          </a:p>
+          <a:p>
+            <a:pPr algn="r" rtl="0">
+              <a:spcBef>
+                <a:spcPts val="300"/>
+              </a:spcBef>
+            </a:pPr>
+            <a:r>
+              <a:rPr sz="1300" b="1" lang="en-US" rtl="0">
+                <a:solidFill>
+                  <a:srgbClr val="D97706"/>
+                </a:solidFill>
+                <a:latin typeface="Consolas"/>
+              </a:rPr>
+              <a:t>[MainViewModel.kt (1,839 lines)]</a:t>
+            </a:r>
+          </a:p>
+          <a:p>
+            <a:pPr algn="r" rtl="1">
+              <a:spcBef>
+                <a:spcPts val="600"/>
+              </a:spcBef>
+            </a:pPr>
+            <a:r>
+              <a:rPr sz="1500" b="0" lang="ar-SA" rtl="1">
+                <a:solidFill>
+                  <a:srgbClr val="0F172A"/>
+                </a:solidFill>
+                <a:latin typeface="Arial"/>
+              </a:rPr>
+              <a:t>يجمع منطق تنقل الشاشات، استعلامات قاعدة البيانات، والتفاعل المباشر مع المقابس.</a:t>
+            </a:r>
+          </a:p>
+        </p:txBody>
+      </p:sp>
+      <p:sp>
+        <p:nvSpPr>
+          <p:cNvPr id="11" name="Rounded Rectangle 10"/>
+          <p:cNvSpPr/>
+          <p:nvPr/>
+        </p:nvSpPr>
+        <p:spPr>
+          <a:xfrm>
+            <a:off x="6217920" y="3566160"/>
+            <a:ext cx="5120640" cy="1828800"/>
           </a:xfrm>
           <a:prstGeom prst="roundRect">
             <a:avLst/>
@@ -9336,80 +10365,196 @@
           <a:bodyPr rtlCol="0" anchor="ctr" wrap="square"/>
           <a:lstStyle/>
           <a:p>
-            <a:pPr algn="ctr">
-              <a:defRPr sz="2200" b="1">
+            <a:pPr algn="r" rtl="1"/>
+            <a:r>
+              <a:rPr sz="1900" b="1" lang="ar-SA" rtl="1">
+                <a:solidFill>
+                  <a:srgbClr val="0F2B5C"/>
+                </a:solidFill>
+                <a:latin typeface="Arial"/>
+              </a:rPr>
+              <a:t>تطبيق مبدأ انعكاس الاعتمادية</a:t>
+            </a:r>
+          </a:p>
+          <a:p>
+            <a:pPr algn="r" rtl="0">
+              <a:spcBef>
+                <a:spcPts val="300"/>
+              </a:spcBef>
+            </a:pPr>
+            <a:r>
+              <a:rPr sz="1300" b="1" lang="en-US" rtl="0">
                 <a:solidFill>
                   <a:srgbClr val="059669"/>
                 </a:solidFill>
-                <a:latin typeface="Arial"/>
-              </a:defRPr>
+                <a:latin typeface="Consolas"/>
+              </a:rPr>
+              <a:t>[DIP Applied via KeyProvider.kt]</a:t>
+            </a:r>
+          </a:p>
+          <a:p>
+            <a:pPr algn="r" rtl="1">
+              <a:spcBef>
+                <a:spcPts val="600"/>
+              </a:spcBef>
             </a:pPr>
             <a:r>
-              <a:t>🧩 الحلول الهندسية المطبقة والمقترحة:</a:t>
-            </a:r>
-          </a:p>
-          <a:p>
-            <a:pPr>
+              <a:rPr sz="1500" b="0" lang="ar-SA" rtl="1">
+                <a:solidFill>
+                  <a:srgbClr val="0F172A"/>
+                </a:solidFill>
+                <a:latin typeface="Arial"/>
+              </a:rPr>
+              <a:t>كسر الاقتران الصلب في التشفير عبر واجهة مجردة تفصل إدارة المفاتيح عن العمليات.</a:t>
+            </a:r>
+          </a:p>
+        </p:txBody>
+      </p:sp>
+      <p:sp>
+        <p:nvSpPr>
+          <p:cNvPr id="12" name="Rounded Rectangle 11"/>
+          <p:cNvSpPr/>
+          <p:nvPr/>
+        </p:nvSpPr>
+        <p:spPr>
+          <a:xfrm>
+            <a:off x="822960" y="3566160"/>
+            <a:ext cx="5120640" cy="1828800"/>
+          </a:xfrm>
+          <a:prstGeom prst="roundRect">
+            <a:avLst/>
+          </a:prstGeom>
+          <a:solidFill>
+            <a:srgbClr val="F8FAFC"/>
+          </a:solidFill>
+          <a:ln w="19050">
+            <a:solidFill>
+              <a:srgbClr val="CBD5E1"/>
+            </a:solidFill>
+          </a:ln>
+        </p:spPr>
+        <p:style>
+          <a:lnRef idx="1">
+            <a:schemeClr val="accent1"/>
+          </a:lnRef>
+          <a:fillRef idx="3">
+            <a:schemeClr val="accent1"/>
+          </a:fillRef>
+          <a:effectRef idx="2">
+            <a:schemeClr val="accent1"/>
+          </a:effectRef>
+          <a:fontRef idx="minor">
+            <a:schemeClr val="lt1"/>
+          </a:fontRef>
+        </p:style>
+        <p:txBody>
+          <a:bodyPr rtlCol="0" anchor="ctr" wrap="square"/>
+          <a:lstStyle/>
+          <a:p>
+            <a:pPr algn="r" rtl="1"/>
+            <a:r>
+              <a:rPr sz="1900" b="1" lang="ar-SA" rtl="1">
+                <a:solidFill>
+                  <a:srgbClr val="0F2B5C"/>
+                </a:solidFill>
+                <a:latin typeface="Arial"/>
+              </a:rPr>
+              <a:t>خطة إعادة الهيكلة المستمرة</a:t>
+            </a:r>
+          </a:p>
+          <a:p>
+            <a:pPr algn="r" rtl="0">
               <a:spcBef>
-                <a:spcPts val="1000"/>
+                <a:spcPts val="300"/>
               </a:spcBef>
-              <a:defRPr sz="1600" b="1">
+            </a:pPr>
+            <a:r>
+              <a:rPr sz="1300" b="1" lang="en-US" rtl="0">
+                <a:solidFill>
+                  <a:srgbClr val="1E40AF"/>
+                </a:solidFill>
+                <a:latin typeface="Consolas"/>
+              </a:rPr>
+              <a:t>[Refactoring Roadmap Established]</a:t>
+            </a:r>
+          </a:p>
+          <a:p>
+            <a:pPr algn="r" rtl="1">
+              <a:spcBef>
+                <a:spcPts val="600"/>
+              </a:spcBef>
+            </a:pPr>
+            <a:r>
+              <a:rPr sz="1500" b="0" lang="ar-SA" rtl="1">
                 <a:solidFill>
                   <a:srgbClr val="0F172A"/>
                 </a:solidFill>
                 <a:latin typeface="Arial"/>
-              </a:defRPr>
-            </a:pPr>
-            <a:r>
-              <a:t>• تطبيق مبدأ انعكاس الاعتمادية (DIP): عزل التشفير عبر واجهة KeyProvider.kt بحيث يعتمد المحرك على واجهة مجردة بدلاً من كلاس ملموس.</a:t>
-            </a:r>
-          </a:p>
-          <a:p>
-            <a:pPr>
-              <a:spcBef>
-                <a:spcPts val="1000"/>
-              </a:spcBef>
-              <a:defRPr sz="1600" b="1">
-                <a:solidFill>
-                  <a:srgbClr val="0F172A"/>
-                </a:solidFill>
-                <a:latin typeface="Arial"/>
-              </a:defRPr>
-            </a:pPr>
-            <a:r>
-              <a:t>• خطة تفكيك LocalP2PEngine: تقسيمه مستقبلاً إلى 3 محركات فرعية: DiscoveryCoordinator, CallSignalingHandler, PacketDispatcher.</a:t>
-            </a:r>
-          </a:p>
-          <a:p>
-            <a:pPr>
-              <a:spcBef>
-                <a:spcPts val="1000"/>
-              </a:spcBef>
-              <a:defRPr sz="1600" b="1">
-                <a:solidFill>
-                  <a:srgbClr val="0F172A"/>
-                </a:solidFill>
-                <a:latin typeface="Arial"/>
-              </a:defRPr>
-            </a:pPr>
-            <a:r>
-              <a:t>• تفكيك ViewModel: إنشاء ViewModels متخصصة لكل شاشة (ChatViewModel, CallsViewModel) لتخفيف الحمل المعماري.</a:t>
-            </a:r>
-          </a:p>
-          <a:p>
-            <a:pPr>
-              <a:spcBef>
-                <a:spcPts val="1000"/>
-              </a:spcBef>
-              <a:defRPr sz="1600" b="1">
-                <a:solidFill>
-                  <a:srgbClr val="0F172A"/>
-                </a:solidFill>
-                <a:latin typeface="Arial"/>
-              </a:defRPr>
-            </a:pPr>
-            <a:r>
-              <a:t>• النضج الهندسي: الاعتراف بوجود الروائح المعمارية هو الخطوة الأولى لتنفيذ إعادة الهيكلة المستمرة (Refactoring).</a:t>
+              </a:rPr>
+              <a:t>تفكيك الكلاسات الضخمة إلى منسق اكتشاف، معالج إشارات مكالمات، وموزع حزم مستقل.</a:t>
+            </a:r>
+          </a:p>
+        </p:txBody>
+      </p:sp>
+      <p:sp>
+        <p:nvSpPr>
+          <p:cNvPr id="13" name="Rounded Rectangle 12"/>
+          <p:cNvSpPr/>
+          <p:nvPr/>
+        </p:nvSpPr>
+        <p:spPr>
+          <a:xfrm>
+            <a:off x="822960" y="5623560"/>
+            <a:ext cx="10515600" cy="594360"/>
+          </a:xfrm>
+          <a:prstGeom prst="roundRect">
+            <a:avLst/>
+          </a:prstGeom>
+          <a:solidFill>
+            <a:srgbClr val="F8FAFC"/>
+          </a:solidFill>
+          <a:ln w="12700">
+            <a:solidFill>
+              <a:srgbClr val="CBD5E1"/>
+            </a:solidFill>
+          </a:ln>
+        </p:spPr>
+        <p:style>
+          <a:lnRef idx="1">
+            <a:schemeClr val="accent1"/>
+          </a:lnRef>
+          <a:fillRef idx="3">
+            <a:schemeClr val="accent1"/>
+          </a:fillRef>
+          <a:effectRef idx="2">
+            <a:schemeClr val="accent1"/>
+          </a:effectRef>
+          <a:fontRef idx="minor">
+            <a:schemeClr val="lt1"/>
+          </a:fontRef>
+        </p:style>
+        <p:txBody>
+          <a:bodyPr rtlCol="0" anchor="ctr"/>
+          <a:lstStyle/>
+          <a:p>
+            <a:pPr algn="r" rtl="1"/>
+            <a:r>
+              <a:rPr sz="1200" b="1" lang="ar-SA" rtl="1">
+                <a:solidFill>
+                  <a:srgbClr val="0F2B5C"/>
+                </a:solidFill>
+                <a:latin typeface="Arial"/>
+              </a:rPr>
+              <a:t>المكون البرمجي: نموذج تطبيق مبدأ DIP لحل الاقتران الصلب  |  </a:t>
+            </a:r>
+            <a:r>
+              <a:rPr sz="1200" b="1" lang="en-US" rtl="0">
+                <a:solidFill>
+                  <a:srgbClr val="1E40AF"/>
+                </a:solidFill>
+                <a:latin typeface="Consolas"/>
+              </a:rPr>
+              <a:t>app/src/main/java/com/example/network/KeyProvider.kt</a:t>
             </a:r>
           </a:p>
         </p:txBody>
@@ -9441,13 +10586,13 @@
         <p:spPr>
           <a:xfrm>
             <a:off x="0" y="0"/>
-            <a:ext cx="12191695" cy="91440"/>
+            <a:ext cx="12191695" cy="109728"/>
           </a:xfrm>
           <a:prstGeom prst="rect">
             <a:avLst/>
           </a:prstGeom>
           <a:solidFill>
-            <a:srgbClr val="1E40AF"/>
+            <a:srgbClr val="0F2B5C"/>
           </a:solidFill>
           <a:ln>
             <a:noFill/>
@@ -9483,44 +10628,8 @@
         </p:nvSpPr>
         <p:spPr>
           <a:xfrm>
-            <a:off x="822960" y="228600"/>
-            <a:ext cx="7772400" cy="320040"/>
-          </a:xfrm>
-          <a:prstGeom prst="rect">
-            <a:avLst/>
-          </a:prstGeom>
-          <a:noFill/>
-        </p:spPr>
-        <p:txBody>
-          <a:bodyPr wrap="square">
-            <a:spAutoFit/>
-          </a:bodyPr>
-          <a:lstStyle/>
-          <a:p>
-            <a:pPr>
-              <a:defRPr sz="1300" b="1">
-                <a:solidFill>
-                  <a:srgbClr val="1E40AF"/>
-                </a:solidFill>
-                <a:latin typeface="Arial"/>
-              </a:defRPr>
-            </a:pPr>
-            <a:r>
-              <a:t>LOCAL CONTACT P2P  |  إدارة التتبع والتحقق</a:t>
-            </a:r>
-          </a:p>
-        </p:txBody>
-      </p:sp>
-      <p:sp>
-        <p:nvSpPr>
-          <p:cNvPr id="4" name="TextBox 3"/>
-          <p:cNvSpPr txBox="1"/>
-          <p:nvPr/>
-        </p:nvSpPr>
-        <p:spPr>
-          <a:xfrm>
-            <a:off x="10241280" y="6309360"/>
-            <a:ext cx="1188720" cy="365760"/>
+            <a:off x="3200400" y="228600"/>
+            <a:ext cx="8138160" cy="320040"/>
           </a:xfrm>
           <a:prstGeom prst="rect">
             <a:avLst/>
@@ -9533,16 +10642,50 @@
           </a:bodyPr>
           <a:lstStyle/>
           <a:p>
-            <a:pPr algn="r">
-              <a:defRPr sz="1400" b="1">
-                <a:solidFill>
-                  <a:srgbClr val="0F2B5C"/>
-                </a:solidFill>
-                <a:latin typeface="Arial"/>
-              </a:defRPr>
-            </a:pPr>
-            <a:r>
-              <a:t>7 / 12</a:t>
+            <a:pPr algn="r" rtl="1"/>
+            <a:r>
+              <a:rPr sz="1300" b="1" lang="ar-SA" rtl="1">
+                <a:solidFill>
+                  <a:srgbClr val="1E40AF"/>
+                </a:solidFill>
+                <a:latin typeface="Arial"/>
+              </a:rPr>
+              <a:t>مشروع الاتصال المحلي المباشر  •  إدارة التتبع والتحقق</a:t>
+            </a:r>
+          </a:p>
+        </p:txBody>
+      </p:sp>
+      <p:sp>
+        <p:nvSpPr>
+          <p:cNvPr id="4" name="TextBox 3"/>
+          <p:cNvSpPr txBox="1"/>
+          <p:nvPr/>
+        </p:nvSpPr>
+        <p:spPr>
+          <a:xfrm>
+            <a:off x="822960" y="228600"/>
+            <a:ext cx="1828800" cy="320040"/>
+          </a:xfrm>
+          <a:prstGeom prst="rect">
+            <a:avLst/>
+          </a:prstGeom>
+          <a:noFill/>
+        </p:spPr>
+        <p:txBody>
+          <a:bodyPr wrap="none">
+            <a:spAutoFit/>
+          </a:bodyPr>
+          <a:lstStyle/>
+          <a:p>
+            <a:pPr algn="l" rtl="0"/>
+            <a:r>
+              <a:rPr sz="1200" b="1" lang="en-US" rtl="0">
+                <a:solidFill>
+                  <a:srgbClr val="475569"/>
+                </a:solidFill>
+                <a:latin typeface="Consolas"/>
+              </a:rPr>
+              <a:t>Slide 7 / 12</a:t>
             </a:r>
           </a:p>
         </p:txBody>
@@ -9555,8 +10698,8 @@
         </p:nvSpPr>
         <p:spPr>
           <a:xfrm>
-            <a:off x="822960" y="594360"/>
-            <a:ext cx="8961120" cy="685800"/>
+            <a:off x="4023360" y="566928"/>
+            <a:ext cx="7315200" cy="685800"/>
           </a:xfrm>
           <a:prstGeom prst="rect">
             <a:avLst/>
@@ -9564,21 +10707,20 @@
           <a:noFill/>
         </p:spPr>
         <p:txBody>
-          <a:bodyPr wrap="square">
+          <a:bodyPr wrap="none">
             <a:spAutoFit/>
           </a:bodyPr>
           <a:lstStyle/>
           <a:p>
-            <a:pPr>
-              <a:defRPr sz="2800" b="1">
+            <a:pPr algn="r" rtl="1"/>
+            <a:r>
+              <a:rPr sz="3000" b="1" lang="ar-SA" rtl="1">
                 <a:solidFill>
                   <a:srgbClr val="0F2B5C"/>
                 </a:solidFill>
                 <a:latin typeface="Arial"/>
-              </a:defRPr>
-            </a:pPr>
-            <a:r>
-              <a:t>مصفوفة تتبع المتطلبات (Requirements Traceability Matrix)</a:t>
+              </a:rPr>
+              <a:t>مصفوفة تتبع المتطلبات البرمجية</a:t>
             </a:r>
           </a:p>
         </p:txBody>
@@ -9591,8 +10733,8 @@
         </p:nvSpPr>
         <p:spPr>
           <a:xfrm>
-            <a:off x="8961120" y="621792"/>
-            <a:ext cx="2377440" cy="438912"/>
+            <a:off x="822960" y="621792"/>
+            <a:ext cx="3017520" cy="502920"/>
           </a:xfrm>
           <a:prstGeom prst="roundRect">
             <a:avLst/>
@@ -9624,15 +10766,14 @@
           <a:bodyPr rtlCol="0" anchor="ctr"/>
           <a:lstStyle/>
           <a:p>
-            <a:pPr algn="ctr">
-              <a:defRPr sz="1200" b="1">
+            <a:pPr algn="ctr" rtl="0"/>
+            <a:r>
+              <a:rPr sz="1400" b="1" lang="en-US" rtl="0">
                 <a:solidFill>
                   <a:srgbClr val="059669"/>
                 </a:solidFill>
                 <a:latin typeface="Consolas"/>
-              </a:defRPr>
-            </a:pPr>
-            <a:r>
+              </a:rPr>
               <a:t>docs/TraceabilityMatrix.md</a:t>
             </a:r>
           </a:p>
@@ -9646,7 +10787,7 @@
         </p:nvSpPr>
         <p:spPr>
           <a:xfrm>
-            <a:off x="822960" y="1353312"/>
+            <a:off x="822960" y="1325880"/>
             <a:ext cx="10515600" cy="18288"/>
           </a:xfrm>
           <a:prstGeom prst="rect">
@@ -9689,8 +10830,8 @@
         </p:nvSpPr>
         <p:spPr>
           <a:xfrm>
-            <a:off x="822960" y="6309360"/>
-            <a:ext cx="7315200" cy="320040"/>
+            <a:off x="822960" y="6355080"/>
+            <a:ext cx="10515600" cy="320040"/>
           </a:xfrm>
           <a:prstGeom prst="rect">
             <a:avLst/>
@@ -9703,656 +10844,426 @@
           </a:bodyPr>
           <a:lstStyle/>
           <a:p>
-            <a:pPr>
-              <a:defRPr sz="1100">
+            <a:pPr algn="r" rtl="1"/>
+            <a:r>
+              <a:rPr sz="1050" b="0" lang="ar-SA" rtl="1">
                 <a:solidFill>
                   <a:srgbClr val="475569"/>
                 </a:solidFill>
                 <a:latin typeface="Arial"/>
-              </a:defRPr>
+              </a:rPr>
+              <a:t>مناقشة مشروع التخرج الأكاديمية — نظام اتصال محلي مستقل دون خادم وسيط</a:t>
+            </a:r>
+          </a:p>
+        </p:txBody>
+      </p:sp>
+      <p:sp>
+        <p:nvSpPr>
+          <p:cNvPr id="9" name="Rounded Rectangle 8"/>
+          <p:cNvSpPr/>
+          <p:nvPr/>
+        </p:nvSpPr>
+        <p:spPr>
+          <a:xfrm>
+            <a:off x="6217920" y="1554480"/>
+            <a:ext cx="5120640" cy="1828800"/>
+          </a:xfrm>
+          <a:prstGeom prst="roundRect">
+            <a:avLst/>
+          </a:prstGeom>
+          <a:solidFill>
+            <a:srgbClr val="F8FAFC"/>
+          </a:solidFill>
+          <a:ln w="19050">
+            <a:solidFill>
+              <a:srgbClr val="CBD5E1"/>
+            </a:solidFill>
+          </a:ln>
+        </p:spPr>
+        <p:style>
+          <a:lnRef idx="1">
+            <a:schemeClr val="accent1"/>
+          </a:lnRef>
+          <a:fillRef idx="3">
+            <a:schemeClr val="accent1"/>
+          </a:fillRef>
+          <a:effectRef idx="2">
+            <a:schemeClr val="accent1"/>
+          </a:effectRef>
+          <a:fontRef idx="minor">
+            <a:schemeClr val="lt1"/>
+          </a:fontRef>
+        </p:style>
+        <p:txBody>
+          <a:bodyPr rtlCol="0" anchor="ctr" wrap="square"/>
+          <a:lstStyle/>
+          <a:p>
+            <a:pPr algn="r" rtl="1"/>
+            <a:r>
+              <a:rPr sz="1900" b="1" lang="ar-SA" rtl="1">
+                <a:solidFill>
+                  <a:srgbClr val="0F2B5C"/>
+                </a:solidFill>
+                <a:latin typeface="Arial"/>
+              </a:rPr>
+              <a:t>متطلب الاكتشاف المحلي</a:t>
+            </a:r>
+          </a:p>
+          <a:p>
+            <a:pPr algn="r" rtl="0">
+              <a:spcBef>
+                <a:spcPts val="300"/>
+              </a:spcBef>
             </a:pPr>
             <a:r>
-              <a:t>مشروع تخرج LOCAL CONTACT — مناقشة أكاديمية محكمة</a:t>
-            </a:r>
-          </a:p>
-        </p:txBody>
-      </p:sp>
-      <p:graphicFrame>
-        <p:nvGraphicFramePr>
-          <p:cNvPr id="9" name="Table 8"/>
-          <p:cNvGraphicFramePr>
-            <a:graphicFrameLocks noGrp="1"/>
-          </p:cNvGraphicFramePr>
-          <p:nvPr/>
-        </p:nvGraphicFramePr>
-        <p:xfrm>
-          <a:off x="822960" y="1645920"/>
-          <a:ext cx="10515600" cy="4389120"/>
-        </p:xfrm>
-        <a:graphic>
-          <a:graphicData uri="http://schemas.openxmlformats.org/drawingml/2006/table">
-            <a:tbl>
-              <a:tblPr firstRow="1" bandRow="1">
-                <a:tableStyleId>{5C22544A-7EE6-4342-B048-85BDC9FD1C3A}</a:tableStyleId>
-              </a:tblPr>
-              <a:tblGrid>
-                <a:gridCol w="1371600"/>
-                <a:gridCol w="2468880"/>
-                <a:gridCol w="3931920"/>
-                <a:gridCol w="2743200"/>
-              </a:tblGrid>
-              <a:tr h="731520">
-                <a:tc>
-                  <a:txBody>
-                    <a:bodyPr/>
-                    <a:lstStyle/>
-                    <a:p>
-                      <a:pPr>
-                        <a:defRPr sz="1500" b="1">
-                          <a:solidFill>
-                            <a:srgbClr val="0F2B5C"/>
-                          </a:solidFill>
-                          <a:latin typeface="Arial"/>
-                        </a:defRPr>
-                      </a:pPr>
-                      <a:r>
-                        <a:t>رمز المتطلب</a:t>
-                      </a:r>
-                    </a:p>
-                  </a:txBody>
-                  <a:tcPr>
-                    <a:solidFill>
-                      <a:srgbClr val="F8FAFC"/>
-                    </a:solidFill>
-                  </a:tcPr>
-                </a:tc>
-                <a:tc>
-                  <a:txBody>
-                    <a:bodyPr/>
-                    <a:lstStyle/>
-                    <a:p>
-                      <a:pPr>
-                        <a:defRPr sz="1500" b="1">
-                          <a:solidFill>
-                            <a:srgbClr val="0F2B5C"/>
-                          </a:solidFill>
-                          <a:latin typeface="Arial"/>
-                        </a:defRPr>
-                      </a:pPr>
-                      <a:r>
-                        <a:t>عنوان المتطلب الوظيفي</a:t>
-                      </a:r>
-                    </a:p>
-                  </a:txBody>
-                  <a:tcPr>
-                    <a:solidFill>
-                      <a:srgbClr val="F8FAFC"/>
-                    </a:solidFill>
-                  </a:tcPr>
-                </a:tc>
-                <a:tc>
-                  <a:txBody>
-                    <a:bodyPr/>
-                    <a:lstStyle/>
-                    <a:p>
-                      <a:pPr>
-                        <a:defRPr sz="1500" b="1">
-                          <a:solidFill>
-                            <a:srgbClr val="0F2B5C"/>
-                          </a:solidFill>
-                          <a:latin typeface="Arial"/>
-                        </a:defRPr>
-                      </a:pPr>
-                      <a:r>
-                        <a:t>الدليل من الكود المصدري الفعلي</a:t>
-                      </a:r>
-                    </a:p>
-                  </a:txBody>
-                  <a:tcPr>
-                    <a:solidFill>
-                      <a:srgbClr val="F8FAFC"/>
-                    </a:solidFill>
-                  </a:tcPr>
-                </a:tc>
-                <a:tc>
-                  <a:txBody>
-                    <a:bodyPr/>
-                    <a:lstStyle/>
-                    <a:p>
-                      <a:pPr>
-                        <a:defRPr sz="1500" b="1">
-                          <a:solidFill>
-                            <a:srgbClr val="0F2B5C"/>
-                          </a:solidFill>
-                          <a:latin typeface="Arial"/>
-                        </a:defRPr>
-                      </a:pPr>
-                      <a:r>
-                        <a:t>الحالة الهندسية الدقيقة</a:t>
-                      </a:r>
-                    </a:p>
-                  </a:txBody>
-                  <a:tcPr>
-                    <a:solidFill>
-                      <a:srgbClr val="F8FAFC"/>
-                    </a:solidFill>
-                  </a:tcPr>
-                </a:tc>
-              </a:tr>
-              <a:tr h="731520">
-                <a:tc>
-                  <a:txBody>
-                    <a:bodyPr/>
-                    <a:lstStyle/>
-                    <a:p>
-                      <a:pPr>
-                        <a:defRPr sz="1300" b="1">
-                          <a:solidFill>
-                            <a:srgbClr val="0F172A"/>
-                          </a:solidFill>
-                          <a:latin typeface="Consolas"/>
-                        </a:defRPr>
-                      </a:pPr>
-                      <a:r>
-                        <a:t>FR-01</a:t>
-                      </a:r>
-                    </a:p>
-                  </a:txBody>
-                  <a:tcPr>
-                    <a:solidFill>
-                      <a:srgbClr val="FFFFFF"/>
-                    </a:solidFill>
-                  </a:tcPr>
-                </a:tc>
-                <a:tc>
-                  <a:txBody>
-                    <a:bodyPr/>
-                    <a:lstStyle/>
-                    <a:p>
-                      <a:pPr>
-                        <a:defRPr sz="1300" b="1">
-                          <a:solidFill>
-                            <a:srgbClr val="0F172A"/>
-                          </a:solidFill>
-                          <a:latin typeface="Arial"/>
-                        </a:defRPr>
-                      </a:pPr>
-                      <a:r>
-                        <a:t>اكتشاف الأجهزة المحلية</a:t>
-                      </a:r>
-                    </a:p>
-                  </a:txBody>
-                  <a:tcPr>
-                    <a:solidFill>
-                      <a:srgbClr val="FFFFFF"/>
-                    </a:solidFill>
-                  </a:tcPr>
-                </a:tc>
-                <a:tc>
-                  <a:txBody>
-                    <a:bodyPr/>
-                    <a:lstStyle/>
-                    <a:p>
-                      <a:pPr>
-                        <a:defRPr sz="1300" b="1">
-                          <a:solidFill>
-                            <a:srgbClr val="0F172A"/>
-                          </a:solidFill>
-                          <a:latin typeface="Consolas"/>
-                        </a:defRPr>
-                      </a:pPr>
-                      <a:r>
-                        <a:t>LocalP2PEngine.kt — startDiscoveryListener() مع Multicast 8888</a:t>
-                      </a:r>
-                    </a:p>
-                  </a:txBody>
-                  <a:tcPr>
-                    <a:solidFill>
-                      <a:srgbClr val="FFFFFF"/>
-                    </a:solidFill>
-                  </a:tcPr>
-                </a:tc>
-                <a:tc>
-                  <a:txBody>
-                    <a:bodyPr/>
-                    <a:lstStyle/>
-                    <a:p>
-                      <a:pPr>
-                        <a:defRPr sz="1300" b="1">
-                          <a:solidFill>
-                            <a:srgbClr val="D97706"/>
-                          </a:solidFill>
-                          <a:latin typeface="Arial"/>
-                        </a:defRPr>
-                      </a:pPr>
-                      <a:r>
-                        <a:t>Implemented - Not Tested</a:t>
-                      </a:r>
-                      <a:br/>
-                      <a:r>
-                        <a:t>(يحتاج اختبار جهازين)</a:t>
-                      </a:r>
-                    </a:p>
-                  </a:txBody>
-                  <a:tcPr>
-                    <a:solidFill>
-                      <a:srgbClr val="FFFFFF"/>
-                    </a:solidFill>
-                  </a:tcPr>
-                </a:tc>
-              </a:tr>
-              <a:tr h="731520">
-                <a:tc>
-                  <a:txBody>
-                    <a:bodyPr/>
-                    <a:lstStyle/>
-                    <a:p>
-                      <a:pPr>
-                        <a:defRPr sz="1300" b="1">
-                          <a:solidFill>
-                            <a:srgbClr val="0F172A"/>
-                          </a:solidFill>
-                          <a:latin typeface="Consolas"/>
-                        </a:defRPr>
-                      </a:pPr>
-                      <a:r>
-                        <a:t>FR-05</a:t>
-                      </a:r>
-                    </a:p>
-                  </a:txBody>
-                  <a:tcPr>
-                    <a:solidFill>
-                      <a:srgbClr val="F8FAFC"/>
-                    </a:solidFill>
-                  </a:tcPr>
-                </a:tc>
-                <a:tc>
-                  <a:txBody>
-                    <a:bodyPr/>
-                    <a:lstStyle/>
-                    <a:p>
-                      <a:pPr>
-                        <a:defRPr sz="1300" b="1">
-                          <a:solidFill>
-                            <a:srgbClr val="0F172A"/>
-                          </a:solidFill>
-                          <a:latin typeface="Arial"/>
-                        </a:defRPr>
-                      </a:pPr>
-                      <a:r>
-                        <a:t>إرسال رسالة فردية</a:t>
-                      </a:r>
-                    </a:p>
-                  </a:txBody>
-                  <a:tcPr>
-                    <a:solidFill>
-                      <a:srgbClr val="F8FAFC"/>
-                    </a:solidFill>
-                  </a:tcPr>
-                </a:tc>
-                <a:tc>
-                  <a:txBody>
-                    <a:bodyPr/>
-                    <a:lstStyle/>
-                    <a:p>
-                      <a:pPr>
-                        <a:defRPr sz="1300" b="1">
-                          <a:solidFill>
-                            <a:srgbClr val="0F172A"/>
-                          </a:solidFill>
-                          <a:latin typeface="Consolas"/>
-                        </a:defRPr>
-                      </a:pPr>
-                      <a:r>
-                        <a:t>LocalP2PEngine.kt &amp; AppDatabase.kt — حزمة CHAT_MSG وجدول chat_messages</a:t>
-                      </a:r>
-                    </a:p>
-                  </a:txBody>
-                  <a:tcPr>
-                    <a:solidFill>
-                      <a:srgbClr val="F8FAFC"/>
-                    </a:solidFill>
-                  </a:tcPr>
-                </a:tc>
-                <a:tc>
-                  <a:txBody>
-                    <a:bodyPr/>
-                    <a:lstStyle/>
-                    <a:p>
-                      <a:pPr>
-                        <a:defRPr sz="1300" b="1">
-                          <a:solidFill>
-                            <a:srgbClr val="D97706"/>
-                          </a:solidFill>
-                          <a:latin typeface="Arial"/>
-                        </a:defRPr>
-                      </a:pPr>
-                      <a:r>
-                        <a:t>Implemented - Not Tested</a:t>
-                      </a:r>
-                      <a:br/>
-                      <a:r>
-                        <a:t>(مبني في الكود والقاعدة)</a:t>
-                      </a:r>
-                    </a:p>
-                  </a:txBody>
-                  <a:tcPr>
-                    <a:solidFill>
-                      <a:srgbClr val="F8FAFC"/>
-                    </a:solidFill>
-                  </a:tcPr>
-                </a:tc>
-              </a:tr>
-              <a:tr h="731520">
-                <a:tc>
-                  <a:txBody>
-                    <a:bodyPr/>
-                    <a:lstStyle/>
-                    <a:p>
-                      <a:pPr>
-                        <a:defRPr sz="1300" b="1">
-                          <a:solidFill>
-                            <a:srgbClr val="0F172A"/>
-                          </a:solidFill>
-                          <a:latin typeface="Consolas"/>
-                        </a:defRPr>
-                      </a:pPr>
-                      <a:r>
-                        <a:t>FR-13</a:t>
-                      </a:r>
-                    </a:p>
-                  </a:txBody>
-                  <a:tcPr>
-                    <a:solidFill>
-                      <a:srgbClr val="FFFFFF"/>
-                    </a:solidFill>
-                  </a:tcPr>
-                </a:tc>
-                <a:tc>
-                  <a:txBody>
-                    <a:bodyPr/>
-                    <a:lstStyle/>
-                    <a:p>
-                      <a:pPr>
-                        <a:defRPr sz="1300" b="1">
-                          <a:solidFill>
-                            <a:srgbClr val="0F172A"/>
-                          </a:solidFill>
-                          <a:latin typeface="Arial"/>
-                        </a:defRPr>
-                      </a:pPr>
-                      <a:r>
-                        <a:t>حذف الرسالة شبكياً</a:t>
-                      </a:r>
-                    </a:p>
-                  </a:txBody>
-                  <a:tcPr>
-                    <a:solidFill>
-                      <a:srgbClr val="FFFFFF"/>
-                    </a:solidFill>
-                  </a:tcPr>
-                </a:tc>
-                <a:tc>
-                  <a:txBody>
-                    <a:bodyPr/>
-                    <a:lstStyle/>
-                    <a:p>
-                      <a:pPr>
-                        <a:defRPr sz="1300" b="1">
-                          <a:solidFill>
-                            <a:srgbClr val="0F172A"/>
-                          </a:solidFill>
-                          <a:latin typeface="Consolas"/>
-                        </a:defRPr>
-                      </a:pPr>
-                      <a:r>
-                        <a:t>LocalP2PEngine.kt — (لا يوجد كود أو حزمة شبكية للحذف عن بعد)</a:t>
-                      </a:r>
-                    </a:p>
-                  </a:txBody>
-                  <a:tcPr>
-                    <a:solidFill>
-                      <a:srgbClr val="FFFFFF"/>
-                    </a:solidFill>
-                  </a:tcPr>
-                </a:tc>
-                <a:tc>
-                  <a:txBody>
-                    <a:bodyPr/>
-                    <a:lstStyle/>
-                    <a:p>
-                      <a:pPr>
-                        <a:defRPr sz="1300" b="1">
-                          <a:solidFill>
-                            <a:srgbClr val="DC2626"/>
-                          </a:solidFill>
-                          <a:latin typeface="Arial"/>
-                        </a:defRPr>
-                      </a:pPr>
-                      <a:r>
-                        <a:t>Missing / Not Implemented</a:t>
-                      </a:r>
-                      <a:br/>
-                      <a:r>
-                        <a:t>(موثق كفجوة بأمانة)</a:t>
-                      </a:r>
-                    </a:p>
-                  </a:txBody>
-                  <a:tcPr>
-                    <a:solidFill>
-                      <a:srgbClr val="FFFFFF"/>
-                    </a:solidFill>
-                  </a:tcPr>
-                </a:tc>
-              </a:tr>
-              <a:tr h="731520">
-                <a:tc>
-                  <a:txBody>
-                    <a:bodyPr/>
-                    <a:lstStyle/>
-                    <a:p>
-                      <a:pPr>
-                        <a:defRPr sz="1300" b="1">
-                          <a:solidFill>
-                            <a:srgbClr val="0F172A"/>
-                          </a:solidFill>
-                          <a:latin typeface="Consolas"/>
-                        </a:defRPr>
-                      </a:pPr>
-                      <a:r>
-                        <a:t>FR-17</a:t>
-                      </a:r>
-                    </a:p>
-                  </a:txBody>
-                  <a:tcPr>
-                    <a:solidFill>
-                      <a:srgbClr val="F8FAFC"/>
-                    </a:solidFill>
-                  </a:tcPr>
-                </a:tc>
-                <a:tc>
-                  <a:txBody>
-                    <a:bodyPr/>
-                    <a:lstStyle/>
-                    <a:p>
-                      <a:pPr>
-                        <a:defRPr sz="1300" b="1">
-                          <a:solidFill>
-                            <a:srgbClr val="0F172A"/>
-                          </a:solidFill>
-                          <a:latin typeface="Arial"/>
-                        </a:defRPr>
-                      </a:pPr>
-                      <a:r>
-                        <a:t>استئناف نقل الملفات</a:t>
-                      </a:r>
-                    </a:p>
-                  </a:txBody>
-                  <a:tcPr>
-                    <a:solidFill>
-                      <a:srgbClr val="F8FAFC"/>
-                    </a:solidFill>
-                  </a:tcPr>
-                </a:tc>
-                <a:tc>
-                  <a:txBody>
-                    <a:bodyPr/>
-                    <a:lstStyle/>
-                    <a:p>
-                      <a:pPr>
-                        <a:defRPr sz="1300" b="1">
-                          <a:solidFill>
-                            <a:srgbClr val="0F172A"/>
-                          </a:solidFill>
-                          <a:latin typeface="Consolas"/>
-                        </a:defRPr>
-                      </a:pPr>
-                      <a:r>
-                        <a:t>FileTransferEngine.kt &amp; LocalCryptoEngine.kt — اشتقاق الإزاحة والـ Nonce</a:t>
-                      </a:r>
-                    </a:p>
-                  </a:txBody>
-                  <a:tcPr>
-                    <a:solidFill>
-                      <a:srgbClr val="F8FAFC"/>
-                    </a:solidFill>
-                  </a:tcPr>
-                </a:tc>
-                <a:tc>
-                  <a:txBody>
-                    <a:bodyPr/>
-                    <a:lstStyle/>
-                    <a:p>
-                      <a:pPr>
-                        <a:defRPr sz="1300" b="1">
-                          <a:solidFill>
-                            <a:srgbClr val="D97706"/>
-                          </a:solidFill>
-                          <a:latin typeface="Arial"/>
-                        </a:defRPr>
-                      </a:pPr>
-                      <a:r>
-                        <a:t>Implemented - Not Tested</a:t>
-                      </a:r>
-                      <a:br/>
-                      <a:r>
-                        <a:t>(مبني ويحتاج قياس)</a:t>
-                      </a:r>
-                    </a:p>
-                  </a:txBody>
-                  <a:tcPr>
-                    <a:solidFill>
-                      <a:srgbClr val="F8FAFC"/>
-                    </a:solidFill>
-                  </a:tcPr>
-                </a:tc>
-              </a:tr>
-              <a:tr h="731520">
-                <a:tc>
-                  <a:txBody>
-                    <a:bodyPr/>
-                    <a:lstStyle/>
-                    <a:p>
-                      <a:pPr>
-                        <a:defRPr sz="1300" b="1">
-                          <a:solidFill>
-                            <a:srgbClr val="0F172A"/>
-                          </a:solidFill>
-                          <a:latin typeface="Consolas"/>
-                        </a:defRPr>
-                      </a:pPr>
-                      <a:r>
-                        <a:t>FR-28</a:t>
-                      </a:r>
-                    </a:p>
-                  </a:txBody>
-                  <a:tcPr>
-                    <a:solidFill>
-                      <a:srgbClr val="FFFFFF"/>
-                    </a:solidFill>
-                  </a:tcPr>
-                </a:tc>
-                <a:tc>
-                  <a:txBody>
-                    <a:bodyPr/>
-                    <a:lstStyle/>
-                    <a:p>
-                      <a:pPr>
-                        <a:defRPr sz="1300" b="1">
-                          <a:solidFill>
-                            <a:srgbClr val="0F172A"/>
-                          </a:solidFill>
-                          <a:latin typeface="Arial"/>
-                        </a:defRPr>
-                      </a:pPr>
-                      <a:r>
-                        <a:t>تشفير الحزم AES-GCM</a:t>
-                      </a:r>
-                    </a:p>
-                  </a:txBody>
-                  <a:tcPr>
-                    <a:solidFill>
-                      <a:srgbClr val="FFFFFF"/>
-                    </a:solidFill>
-                  </a:tcPr>
-                </a:tc>
-                <a:tc>
-                  <a:txBody>
-                    <a:bodyPr/>
-                    <a:lstStyle/>
-                    <a:p>
-                      <a:pPr>
-                        <a:defRPr sz="1300" b="1">
-                          <a:solidFill>
-                            <a:srgbClr val="0F172A"/>
-                          </a:solidFill>
-                          <a:latin typeface="Consolas"/>
-                        </a:defRPr>
-                      </a:pPr>
-                      <a:r>
-                        <a:t>LocalCryptoEngine.kt — encrypt() بنمط AES/GCM/NoPadding و Tag 128</a:t>
-                      </a:r>
-                    </a:p>
-                  </a:txBody>
-                  <a:tcPr>
-                    <a:solidFill>
-                      <a:srgbClr val="FFFFFF"/>
-                    </a:solidFill>
-                  </a:tcPr>
-                </a:tc>
-                <a:tc>
-                  <a:txBody>
-                    <a:bodyPr/>
-                    <a:lstStyle/>
-                    <a:p>
-                      <a:pPr>
-                        <a:defRPr sz="1300" b="1">
-                          <a:solidFill>
-                            <a:srgbClr val="059669"/>
-                          </a:solidFill>
-                          <a:latin typeface="Arial"/>
-                        </a:defRPr>
-                      </a:pPr>
-                      <a:r>
-                        <a:t>JVM Tested (10/10 Passed)</a:t>
-                      </a:r>
-                      <a:br/>
-                      <a:r>
-                        <a:t>(مثبت آلياً بالاختبارات)</a:t>
-                      </a:r>
-                    </a:p>
-                  </a:txBody>
-                  <a:tcPr>
-                    <a:solidFill>
-                      <a:srgbClr val="FFFFFF"/>
-                    </a:solidFill>
-                  </a:tcPr>
-                </a:tc>
-              </a:tr>
-            </a:tbl>
-          </a:graphicData>
-        </a:graphic>
-      </p:graphicFrame>
+              <a:rPr sz="1300" b="1" lang="en-US" rtl="0">
+                <a:solidFill>
+                  <a:srgbClr val="D97706"/>
+                </a:solidFill>
+                <a:latin typeface="Consolas"/>
+              </a:rPr>
+              <a:t>[FR-01: Implemented - Not Tested]</a:t>
+            </a:r>
+          </a:p>
+          <a:p>
+            <a:pPr algn="r" rtl="1">
+              <a:spcBef>
+                <a:spcPts val="600"/>
+              </a:spcBef>
+            </a:pPr>
+            <a:r>
+              <a:rPr sz="1500" b="0" lang="ar-SA" rtl="1">
+                <a:solidFill>
+                  <a:srgbClr val="0F172A"/>
+                </a:solidFill>
+                <a:latin typeface="Arial"/>
+              </a:rPr>
+              <a:t>استماع وبث حزم البث المتعدد وإدارة خريطة الأقران بالذاكرة الحية.</a:t>
+            </a:r>
+          </a:p>
+        </p:txBody>
+      </p:sp>
+      <p:sp>
+        <p:nvSpPr>
+          <p:cNvPr id="10" name="Rounded Rectangle 9"/>
+          <p:cNvSpPr/>
+          <p:nvPr/>
+        </p:nvSpPr>
+        <p:spPr>
+          <a:xfrm>
+            <a:off x="822960" y="1554480"/>
+            <a:ext cx="5120640" cy="1828800"/>
+          </a:xfrm>
+          <a:prstGeom prst="roundRect">
+            <a:avLst/>
+          </a:prstGeom>
+          <a:solidFill>
+            <a:srgbClr val="F8FAFC"/>
+          </a:solidFill>
+          <a:ln w="19050">
+            <a:solidFill>
+              <a:srgbClr val="CBD5E1"/>
+            </a:solidFill>
+          </a:ln>
+        </p:spPr>
+        <p:style>
+          <a:lnRef idx="1">
+            <a:schemeClr val="accent1"/>
+          </a:lnRef>
+          <a:fillRef idx="3">
+            <a:schemeClr val="accent1"/>
+          </a:fillRef>
+          <a:effectRef idx="2">
+            <a:schemeClr val="accent1"/>
+          </a:effectRef>
+          <a:fontRef idx="minor">
+            <a:schemeClr val="lt1"/>
+          </a:fontRef>
+        </p:style>
+        <p:txBody>
+          <a:bodyPr rtlCol="0" anchor="ctr" wrap="square"/>
+          <a:lstStyle/>
+          <a:p>
+            <a:pPr algn="r" rtl="1"/>
+            <a:r>
+              <a:rPr sz="1900" b="1" lang="ar-SA" rtl="1">
+                <a:solidFill>
+                  <a:srgbClr val="0F2B5C"/>
+                </a:solidFill>
+                <a:latin typeface="Arial"/>
+              </a:rPr>
+              <a:t>متطلب التراسل الفردي</a:t>
+            </a:r>
+          </a:p>
+          <a:p>
+            <a:pPr algn="r" rtl="0">
+              <a:spcBef>
+                <a:spcPts val="300"/>
+              </a:spcBef>
+            </a:pPr>
+            <a:r>
+              <a:rPr sz="1300" b="1" lang="en-US" rtl="0">
+                <a:solidFill>
+                  <a:srgbClr val="D97706"/>
+                </a:solidFill>
+                <a:latin typeface="Consolas"/>
+              </a:rPr>
+              <a:t>[FR-05: Implemented - Not Tested]</a:t>
+            </a:r>
+          </a:p>
+          <a:p>
+            <a:pPr algn="r" rtl="1">
+              <a:spcBef>
+                <a:spcPts val="600"/>
+              </a:spcBef>
+            </a:pPr>
+            <a:r>
+              <a:rPr sz="1500" b="0" lang="ar-SA" rtl="1">
+                <a:solidFill>
+                  <a:srgbClr val="0F172A"/>
+                </a:solidFill>
+                <a:latin typeface="Arial"/>
+              </a:rPr>
+              <a:t>إرسال وتشفير وحفظ الرسائل وتأكيد الاستلام عبر قاعدة بيانات الهاتف.</a:t>
+            </a:r>
+          </a:p>
+        </p:txBody>
+      </p:sp>
+      <p:sp>
+        <p:nvSpPr>
+          <p:cNvPr id="11" name="Rounded Rectangle 10"/>
+          <p:cNvSpPr/>
+          <p:nvPr/>
+        </p:nvSpPr>
+        <p:spPr>
+          <a:xfrm>
+            <a:off x="6217920" y="3566160"/>
+            <a:ext cx="5120640" cy="1828800"/>
+          </a:xfrm>
+          <a:prstGeom prst="roundRect">
+            <a:avLst/>
+          </a:prstGeom>
+          <a:solidFill>
+            <a:srgbClr val="F8FAFC"/>
+          </a:solidFill>
+          <a:ln w="19050">
+            <a:solidFill>
+              <a:srgbClr val="DC2626"/>
+            </a:solidFill>
+          </a:ln>
+        </p:spPr>
+        <p:style>
+          <a:lnRef idx="1">
+            <a:schemeClr val="accent1"/>
+          </a:lnRef>
+          <a:fillRef idx="3">
+            <a:schemeClr val="accent1"/>
+          </a:fillRef>
+          <a:effectRef idx="2">
+            <a:schemeClr val="accent1"/>
+          </a:effectRef>
+          <a:fontRef idx="minor">
+            <a:schemeClr val="lt1"/>
+          </a:fontRef>
+        </p:style>
+        <p:txBody>
+          <a:bodyPr rtlCol="0" anchor="ctr" wrap="square"/>
+          <a:lstStyle/>
+          <a:p>
+            <a:pPr algn="r" rtl="1"/>
+            <a:r>
+              <a:rPr sz="1900" b="1" lang="ar-SA" rtl="1">
+                <a:solidFill>
+                  <a:srgbClr val="0F2B5C"/>
+                </a:solidFill>
+                <a:latin typeface="Arial"/>
+              </a:rPr>
+              <a:t>متطلب الحذف الشبكي للرسائل</a:t>
+            </a:r>
+          </a:p>
+          <a:p>
+            <a:pPr algn="r" rtl="0">
+              <a:spcBef>
+                <a:spcPts val="300"/>
+              </a:spcBef>
+            </a:pPr>
+            <a:r>
+              <a:rPr sz="1300" b="1" lang="en-US" rtl="0">
+                <a:solidFill>
+                  <a:srgbClr val="DC2626"/>
+                </a:solidFill>
+                <a:latin typeface="Consolas"/>
+              </a:rPr>
+              <a:t>[FR-13: Missing / Not Implemented]</a:t>
+            </a:r>
+          </a:p>
+          <a:p>
+            <a:pPr algn="r" rtl="1">
+              <a:spcBef>
+                <a:spcPts val="600"/>
+              </a:spcBef>
+            </a:pPr>
+            <a:r>
+              <a:rPr sz="1500" b="0" lang="ar-SA" rtl="1">
+                <a:solidFill>
+                  <a:srgbClr val="0F172A"/>
+                </a:solidFill>
+                <a:latin typeface="Arial"/>
+              </a:rPr>
+              <a:t>متاح محلياً فقط في قاعدة بيانات الجهاز؛ لا يوجد كود للحذف عن بعد لدى القرين.</a:t>
+            </a:r>
+          </a:p>
+        </p:txBody>
+      </p:sp>
+      <p:sp>
+        <p:nvSpPr>
+          <p:cNvPr id="12" name="Rounded Rectangle 11"/>
+          <p:cNvSpPr/>
+          <p:nvPr/>
+        </p:nvSpPr>
+        <p:spPr>
+          <a:xfrm>
+            <a:off x="822960" y="3566160"/>
+            <a:ext cx="5120640" cy="1828800"/>
+          </a:xfrm>
+          <a:prstGeom prst="roundRect">
+            <a:avLst/>
+          </a:prstGeom>
+          <a:solidFill>
+            <a:srgbClr val="F8FAFC"/>
+          </a:solidFill>
+          <a:ln w="19050">
+            <a:solidFill>
+              <a:srgbClr val="059669"/>
+            </a:solidFill>
+          </a:ln>
+        </p:spPr>
+        <p:style>
+          <a:lnRef idx="1">
+            <a:schemeClr val="accent1"/>
+          </a:lnRef>
+          <a:fillRef idx="3">
+            <a:schemeClr val="accent1"/>
+          </a:fillRef>
+          <a:effectRef idx="2">
+            <a:schemeClr val="accent1"/>
+          </a:effectRef>
+          <a:fontRef idx="minor">
+            <a:schemeClr val="lt1"/>
+          </a:fontRef>
+        </p:style>
+        <p:txBody>
+          <a:bodyPr rtlCol="0" anchor="ctr" wrap="square"/>
+          <a:lstStyle/>
+          <a:p>
+            <a:pPr algn="r" rtl="1"/>
+            <a:r>
+              <a:rPr sz="1900" b="1" lang="ar-SA" rtl="1">
+                <a:solidFill>
+                  <a:srgbClr val="0F2B5C"/>
+                </a:solidFill>
+                <a:latin typeface="Arial"/>
+              </a:rPr>
+              <a:t>متطلب تشفير الحزم بالكامل</a:t>
+            </a:r>
+          </a:p>
+          <a:p>
+            <a:pPr algn="r" rtl="0">
+              <a:spcBef>
+                <a:spcPts val="300"/>
+              </a:spcBef>
+            </a:pPr>
+            <a:r>
+              <a:rPr sz="1300" b="1" lang="en-US" rtl="0">
+                <a:solidFill>
+                  <a:srgbClr val="059669"/>
+                </a:solidFill>
+                <a:latin typeface="Consolas"/>
+              </a:rPr>
+              <a:t>[FR-28: 10/10 JVM Unit Tests Passed]</a:t>
+            </a:r>
+          </a:p>
+          <a:p>
+            <a:pPr algn="r" rtl="1">
+              <a:spcBef>
+                <a:spcPts val="600"/>
+              </a:spcBef>
+            </a:pPr>
+            <a:r>
+              <a:rPr sz="1500" b="0" lang="ar-SA" rtl="1">
+                <a:solidFill>
+                  <a:srgbClr val="0F172A"/>
+                </a:solidFill>
+                <a:latin typeface="Arial"/>
+              </a:rPr>
+              <a:t>تشفير الحزم بمفتاح 256 بت ووسم مصادقة مثبت باختبارات الوحدة المؤتمتة.</a:t>
+            </a:r>
+          </a:p>
+        </p:txBody>
+      </p:sp>
+      <p:sp>
+        <p:nvSpPr>
+          <p:cNvPr id="13" name="Rounded Rectangle 12"/>
+          <p:cNvSpPr/>
+          <p:nvPr/>
+        </p:nvSpPr>
+        <p:spPr>
+          <a:xfrm>
+            <a:off x="822960" y="5623560"/>
+            <a:ext cx="10515600" cy="594360"/>
+          </a:xfrm>
+          <a:prstGeom prst="roundRect">
+            <a:avLst/>
+          </a:prstGeom>
+          <a:solidFill>
+            <a:srgbClr val="F8FAFC"/>
+          </a:solidFill>
+          <a:ln w="12700">
+            <a:solidFill>
+              <a:srgbClr val="CBD5E1"/>
+            </a:solidFill>
+          </a:ln>
+        </p:spPr>
+        <p:style>
+          <a:lnRef idx="1">
+            <a:schemeClr val="accent1"/>
+          </a:lnRef>
+          <a:fillRef idx="3">
+            <a:schemeClr val="accent1"/>
+          </a:fillRef>
+          <a:effectRef idx="2">
+            <a:schemeClr val="accent1"/>
+          </a:effectRef>
+          <a:fontRef idx="minor">
+            <a:schemeClr val="lt1"/>
+          </a:fontRef>
+        </p:style>
+        <p:txBody>
+          <a:bodyPr rtlCol="0" anchor="ctr"/>
+          <a:lstStyle/>
+          <a:p>
+            <a:pPr algn="r" rtl="1"/>
+            <a:r>
+              <a:rPr sz="1200" b="1" lang="ar-SA" rtl="1">
+                <a:solidFill>
+                  <a:srgbClr val="0F2B5C"/>
+                </a:solidFill>
+                <a:latin typeface="Arial"/>
+              </a:rPr>
+              <a:t>المكون البرمجي: مصفوفة التتبع: ربط 31 متطلباً بالكود ومعايير القبول  |  </a:t>
+            </a:r>
+            <a:r>
+              <a:rPr sz="1200" b="1" lang="en-US" rtl="0">
+                <a:solidFill>
+                  <a:srgbClr val="1E40AF"/>
+                </a:solidFill>
+                <a:latin typeface="Consolas"/>
+              </a:rPr>
+              <a:t>docs/TraceabilityMatrix.md</a:t>
+            </a:r>
+          </a:p>
+        </p:txBody>
+      </p:sp>
     </p:spTree>
   </p:cSld>
   <p:clrMapOvr>
@@ -10380,13 +11291,13 @@
         <p:spPr>
           <a:xfrm>
             <a:off x="0" y="0"/>
-            <a:ext cx="12191695" cy="91440"/>
+            <a:ext cx="12191695" cy="109728"/>
           </a:xfrm>
           <a:prstGeom prst="rect">
             <a:avLst/>
           </a:prstGeom>
           <a:solidFill>
-            <a:srgbClr val="1E40AF"/>
+            <a:srgbClr val="0F2B5C"/>
           </a:solidFill>
           <a:ln>
             <a:noFill/>
@@ -10422,44 +11333,8 @@
         </p:nvSpPr>
         <p:spPr>
           <a:xfrm>
-            <a:off x="822960" y="228600"/>
-            <a:ext cx="7772400" cy="320040"/>
-          </a:xfrm>
-          <a:prstGeom prst="rect">
-            <a:avLst/>
-          </a:prstGeom>
-          <a:noFill/>
-        </p:spPr>
-        <p:txBody>
-          <a:bodyPr wrap="square">
-            <a:spAutoFit/>
-          </a:bodyPr>
-          <a:lstStyle/>
-          <a:p>
-            <a:pPr>
-              <a:defRPr sz="1300" b="1">
-                <a:solidFill>
-                  <a:srgbClr val="1E40AF"/>
-                </a:solidFill>
-                <a:latin typeface="Arial"/>
-              </a:defRPr>
-            </a:pPr>
-            <a:r>
-              <a:t>LOCAL CONTACT P2P  |  إدارة التغيير المعماري</a:t>
-            </a:r>
-          </a:p>
-        </p:txBody>
-      </p:sp>
-      <p:sp>
-        <p:nvSpPr>
-          <p:cNvPr id="4" name="TextBox 3"/>
-          <p:cNvSpPr txBox="1"/>
-          <p:nvPr/>
-        </p:nvSpPr>
-        <p:spPr>
-          <a:xfrm>
-            <a:off x="10241280" y="6309360"/>
-            <a:ext cx="1188720" cy="365760"/>
+            <a:off x="3200400" y="228600"/>
+            <a:ext cx="8138160" cy="320040"/>
           </a:xfrm>
           <a:prstGeom prst="rect">
             <a:avLst/>
@@ -10472,16 +11347,50 @@
           </a:bodyPr>
           <a:lstStyle/>
           <a:p>
-            <a:pPr algn="r">
-              <a:defRPr sz="1400" b="1">
-                <a:solidFill>
-                  <a:srgbClr val="0F2B5C"/>
-                </a:solidFill>
-                <a:latin typeface="Arial"/>
-              </a:defRPr>
-            </a:pPr>
-            <a:r>
-              <a:t>8 / 12</a:t>
+            <a:pPr algn="r" rtl="1"/>
+            <a:r>
+              <a:rPr sz="1300" b="1" lang="ar-SA" rtl="1">
+                <a:solidFill>
+                  <a:srgbClr val="1E40AF"/>
+                </a:solidFill>
+                <a:latin typeface="Arial"/>
+              </a:rPr>
+              <a:t>مشروع الاتصال المحلي المباشر  •  إدارة التغيير المعماري</a:t>
+            </a:r>
+          </a:p>
+        </p:txBody>
+      </p:sp>
+      <p:sp>
+        <p:nvSpPr>
+          <p:cNvPr id="4" name="TextBox 3"/>
+          <p:cNvSpPr txBox="1"/>
+          <p:nvPr/>
+        </p:nvSpPr>
+        <p:spPr>
+          <a:xfrm>
+            <a:off x="822960" y="228600"/>
+            <a:ext cx="1828800" cy="320040"/>
+          </a:xfrm>
+          <a:prstGeom prst="rect">
+            <a:avLst/>
+          </a:prstGeom>
+          <a:noFill/>
+        </p:spPr>
+        <p:txBody>
+          <a:bodyPr wrap="none">
+            <a:spAutoFit/>
+          </a:bodyPr>
+          <a:lstStyle/>
+          <a:p>
+            <a:pPr algn="l" rtl="0"/>
+            <a:r>
+              <a:rPr sz="1200" b="1" lang="en-US" rtl="0">
+                <a:solidFill>
+                  <a:srgbClr val="475569"/>
+                </a:solidFill>
+                <a:latin typeface="Consolas"/>
+              </a:rPr>
+              <a:t>Slide 8 / 12</a:t>
             </a:r>
           </a:p>
         </p:txBody>
@@ -10494,8 +11403,8 @@
         </p:nvSpPr>
         <p:spPr>
           <a:xfrm>
-            <a:off x="822960" y="594360"/>
-            <a:ext cx="8961120" cy="685800"/>
+            <a:off x="4023360" y="566928"/>
+            <a:ext cx="7315200" cy="685800"/>
           </a:xfrm>
           <a:prstGeom prst="rect">
             <a:avLst/>
@@ -10503,21 +11412,20 @@
           <a:noFill/>
         </p:spPr>
         <p:txBody>
-          <a:bodyPr wrap="square">
+          <a:bodyPr wrap="none">
             <a:spAutoFit/>
           </a:bodyPr>
           <a:lstStyle/>
           <a:p>
-            <a:pPr>
-              <a:defRPr sz="2800" b="1">
+            <a:pPr algn="r" rtl="1"/>
+            <a:r>
+              <a:rPr sz="3000" b="1" lang="ar-SA" rtl="1">
                 <a:solidFill>
                   <a:srgbClr val="0F2B5C"/>
                 </a:solidFill>
                 <a:latin typeface="Arial"/>
-              </a:defRPr>
-            </a:pPr>
-            <a:r>
-              <a:t>إدارة التغيير والتوافق العكسي (Change Management)</a:t>
+              </a:rPr>
+              <a:t>إدارة التغيير والتوافق العكسي</a:t>
             </a:r>
           </a:p>
         </p:txBody>
@@ -10530,8 +11438,8 @@
         </p:nvSpPr>
         <p:spPr>
           <a:xfrm>
-            <a:off x="8961120" y="621792"/>
-            <a:ext cx="2377440" cy="438912"/>
+            <a:off x="822960" y="621792"/>
+            <a:ext cx="3017520" cy="502920"/>
           </a:xfrm>
           <a:prstGeom prst="roundRect">
             <a:avLst/>
@@ -10563,16 +11471,15 @@
           <a:bodyPr rtlCol="0" anchor="ctr"/>
           <a:lstStyle/>
           <a:p>
-            <a:pPr algn="ctr">
-              <a:defRPr sz="1200" b="1">
+            <a:pPr algn="ctr" rtl="0"/>
+            <a:r>
+              <a:rPr sz="1400" b="1" lang="en-US" rtl="0">
                 <a:solidFill>
                   <a:srgbClr val="059669"/>
                 </a:solidFill>
                 <a:latin typeface="Consolas"/>
-              </a:defRPr>
-            </a:pPr>
-            <a:r>
-              <a:t>ZERO BREAKING CHANGES</a:t>
+              </a:rPr>
+              <a:t>Zero Breaking Changes</a:t>
             </a:r>
           </a:p>
         </p:txBody>
@@ -10585,7 +11492,7 @@
         </p:nvSpPr>
         <p:spPr>
           <a:xfrm>
-            <a:off x="822960" y="1353312"/>
+            <a:off x="822960" y="1325880"/>
             <a:ext cx="10515600" cy="18288"/>
           </a:xfrm>
           <a:prstGeom prst="rect">
@@ -10628,8 +11535,8 @@
         </p:nvSpPr>
         <p:spPr>
           <a:xfrm>
-            <a:off x="822960" y="6309360"/>
-            <a:ext cx="7315200" cy="320040"/>
+            <a:off x="822960" y="6355080"/>
+            <a:ext cx="10515600" cy="320040"/>
           </a:xfrm>
           <a:prstGeom prst="rect">
             <a:avLst/>
@@ -10642,16 +11549,15 @@
           </a:bodyPr>
           <a:lstStyle/>
           <a:p>
-            <a:pPr>
-              <a:defRPr sz="1100">
+            <a:pPr algn="r" rtl="1"/>
+            <a:r>
+              <a:rPr sz="1050" b="0" lang="ar-SA" rtl="1">
                 <a:solidFill>
                   <a:srgbClr val="475569"/>
                 </a:solidFill>
                 <a:latin typeface="Arial"/>
-              </a:defRPr>
-            </a:pPr>
-            <a:r>
-              <a:t>مشروع تخرج LOCAL CONTACT — مناقشة أكاديمية محكمة</a:t>
+              </a:rPr>
+              <a:t>مناقشة مشروع التخرج الأكاديمية — نظام اتصال محلي مستقل دون خادم وسيط</a:t>
             </a:r>
           </a:p>
         </p:txBody>
@@ -10664,127 +11570,8 @@
         </p:nvSpPr>
         <p:spPr>
           <a:xfrm>
-            <a:off x="822960" y="1645920"/>
-            <a:ext cx="5120640" cy="4389120"/>
-          </a:xfrm>
-          <a:prstGeom prst="roundRect">
-            <a:avLst/>
-          </a:prstGeom>
-          <a:solidFill>
-            <a:srgbClr val="F8FAFC"/>
-          </a:solidFill>
-          <a:ln w="19050">
-            <a:solidFill>
-              <a:srgbClr val="1E40AF"/>
-            </a:solidFill>
-          </a:ln>
-        </p:spPr>
-        <p:style>
-          <a:lnRef idx="1">
-            <a:schemeClr val="accent1"/>
-          </a:lnRef>
-          <a:fillRef idx="3">
-            <a:schemeClr val="accent1"/>
-          </a:fillRef>
-          <a:effectRef idx="2">
-            <a:schemeClr val="accent1"/>
-          </a:effectRef>
-          <a:fontRef idx="minor">
-            <a:schemeClr val="lt1"/>
-          </a:fontRef>
-        </p:style>
-        <p:txBody>
-          <a:bodyPr rtlCol="0" anchor="ctr" wrap="square"/>
-          <a:lstStyle/>
-          <a:p>
-            <a:pPr algn="ctr">
-              <a:defRPr sz="2200" b="1">
-                <a:solidFill>
-                  <a:srgbClr val="0F2B5C"/>
-                </a:solidFill>
-                <a:latin typeface="Arial"/>
-              </a:defRPr>
-            </a:pPr>
-            <a:r>
-              <a:t>🔄 تحدي التغيير ونمط التصميم المطبق:</a:t>
-            </a:r>
-          </a:p>
-          <a:p>
-            <a:pPr>
-              <a:spcBef>
-                <a:spcPts val="1000"/>
-              </a:spcBef>
-              <a:defRPr sz="1600" b="1">
-                <a:solidFill>
-                  <a:srgbClr val="0F172A"/>
-                </a:solidFill>
-                <a:latin typeface="Arial"/>
-              </a:defRPr>
-            </a:pPr>
-            <a:r>
-              <a:t>• التحدي الهندسي: تحديث وتطوير منظومة التشفير لدعم المفاتيح الديناميكية دون كسر عشرات المسارات التي تستدعي التشفير القديم في الواجهات والمكالمات.</a:t>
-            </a:r>
-          </a:p>
-          <a:p>
-            <a:pPr>
-              <a:spcBef>
-                <a:spcPts val="1000"/>
-              </a:spcBef>
-              <a:defRPr sz="1600" b="1">
-                <a:solidFill>
-                  <a:srgbClr val="0F172A"/>
-                </a:solidFill>
-                <a:latin typeface="Arial"/>
-              </a:defRPr>
-            </a:pPr>
-            <a:r>
-              <a:t>• نمط المزود (Provider / Strategy Pattern): إنشاء واجهة KeyProvider.kt لفصل منطق جلب واشتقاق المفتاح عن عمليات Cipher.</a:t>
-            </a:r>
-          </a:p>
-          <a:p>
-            <a:pPr>
-              <a:spcBef>
-                <a:spcPts val="1000"/>
-              </a:spcBef>
-              <a:defRPr sz="1600" b="1">
-                <a:solidFill>
-                  <a:srgbClr val="0F172A"/>
-                </a:solidFill>
-                <a:latin typeface="Arial"/>
-              </a:defRPr>
-            </a:pPr>
-            <a:r>
-              <a:t>• التوافق العكسي (Backward Compatibility): بناء LegacyStaticKeyProvider ليحتفظ بسلوك المفتاح القديم كخيار افتراضي (Default).</a:t>
-            </a:r>
-          </a:p>
-          <a:p>
-            <a:pPr>
-              <a:spcBef>
-                <a:spcPts val="1000"/>
-              </a:spcBef>
-              <a:defRPr sz="1600" b="1">
-                <a:solidFill>
-                  <a:srgbClr val="0F172A"/>
-                </a:solidFill>
-                <a:latin typeface="Arial"/>
-              </a:defRPr>
-            </a:pPr>
-            <a:r>
-              <a:t>• صفر تعديلات كاسرة (Zero Breaking Changes): لم يتأثر أي سطر كود خارجي يستدعي encrypt() و decrypt().</a:t>
-            </a:r>
-          </a:p>
-        </p:txBody>
-      </p:sp>
-      <p:sp>
-        <p:nvSpPr>
-          <p:cNvPr id="10" name="Rounded Rectangle 9"/>
-          <p:cNvSpPr/>
-          <p:nvPr/>
-        </p:nvSpPr>
-        <p:spPr>
-          <a:xfrm>
-            <a:off x="6217920" y="1645920"/>
-            <a:ext cx="5120640" cy="4389120"/>
+            <a:off x="6217920" y="1554480"/>
+            <a:ext cx="5120640" cy="1828800"/>
           </a:xfrm>
           <a:prstGeom prst="roundRect">
             <a:avLst/>
@@ -10816,111 +11603,368 @@
           <a:bodyPr rtlCol="0" anchor="ctr" wrap="square"/>
           <a:lstStyle/>
           <a:p>
-            <a:pPr algn="ctr">
-              <a:defRPr sz="2200" b="1">
+            <a:pPr algn="r" rtl="1"/>
+            <a:r>
+              <a:rPr sz="1900" b="1" lang="ar-SA" rtl="1">
                 <a:solidFill>
                   <a:srgbClr val="0F2B5C"/>
                 </a:solidFill>
                 <a:latin typeface="Arial"/>
-              </a:defRPr>
+              </a:rPr>
+              <a:t>تحدي التغيير البرمجي</a:t>
+            </a:r>
+          </a:p>
+          <a:p>
+            <a:pPr algn="r" rtl="0">
+              <a:spcBef>
+                <a:spcPts val="300"/>
+              </a:spcBef>
             </a:pPr>
             <a:r>
-              <a:t>📂 الملفات الفعلية والمسؤوليات:</a:t>
-            </a:r>
-          </a:p>
-          <a:p>
-            <a:pPr>
+              <a:rPr sz="1300" b="1" lang="en-US" rtl="0">
+                <a:solidFill>
+                  <a:srgbClr val="1E40AF"/>
+                </a:solidFill>
+                <a:latin typeface="Consolas"/>
+              </a:rPr>
+              <a:t>[Architecture Evolution Challenge]</a:t>
+            </a:r>
+          </a:p>
+          <a:p>
+            <a:pPr algn="r" rtl="1">
               <a:spcBef>
-                <a:spcPts val="800"/>
+                <a:spcPts val="600"/>
               </a:spcBef>
-              <a:defRPr sz="1600" b="1">
+            </a:pPr>
+            <a:r>
+              <a:rPr sz="1500" b="0" lang="ar-SA" rtl="1">
+                <a:solidFill>
+                  <a:srgbClr val="0F172A"/>
+                </a:solidFill>
+                <a:latin typeface="Arial"/>
+              </a:rPr>
+              <a:t>ترقية منظومة التشفير لدعم المفاتيح المؤقتة دون كسر المسارات القديمة في المكالمات والواجهة.</a:t>
+            </a:r>
+          </a:p>
+        </p:txBody>
+      </p:sp>
+      <p:sp>
+        <p:nvSpPr>
+          <p:cNvPr id="10" name="Rounded Rectangle 9"/>
+          <p:cNvSpPr/>
+          <p:nvPr/>
+        </p:nvSpPr>
+        <p:spPr>
+          <a:xfrm>
+            <a:off x="822960" y="1554480"/>
+            <a:ext cx="5120640" cy="1828800"/>
+          </a:xfrm>
+          <a:prstGeom prst="roundRect">
+            <a:avLst/>
+          </a:prstGeom>
+          <a:solidFill>
+            <a:srgbClr val="F8FAFC"/>
+          </a:solidFill>
+          <a:ln w="19050">
+            <a:solidFill>
+              <a:srgbClr val="CBD5E1"/>
+            </a:solidFill>
+          </a:ln>
+        </p:spPr>
+        <p:style>
+          <a:lnRef idx="1">
+            <a:schemeClr val="accent1"/>
+          </a:lnRef>
+          <a:fillRef idx="3">
+            <a:schemeClr val="accent1"/>
+          </a:fillRef>
+          <a:effectRef idx="2">
+            <a:schemeClr val="accent1"/>
+          </a:effectRef>
+          <a:fontRef idx="minor">
+            <a:schemeClr val="lt1"/>
+          </a:fontRef>
+        </p:style>
+        <p:txBody>
+          <a:bodyPr rtlCol="0" anchor="ctr" wrap="square"/>
+          <a:lstStyle/>
+          <a:p>
+            <a:pPr algn="r" rtl="1"/>
+            <a:r>
+              <a:rPr sz="1900" b="1" lang="ar-SA" rtl="1">
+                <a:solidFill>
+                  <a:srgbClr val="0F2B5C"/>
+                </a:solidFill>
+                <a:latin typeface="Arial"/>
+              </a:rPr>
+              <a:t>تطبيق نمط المزود</a:t>
+            </a:r>
+          </a:p>
+          <a:p>
+            <a:pPr algn="r" rtl="0">
+              <a:spcBef>
+                <a:spcPts val="300"/>
+              </a:spcBef>
+            </a:pPr>
+            <a:r>
+              <a:rPr sz="1300" b="1" lang="en-US" rtl="0">
+                <a:solidFill>
+                  <a:srgbClr val="059669"/>
+                </a:solidFill>
+                <a:latin typeface="Consolas"/>
+              </a:rPr>
+              <a:t>[Provider / Strategy Design Pattern]</a:t>
+            </a:r>
+          </a:p>
+          <a:p>
+            <a:pPr algn="r" rtl="1">
+              <a:spcBef>
+                <a:spcPts val="600"/>
+              </a:spcBef>
+            </a:pPr>
+            <a:r>
+              <a:rPr sz="1500" b="0" lang="ar-SA" rtl="1">
+                <a:solidFill>
+                  <a:srgbClr val="0F172A"/>
+                </a:solidFill>
+                <a:latin typeface="Arial"/>
+              </a:rPr>
+              <a:t>إنشاء واجهة مجردة تفصل مسؤولية توليد المفتاح عن عمليات التشفير المباشرة.</a:t>
+            </a:r>
+          </a:p>
+        </p:txBody>
+      </p:sp>
+      <p:sp>
+        <p:nvSpPr>
+          <p:cNvPr id="11" name="Rounded Rectangle 10"/>
+          <p:cNvSpPr/>
+          <p:nvPr/>
+        </p:nvSpPr>
+        <p:spPr>
+          <a:xfrm>
+            <a:off x="6217920" y="3566160"/>
+            <a:ext cx="5120640" cy="1828800"/>
+          </a:xfrm>
+          <a:prstGeom prst="roundRect">
+            <a:avLst/>
+          </a:prstGeom>
+          <a:solidFill>
+            <a:srgbClr val="F8FAFC"/>
+          </a:solidFill>
+          <a:ln w="19050">
+            <a:solidFill>
+              <a:srgbClr val="CBD5E1"/>
+            </a:solidFill>
+          </a:ln>
+        </p:spPr>
+        <p:style>
+          <a:lnRef idx="1">
+            <a:schemeClr val="accent1"/>
+          </a:lnRef>
+          <a:fillRef idx="3">
+            <a:schemeClr val="accent1"/>
+          </a:fillRef>
+          <a:effectRef idx="2">
+            <a:schemeClr val="accent1"/>
+          </a:effectRef>
+          <a:fontRef idx="minor">
+            <a:schemeClr val="lt1"/>
+          </a:fontRef>
+        </p:style>
+        <p:txBody>
+          <a:bodyPr rtlCol="0" anchor="ctr" wrap="square"/>
+          <a:lstStyle/>
+          <a:p>
+            <a:pPr algn="r" rtl="1"/>
+            <a:r>
+              <a:rPr sz="1900" b="1" lang="ar-SA" rtl="1">
+                <a:solidFill>
+                  <a:srgbClr val="0F2B5C"/>
+                </a:solidFill>
+                <a:latin typeface="Arial"/>
+              </a:rPr>
+              <a:t>ضمان التوافق العكسي</a:t>
+            </a:r>
+          </a:p>
+          <a:p>
+            <a:pPr algn="r" rtl="0">
+              <a:spcBef>
+                <a:spcPts val="300"/>
+              </a:spcBef>
+            </a:pPr>
+            <a:r>
+              <a:rPr sz="1300" b="1" lang="en-US" rtl="0">
+                <a:solidFill>
+                  <a:srgbClr val="059669"/>
+                </a:solidFill>
+                <a:latin typeface="Consolas"/>
+              </a:rPr>
+              <a:t>[LegacyStaticKeyProvider Built]</a:t>
+            </a:r>
+          </a:p>
+          <a:p>
+            <a:pPr algn="r" rtl="1">
+              <a:spcBef>
+                <a:spcPts val="600"/>
+              </a:spcBef>
+            </a:pPr>
+            <a:r>
+              <a:rPr sz="1500" b="0" lang="ar-SA" rtl="1">
+                <a:solidFill>
+                  <a:srgbClr val="0F172A"/>
+                </a:solidFill>
+                <a:latin typeface="Arial"/>
+              </a:rPr>
+              <a:t>بناء مزود المفتاح القديم ليحتفظ بنفس سلوك التشفير كخيار افتراضي لكافة الأنظمة القديمة.</a:t>
+            </a:r>
+          </a:p>
+        </p:txBody>
+      </p:sp>
+      <p:sp>
+        <p:nvSpPr>
+          <p:cNvPr id="12" name="Rounded Rectangle 11"/>
+          <p:cNvSpPr/>
+          <p:nvPr/>
+        </p:nvSpPr>
+        <p:spPr>
+          <a:xfrm>
+            <a:off x="822960" y="3566160"/>
+            <a:ext cx="5120640" cy="1828800"/>
+          </a:xfrm>
+          <a:prstGeom prst="roundRect">
+            <a:avLst/>
+          </a:prstGeom>
+          <a:solidFill>
+            <a:srgbClr val="F8FAFC"/>
+          </a:solidFill>
+          <a:ln w="19050">
+            <a:solidFill>
+              <a:srgbClr val="CBD5E1"/>
+            </a:solidFill>
+          </a:ln>
+        </p:spPr>
+        <p:style>
+          <a:lnRef idx="1">
+            <a:schemeClr val="accent1"/>
+          </a:lnRef>
+          <a:fillRef idx="3">
+            <a:schemeClr val="accent1"/>
+          </a:fillRef>
+          <a:effectRef idx="2">
+            <a:schemeClr val="accent1"/>
+          </a:effectRef>
+          <a:fontRef idx="minor">
+            <a:schemeClr val="lt1"/>
+          </a:fontRef>
+        </p:style>
+        <p:txBody>
+          <a:bodyPr rtlCol="0" anchor="ctr" wrap="square"/>
+          <a:lstStyle/>
+          <a:p>
+            <a:pPr algn="r" rtl="1"/>
+            <a:r>
+              <a:rPr sz="1900" b="1" lang="ar-SA" rtl="1">
+                <a:solidFill>
+                  <a:srgbClr val="0F2B5C"/>
+                </a:solidFill>
+                <a:latin typeface="Arial"/>
+              </a:rPr>
+              <a:t>صفر تعديلات كاسرة للكود</a:t>
+            </a:r>
+          </a:p>
+          <a:p>
+            <a:pPr algn="r" rtl="0">
+              <a:spcBef>
+                <a:spcPts val="300"/>
+              </a:spcBef>
+            </a:pPr>
+            <a:r>
+              <a:rPr sz="1300" b="1" lang="en-US" rtl="0">
+                <a:solidFill>
+                  <a:srgbClr val="059669"/>
+                </a:solidFill>
+                <a:latin typeface="Consolas"/>
+              </a:rPr>
+              <a:t>[Zero Regressions / Breaking Changes]</a:t>
+            </a:r>
+          </a:p>
+          <a:p>
+            <a:pPr algn="r" rtl="1">
+              <a:spcBef>
+                <a:spcPts val="600"/>
+              </a:spcBef>
+            </a:pPr>
+            <a:r>
+              <a:rPr sz="1500" b="0" lang="ar-SA" rtl="1">
+                <a:solidFill>
+                  <a:srgbClr val="0F172A"/>
+                </a:solidFill>
+                <a:latin typeface="Arial"/>
+              </a:rPr>
+              <a:t>لم يتأثر أي سطر كود خارجي يستدعي التشفير، مما حقق تطويراً آمناً وخالياً من الانتكاسات.</a:t>
+            </a:r>
+          </a:p>
+        </p:txBody>
+      </p:sp>
+      <p:sp>
+        <p:nvSpPr>
+          <p:cNvPr id="13" name="Rounded Rectangle 12"/>
+          <p:cNvSpPr/>
+          <p:nvPr/>
+        </p:nvSpPr>
+        <p:spPr>
+          <a:xfrm>
+            <a:off x="822960" y="5623560"/>
+            <a:ext cx="10515600" cy="594360"/>
+          </a:xfrm>
+          <a:prstGeom prst="roundRect">
+            <a:avLst/>
+          </a:prstGeom>
+          <a:solidFill>
+            <a:srgbClr val="F8FAFC"/>
+          </a:solidFill>
+          <a:ln w="12700">
+            <a:solidFill>
+              <a:srgbClr val="CBD5E1"/>
+            </a:solidFill>
+          </a:ln>
+        </p:spPr>
+        <p:style>
+          <a:lnRef idx="1">
+            <a:schemeClr val="accent1"/>
+          </a:lnRef>
+          <a:fillRef idx="3">
+            <a:schemeClr val="accent1"/>
+          </a:fillRef>
+          <a:effectRef idx="2">
+            <a:schemeClr val="accent1"/>
+          </a:effectRef>
+          <a:fontRef idx="minor">
+            <a:schemeClr val="lt1"/>
+          </a:fontRef>
+        </p:style>
+        <p:txBody>
+          <a:bodyPr rtlCol="0" anchor="ctr"/>
+          <a:lstStyle/>
+          <a:p>
+            <a:pPr algn="r" rtl="1"/>
+            <a:r>
+              <a:rPr sz="1200" b="1" lang="ar-SA" rtl="1">
+                <a:solidFill>
+                  <a:srgbClr val="0F2B5C"/>
+                </a:solidFill>
+                <a:latin typeface="Arial"/>
+              </a:rPr>
+              <a:t>المكون البرمجي: واجهة تزويد المفاتيح ومزود التوافق العكسي  |  </a:t>
+            </a:r>
+            <a:r>
+              <a:rPr sz="1200" b="1" lang="en-US" rtl="0">
                 <a:solidFill>
                   <a:srgbClr val="1E40AF"/>
                 </a:solidFill>
-                <a:latin typeface="Arial"/>
-              </a:defRPr>
-            </a:pPr>
-            <a:r>
-              <a:t>• KeyProvider.kt (ملف مضاف جديد):</a:t>
-            </a:r>
-          </a:p>
-          <a:p>
-            <a:pPr>
-              <a:defRPr sz="1500" b="1">
-                <a:solidFill>
-                  <a:srgbClr val="0F172A"/>
-                </a:solidFill>
-                <a:latin typeface="Arial"/>
-              </a:defRPr>
-            </a:pPr>
-            <a:r>
-              <a:t>  الأسطر 17-26: تعريف الواجهة المجردة KeyProvider.</a:t>
-            </a:r>
-            <a:br/>
-            <a:r>
-              <a:t>الأسطر 38-94: كلاس LegacyStaticKeyProvider للتوافق العكسي.</a:t>
-            </a:r>
-          </a:p>
-          <a:p>
-            <a:pPr>
-              <a:spcBef>
-                <a:spcPts val="800"/>
-              </a:spcBef>
-              <a:defRPr sz="1600" b="1">
-                <a:solidFill>
-                  <a:srgbClr val="1E40AF"/>
-                </a:solidFill>
-                <a:latin typeface="Arial"/>
-              </a:defRPr>
-            </a:pPr>
-            <a:r>
-              <a:t>• LocalCryptoEngine.kt (تعديل معماري):</a:t>
-            </a:r>
-          </a:p>
-          <a:p>
-            <a:pPr>
-              <a:defRPr sz="1500" b="1">
-                <a:solidFill>
-                  <a:srgbClr val="0F172A"/>
-                </a:solidFill>
-                <a:latin typeface="Arial"/>
-              </a:defRPr>
-            </a:pPr>
-            <a:r>
-              <a:t>  الأسطر 28-30: استقبال المزود عبر @Volatile var keyProvider: KeyProvider.</a:t>
-            </a:r>
-            <a:br/>
-            <a:r>
-              <a:t>الأسطر 43-45: استرجاع المفتاح عبر keyProvider.getNetworkKey().</a:t>
-            </a:r>
-          </a:p>
-          <a:p>
-            <a:pPr>
-              <a:spcBef>
-                <a:spcPts val="800"/>
-              </a:spcBef>
-              <a:defRPr sz="1600" b="1">
-                <a:solidFill>
-                  <a:srgbClr val="1E40AF"/>
-                </a:solidFill>
-                <a:latin typeface="Arial"/>
-              </a:defRPr>
-            </a:pPr>
-            <a:r>
-              <a:t>• الأثر الهندسي:</a:t>
-            </a:r>
-          </a:p>
-          <a:p>
-            <a:pPr>
-              <a:defRPr sz="1500" b="1">
-                <a:solidFill>
-                  <a:srgbClr val="0F172A"/>
-                </a:solidFill>
-                <a:latin typeface="Arial"/>
-              </a:defRPr>
-            </a:pPr>
-            <a:r>
-              <a:t>  إتاحة التبديل بين مفتاح PBKDF2 القديم ومفاتيح الجلسات الديناميكية و Android Keystore في وقت التشغيل (Runtime) بسلاسة.</a:t>
+                <a:latin typeface="Consolas"/>
+              </a:rPr>
+              <a:t>app/src/main/java/com/example/network/KeyProvider.kt</a:t>
             </a:r>
           </a:p>
         </p:txBody>
@@ -10952,13 +11996,13 @@
         <p:spPr>
           <a:xfrm>
             <a:off x="0" y="0"/>
-            <a:ext cx="12191695" cy="91440"/>
+            <a:ext cx="12191695" cy="109728"/>
           </a:xfrm>
           <a:prstGeom prst="rect">
             <a:avLst/>
           </a:prstGeom>
           <a:solidFill>
-            <a:srgbClr val="1E40AF"/>
+            <a:srgbClr val="0F2B5C"/>
           </a:solidFill>
           <a:ln>
             <a:noFill/>
@@ -10994,44 +12038,8 @@
         </p:nvSpPr>
         <p:spPr>
           <a:xfrm>
-            <a:off x="822960" y="228600"/>
-            <a:ext cx="7772400" cy="320040"/>
-          </a:xfrm>
-          <a:prstGeom prst="rect">
-            <a:avLst/>
-          </a:prstGeom>
-          <a:noFill/>
-        </p:spPr>
-        <p:txBody>
-          <a:bodyPr wrap="square">
-            <a:spAutoFit/>
-          </a:bodyPr>
-          <a:lstStyle/>
-          <a:p>
-            <a:pPr>
-              <a:defRPr sz="1300" b="1">
-                <a:solidFill>
-                  <a:srgbClr val="1E40AF"/>
-                </a:solidFill>
-                <a:latin typeface="Arial"/>
-              </a:defRPr>
-            </a:pPr>
-            <a:r>
-              <a:t>LOCAL CONTACT P2P  |  ضمان الجودة والتحقق</a:t>
-            </a:r>
-          </a:p>
-        </p:txBody>
-      </p:sp>
-      <p:sp>
-        <p:nvSpPr>
-          <p:cNvPr id="4" name="TextBox 3"/>
-          <p:cNvSpPr txBox="1"/>
-          <p:nvPr/>
-        </p:nvSpPr>
-        <p:spPr>
-          <a:xfrm>
-            <a:off x="10241280" y="6309360"/>
-            <a:ext cx="1188720" cy="365760"/>
+            <a:off x="3200400" y="228600"/>
+            <a:ext cx="8138160" cy="320040"/>
           </a:xfrm>
           <a:prstGeom prst="rect">
             <a:avLst/>
@@ -11044,16 +12052,50 @@
           </a:bodyPr>
           <a:lstStyle/>
           <a:p>
-            <a:pPr algn="r">
-              <a:defRPr sz="1400" b="1">
-                <a:solidFill>
-                  <a:srgbClr val="0F2B5C"/>
-                </a:solidFill>
-                <a:latin typeface="Arial"/>
-              </a:defRPr>
-            </a:pPr>
-            <a:r>
-              <a:t>9 / 12</a:t>
+            <a:pPr algn="r" rtl="1"/>
+            <a:r>
+              <a:rPr sz="1300" b="1" lang="ar-SA" rtl="1">
+                <a:solidFill>
+                  <a:srgbClr val="1E40AF"/>
+                </a:solidFill>
+                <a:latin typeface="Arial"/>
+              </a:rPr>
+              <a:t>مشروع الاتصال المحلي المباشر  •  ضمان الجودة والتحقق</a:t>
+            </a:r>
+          </a:p>
+        </p:txBody>
+      </p:sp>
+      <p:sp>
+        <p:nvSpPr>
+          <p:cNvPr id="4" name="TextBox 3"/>
+          <p:cNvSpPr txBox="1"/>
+          <p:nvPr/>
+        </p:nvSpPr>
+        <p:spPr>
+          <a:xfrm>
+            <a:off x="822960" y="228600"/>
+            <a:ext cx="1828800" cy="320040"/>
+          </a:xfrm>
+          <a:prstGeom prst="rect">
+            <a:avLst/>
+          </a:prstGeom>
+          <a:noFill/>
+        </p:spPr>
+        <p:txBody>
+          <a:bodyPr wrap="none">
+            <a:spAutoFit/>
+          </a:bodyPr>
+          <a:lstStyle/>
+          <a:p>
+            <a:pPr algn="l" rtl="0"/>
+            <a:r>
+              <a:rPr sz="1200" b="1" lang="en-US" rtl="0">
+                <a:solidFill>
+                  <a:srgbClr val="475569"/>
+                </a:solidFill>
+                <a:latin typeface="Consolas"/>
+              </a:rPr>
+              <a:t>Slide 9 / 12</a:t>
             </a:r>
           </a:p>
         </p:txBody>
@@ -11066,8 +12108,8 @@
         </p:nvSpPr>
         <p:spPr>
           <a:xfrm>
-            <a:off x="822960" y="594360"/>
-            <a:ext cx="8961120" cy="685800"/>
+            <a:off x="4023360" y="566928"/>
+            <a:ext cx="7315200" cy="685800"/>
           </a:xfrm>
           <a:prstGeom prst="rect">
             <a:avLst/>
@@ -11075,21 +12117,20 @@
           <a:noFill/>
         </p:spPr>
         <p:txBody>
-          <a:bodyPr wrap="square">
+          <a:bodyPr wrap="none">
             <a:spAutoFit/>
           </a:bodyPr>
           <a:lstStyle/>
           <a:p>
-            <a:pPr>
-              <a:defRPr sz="2800" b="1">
+            <a:pPr algn="r" rtl="1"/>
+            <a:r>
+              <a:rPr sz="3000" b="1" lang="ar-SA" rtl="1">
                 <a:solidFill>
                   <a:srgbClr val="0F2B5C"/>
                 </a:solidFill>
                 <a:latin typeface="Arial"/>
-              </a:defRPr>
-            </a:pPr>
-            <a:r>
-              <a:t>استراتيجية الاختبارات وضمان الجودة (QA &amp; Verification)</a:t>
+              </a:rPr>
+              <a:t>استراتيجية الاختبارات وضمان الجودة البرمجية</a:t>
             </a:r>
           </a:p>
         </p:txBody>
@@ -11102,8 +12143,8 @@
         </p:nvSpPr>
         <p:spPr>
           <a:xfrm>
-            <a:off x="8961120" y="621792"/>
-            <a:ext cx="2377440" cy="438912"/>
+            <a:off x="822960" y="621792"/>
+            <a:ext cx="3017520" cy="502920"/>
           </a:xfrm>
           <a:prstGeom prst="roundRect">
             <a:avLst/>
@@ -11135,16 +12176,15 @@
           <a:bodyPr rtlCol="0" anchor="ctr"/>
           <a:lstStyle/>
           <a:p>
-            <a:pPr algn="ctr">
-              <a:defRPr sz="1200" b="1">
+            <a:pPr algn="ctr" rtl="0"/>
+            <a:r>
+              <a:rPr sz="1400" b="1" lang="en-US" rtl="0">
                 <a:solidFill>
                   <a:srgbClr val="059669"/>
                 </a:solidFill>
                 <a:latin typeface="Consolas"/>
-              </a:defRPr>
-            </a:pPr>
-            <a:r>
-              <a:t>33/33 TESTS PASSED</a:t>
+              </a:rPr>
+              <a:t>33/33 Tests Passed (100%)</a:t>
             </a:r>
           </a:p>
         </p:txBody>
@@ -11157,7 +12197,7 @@
         </p:nvSpPr>
         <p:spPr>
           <a:xfrm>
-            <a:off x="822960" y="1353312"/>
+            <a:off x="822960" y="1325880"/>
             <a:ext cx="10515600" cy="18288"/>
           </a:xfrm>
           <a:prstGeom prst="rect">
@@ -11200,8 +12240,8 @@
         </p:nvSpPr>
         <p:spPr>
           <a:xfrm>
-            <a:off x="822960" y="6309360"/>
-            <a:ext cx="7315200" cy="320040"/>
+            <a:off x="822960" y="6355080"/>
+            <a:ext cx="10515600" cy="320040"/>
           </a:xfrm>
           <a:prstGeom prst="rect">
             <a:avLst/>
@@ -11214,16 +12254,15 @@
           </a:bodyPr>
           <a:lstStyle/>
           <a:p>
-            <a:pPr>
-              <a:defRPr sz="1100">
+            <a:pPr algn="r" rtl="1"/>
+            <a:r>
+              <a:rPr sz="1050" b="0" lang="ar-SA" rtl="1">
                 <a:solidFill>
                   <a:srgbClr val="475569"/>
                 </a:solidFill>
                 <a:latin typeface="Arial"/>
-              </a:defRPr>
-            </a:pPr>
-            <a:r>
-              <a:t>مشروع تخرج LOCAL CONTACT — مناقشة أكاديمية محكمة</a:t>
+              </a:rPr>
+              <a:t>مناقشة مشروع التخرج الأكاديمية — نظام اتصال محلي مستقل دون خادم وسيط</a:t>
             </a:r>
           </a:p>
         </p:txBody>
@@ -11236,8 +12275,8 @@
         </p:nvSpPr>
         <p:spPr>
           <a:xfrm>
-            <a:off x="822960" y="1645920"/>
-            <a:ext cx="10515600" cy="4389120"/>
+            <a:off x="6217920" y="1554480"/>
+            <a:ext cx="5120640" cy="1828800"/>
           </a:xfrm>
           <a:prstGeom prst="roundRect">
             <a:avLst/>
@@ -11247,7 +12286,7 @@
           </a:solidFill>
           <a:ln w="19050">
             <a:solidFill>
-              <a:srgbClr val="059669"/>
+              <a:srgbClr val="CBD5E1"/>
             </a:solidFill>
           </a:ln>
         </p:spPr>
@@ -11269,96 +12308,368 @@
           <a:bodyPr rtlCol="0" anchor="ctr" wrap="square"/>
           <a:lstStyle/>
           <a:p>
-            <a:pPr algn="ctr">
-              <a:defRPr sz="2200" b="1">
+            <a:pPr algn="r" rtl="1"/>
+            <a:r>
+              <a:rPr sz="1900" b="1" lang="ar-SA" rtl="1">
                 <a:solidFill>
                   <a:srgbClr val="0F2B5C"/>
                 </a:solidFill>
                 <a:latin typeface="Arial"/>
-              </a:defRPr>
+              </a:rPr>
+              <a:t>اختبارات التشفير المتماثل</a:t>
+            </a:r>
+          </a:p>
+          <a:p>
+            <a:pPr algn="r" rtl="0">
+              <a:spcBef>
+                <a:spcPts val="300"/>
+              </a:spcBef>
             </a:pPr>
             <a:r>
-              <a:t>🧪 نتائج حزم الاختبارات المؤتمتة ومحدداتها المنهجية:</a:t>
-            </a:r>
-          </a:p>
-          <a:p>
-            <a:pPr>
+              <a:rPr sz="1300" b="1" lang="en-US" rtl="0">
+                <a:solidFill>
+                  <a:srgbClr val="059669"/>
+                </a:solidFill>
+                <a:latin typeface="Consolas"/>
+              </a:rPr>
+              <a:t>[LocalCryptoEngineTest: 10/10 Passed]</a:t>
+            </a:r>
+          </a:p>
+          <a:p>
+            <a:pPr algn="r" rtl="1">
               <a:spcBef>
-                <a:spcPts val="1200"/>
+                <a:spcPts val="600"/>
               </a:spcBef>
-              <a:defRPr sz="1700" b="1">
+            </a:pPr>
+            <a:r>
+              <a:rPr sz="1500" b="0" lang="ar-SA" rtl="1">
                 <a:solidFill>
                   <a:srgbClr val="0F172A"/>
                 </a:solidFill>
                 <a:latin typeface="Arial"/>
-              </a:defRPr>
+              </a:rPr>
+              <a:t>إثبات صحة التشفير وفك التشفير وعشوائية الأرقام ورفض النصوص المتلاعب بها آلياً.</a:t>
+            </a:r>
+          </a:p>
+        </p:txBody>
+      </p:sp>
+      <p:sp>
+        <p:nvSpPr>
+          <p:cNvPr id="10" name="Rounded Rectangle 9"/>
+          <p:cNvSpPr/>
+          <p:nvPr/>
+        </p:nvSpPr>
+        <p:spPr>
+          <a:xfrm>
+            <a:off x="822960" y="1554480"/>
+            <a:ext cx="5120640" cy="1828800"/>
+          </a:xfrm>
+          <a:prstGeom prst="roundRect">
+            <a:avLst/>
+          </a:prstGeom>
+          <a:solidFill>
+            <a:srgbClr val="F8FAFC"/>
+          </a:solidFill>
+          <a:ln w="19050">
+            <a:solidFill>
+              <a:srgbClr val="CBD5E1"/>
+            </a:solidFill>
+          </a:ln>
+        </p:spPr>
+        <p:style>
+          <a:lnRef idx="1">
+            <a:schemeClr val="accent1"/>
+          </a:lnRef>
+          <a:fillRef idx="3">
+            <a:schemeClr val="accent1"/>
+          </a:fillRef>
+          <a:effectRef idx="2">
+            <a:schemeClr val="accent1"/>
+          </a:effectRef>
+          <a:fontRef idx="minor">
+            <a:schemeClr val="lt1"/>
+          </a:fontRef>
+        </p:style>
+        <p:txBody>
+          <a:bodyPr rtlCol="0" anchor="ctr" wrap="square"/>
+          <a:lstStyle/>
+          <a:p>
+            <a:pPr algn="r" rtl="1"/>
+            <a:r>
+              <a:rPr sz="1900" b="1" lang="ar-SA" rtl="1">
+                <a:solidFill>
+                  <a:srgbClr val="0F2B5C"/>
+                </a:solidFill>
+                <a:latin typeface="Arial"/>
+              </a:rPr>
+              <a:t>اختبارات المنحنيات واشتقاق المفاتيح</a:t>
+            </a:r>
+          </a:p>
+          <a:p>
+            <a:pPr algn="r" rtl="0">
+              <a:spcBef>
+                <a:spcPts val="300"/>
+              </a:spcBef>
             </a:pPr>
             <a:r>
-              <a:t>• LocalCryptoEngineTest.kt (10 اختبارات): فحص التشفير، فك التشفير، كشف التلاعب بالبيانات، واشتقاق Nonce فريد للكتل.</a:t>
-            </a:r>
-          </a:p>
-          <a:p>
-            <a:pPr>
+              <a:rPr sz="1300" b="1" lang="en-US" rtl="0">
+                <a:solidFill>
+                  <a:srgbClr val="059669"/>
+                </a:solidFill>
+                <a:latin typeface="Consolas"/>
+              </a:rPr>
+              <a:t>[Ecdh &amp; KeyDerivation: 16/16 Passed]</a:t>
+            </a:r>
+          </a:p>
+          <a:p>
+            <a:pPr algn="r" rtl="1">
               <a:spcBef>
-                <a:spcPts val="1200"/>
+                <a:spcPts val="600"/>
               </a:spcBef>
-              <a:defRPr sz="1700" b="1">
+            </a:pPr>
+            <a:r>
+              <a:rPr sz="1500" b="0" lang="ar-SA" rtl="1">
                 <a:solidFill>
                   <a:srgbClr val="0F172A"/>
                 </a:solidFill>
                 <a:latin typeface="Arial"/>
-              </a:defRPr>
+              </a:rPr>
+              <a:t>إثبات توليد مفاتيح المنحنيات القياسية، وتطابق السر المشترك، والاشتقاق المعياري.</a:t>
+            </a:r>
+          </a:p>
+        </p:txBody>
+      </p:sp>
+      <p:sp>
+        <p:nvSpPr>
+          <p:cNvPr id="11" name="Rounded Rectangle 10"/>
+          <p:cNvSpPr/>
+          <p:nvPr/>
+        </p:nvSpPr>
+        <p:spPr>
+          <a:xfrm>
+            <a:off x="6217920" y="3566160"/>
+            <a:ext cx="5120640" cy="1828800"/>
+          </a:xfrm>
+          <a:prstGeom prst="roundRect">
+            <a:avLst/>
+          </a:prstGeom>
+          <a:solidFill>
+            <a:srgbClr val="F8FAFC"/>
+          </a:solidFill>
+          <a:ln w="19050">
+            <a:solidFill>
+              <a:srgbClr val="CBD5E1"/>
+            </a:solidFill>
+          </a:ln>
+        </p:spPr>
+        <p:style>
+          <a:lnRef idx="1">
+            <a:schemeClr val="accent1"/>
+          </a:lnRef>
+          <a:fillRef idx="3">
+            <a:schemeClr val="accent1"/>
+          </a:fillRef>
+          <a:effectRef idx="2">
+            <a:schemeClr val="accent1"/>
+          </a:effectRef>
+          <a:fontRef idx="minor">
+            <a:schemeClr val="lt1"/>
+          </a:fontRef>
+        </p:style>
+        <p:txBody>
+          <a:bodyPr rtlCol="0" anchor="ctr" wrap="square"/>
+          <a:lstStyle/>
+          <a:p>
+            <a:pPr algn="r" rtl="1"/>
+            <a:r>
+              <a:rPr sz="1900" b="1" lang="ar-SA" rtl="1">
+                <a:solidFill>
+                  <a:srgbClr val="0F2B5C"/>
+                </a:solidFill>
+                <a:latin typeface="Arial"/>
+              </a:rPr>
+              <a:t>اختبارات تكامل الجلسات المشفرة</a:t>
+            </a:r>
+          </a:p>
+          <a:p>
+            <a:pPr algn="r" rtl="0">
+              <a:spcBef>
+                <a:spcPts val="300"/>
+              </a:spcBef>
             </a:pPr>
             <a:r>
-              <a:t>• EcdhEngineTest.kt (8 اختبارات): فحص توليد مفاتيح P-256 المؤقتة، وتطابق السر المشترك، وتبادل المفاتيح بصيغة X.509.</a:t>
-            </a:r>
-          </a:p>
-          <a:p>
-            <a:pPr>
+              <a:rPr sz="1300" b="1" lang="en-US" rtl="0">
+                <a:solidFill>
+                  <a:srgbClr val="059669"/>
+                </a:solidFill>
+                <a:latin typeface="Consolas"/>
+              </a:rPr>
+              <a:t>[CryptoEngineTest: 7/7 Passed]</a:t>
+            </a:r>
+          </a:p>
+          <a:p>
+            <a:pPr algn="r" rtl="1">
               <a:spcBef>
-                <a:spcPts val="1200"/>
+                <a:spcPts val="600"/>
               </a:spcBef>
-              <a:defRPr sz="1700" b="1">
+            </a:pPr>
+            <a:r>
+              <a:rPr sz="1500" b="0" lang="ar-SA" rtl="1">
                 <a:solidFill>
                   <a:srgbClr val="0F172A"/>
                 </a:solidFill>
                 <a:latin typeface="Arial"/>
-              </a:defRPr>
+              </a:rPr>
+              <a:t>إثبات تكامل بروتوكول الجلسات المشفرة وحماية الرسائل من التعديل والانتحال.</a:t>
+            </a:r>
+          </a:p>
+        </p:txBody>
+      </p:sp>
+      <p:sp>
+        <p:nvSpPr>
+          <p:cNvPr id="12" name="Rounded Rectangle 11"/>
+          <p:cNvSpPr/>
+          <p:nvPr/>
+        </p:nvSpPr>
+        <p:spPr>
+          <a:xfrm>
+            <a:off x="822960" y="3566160"/>
+            <a:ext cx="5120640" cy="1828800"/>
+          </a:xfrm>
+          <a:prstGeom prst="roundRect">
+            <a:avLst/>
+          </a:prstGeom>
+          <a:solidFill>
+            <a:srgbClr val="F8FAFC"/>
+          </a:solidFill>
+          <a:ln w="19050">
+            <a:solidFill>
+              <a:srgbClr val="CBD5E1"/>
+            </a:solidFill>
+          </a:ln>
+        </p:spPr>
+        <p:style>
+          <a:lnRef idx="1">
+            <a:schemeClr val="accent1"/>
+          </a:lnRef>
+          <a:fillRef idx="3">
+            <a:schemeClr val="accent1"/>
+          </a:fillRef>
+          <a:effectRef idx="2">
+            <a:schemeClr val="accent1"/>
+          </a:effectRef>
+          <a:fontRef idx="minor">
+            <a:schemeClr val="lt1"/>
+          </a:fontRef>
+        </p:style>
+        <p:txBody>
+          <a:bodyPr rtlCol="0" anchor="ctr" wrap="square"/>
+          <a:lstStyle/>
+          <a:p>
+            <a:pPr algn="r" rtl="1"/>
+            <a:r>
+              <a:rPr sz="1900" b="1" lang="ar-SA" rtl="1">
+                <a:solidFill>
+                  <a:srgbClr val="0F2B5C"/>
+                </a:solidFill>
+                <a:latin typeface="Arial"/>
+              </a:rPr>
+              <a:t>الضوابط الأكاديمية الصريحة</a:t>
+            </a:r>
+          </a:p>
+          <a:p>
+            <a:pPr algn="r" rtl="0">
+              <a:spcBef>
+                <a:spcPts val="300"/>
+              </a:spcBef>
             </a:pPr>
             <a:r>
-              <a:t>• KeyDerivationTest.kt (8 اختبارات): فحص دالة اشتقاق المفاتيح HKDF-SHA256 وفق RFC 5869 ونواقل الاختبار الرسمية.</a:t>
-            </a:r>
-          </a:p>
-          <a:p>
-            <a:pPr>
+              <a:rPr sz="1300" b="1" lang="en-US" rtl="0">
+                <a:solidFill>
+                  <a:srgbClr val="D97706"/>
+                </a:solidFill>
+                <a:latin typeface="Consolas"/>
+              </a:rPr>
+              <a:t>[Scientific Testing Boundaries Acknowledged]</a:t>
+            </a:r>
+          </a:p>
+          <a:p>
+            <a:pPr algn="r" rtl="1">
               <a:spcBef>
-                <a:spcPts val="1200"/>
+                <a:spcPts val="600"/>
               </a:spcBef>
-              <a:defRPr sz="1700" b="1">
+            </a:pPr>
+            <a:r>
+              <a:rPr sz="1500" b="0" lang="ar-SA" rtl="1">
                 <a:solidFill>
                   <a:srgbClr val="0F172A"/>
                 </a:solidFill>
                 <a:latin typeface="Arial"/>
-              </a:defRPr>
-            </a:pPr>
-            <a:r>
-              <a:t>• CryptoEngineTest.kt (7 اختبارات): فحص بروتوكول الجلسات وحماية الإرسال والاستقبال المتزامن.</a:t>
-            </a:r>
-          </a:p>
-          <a:p>
-            <a:pPr>
-              <a:spcBef>
-                <a:spcPts val="1200"/>
-              </a:spcBef>
-              <a:defRPr sz="1700" b="1">
-                <a:solidFill>
-                  <a:srgbClr val="0F172A"/>
-                </a:solidFill>
-                <a:latin typeface="Arial"/>
-              </a:defRPr>
-            </a:pPr>
-            <a:r>
-              <a:t>• الضوابط الأكاديمية الصريحة: الاختبارات أثبتت صحة المنطق والرياضيات على JVM بنسبة 100%، لكنها لا تغني عن الاختبارات التكاملية على جهازين حقيقيين (Two Physical Devices) للتحقق من أداء الشبكة الواقعي.</a:t>
+              </a:rPr>
+              <a:t>الاختبارات أثبتت صحة المنطق والعمليات آلياً، وتظل بحاجة لاختبار الأجهزة الحقيقية للشبكة.</a:t>
+            </a:r>
+          </a:p>
+        </p:txBody>
+      </p:sp>
+      <p:sp>
+        <p:nvSpPr>
+          <p:cNvPr id="13" name="Rounded Rectangle 12"/>
+          <p:cNvSpPr/>
+          <p:nvPr/>
+        </p:nvSpPr>
+        <p:spPr>
+          <a:xfrm>
+            <a:off x="822960" y="5623560"/>
+            <a:ext cx="10515600" cy="594360"/>
+          </a:xfrm>
+          <a:prstGeom prst="roundRect">
+            <a:avLst/>
+          </a:prstGeom>
+          <a:solidFill>
+            <a:srgbClr val="F8FAFC"/>
+          </a:solidFill>
+          <a:ln w="12700">
+            <a:solidFill>
+              <a:srgbClr val="CBD5E1"/>
+            </a:solidFill>
+          </a:ln>
+        </p:spPr>
+        <p:style>
+          <a:lnRef idx="1">
+            <a:schemeClr val="accent1"/>
+          </a:lnRef>
+          <a:fillRef idx="3">
+            <a:schemeClr val="accent1"/>
+          </a:fillRef>
+          <a:effectRef idx="2">
+            <a:schemeClr val="accent1"/>
+          </a:effectRef>
+          <a:fontRef idx="minor">
+            <a:schemeClr val="lt1"/>
+          </a:fontRef>
+        </p:style>
+        <p:txBody>
+          <a:bodyPr rtlCol="0" anchor="ctr"/>
+          <a:lstStyle/>
+          <a:p>
+            <a:pPr algn="r" rtl="1"/>
+            <a:r>
+              <a:rPr sz="1200" b="1" lang="ar-SA" rtl="1">
+                <a:solidFill>
+                  <a:srgbClr val="0F2B5C"/>
+                </a:solidFill>
+                <a:latin typeface="Arial"/>
+              </a:rPr>
+              <a:t>المكون البرمجي: 33 اختبار وحدة آلي تم تشغيلها بنجاح 100% عبر أداة البناء  |  </a:t>
+            </a:r>
+            <a:r>
+              <a:rPr sz="1200" b="1" lang="en-US" rtl="0">
+                <a:solidFill>
+                  <a:srgbClr val="1E40AF"/>
+                </a:solidFill>
+                <a:latin typeface="Consolas"/>
+              </a:rPr>
+              <a:t>app/src/test/java/com/example/network/</a:t>
             </a:r>
           </a:p>
         </p:txBody>
